--- a/docs/MedOrchestra_Presentation.pptx
+++ b/docs/MedOrchestra_Presentation.pptx
@@ -21,9 +21,14 @@
     <p:sldId id="269" r:id="rId15"/>
     <p:sldId id="270" r:id="rId16"/>
     <p:sldId id="271" r:id="rId17"/>
+    <p:sldId id="272" r:id="rId18"/>
+    <p:sldId id="273" r:id="rId19"/>
+    <p:sldId id="274" r:id="rId20"/>
+    <p:sldId id="275" r:id="rId21"/>
+    <p:sldId id="276" r:id="rId22"/>
   </p:sldIdLst>
   <p:notesMasterIdLst>
-    <p:notesMasterId r:id="rId18"/>
+    <p:notesMasterId r:id="rId23"/>
   </p:notesMasterIdLst>
   <p:sldSz cx="12192000" cy="6858000"/>
   <p:notesSz cx="6858000" cy="12192000"/>
@@ -240,19 +245,19 @@
                 <c:formatCode>General</c:formatCode>
                 <c:ptCount val="5"/>
                 <c:pt idx="0">
-                  <c:v>7.87</c:v>
+                  <c:v>9.74</c:v>
                 </c:pt>
                 <c:pt idx="1">
-                  <c:v>7.73</c:v>
+                  <c:v>6.71</c:v>
                 </c:pt>
                 <c:pt idx="2">
-                  <c:v>3.68</c:v>
+                  <c:v>5.46</c:v>
                 </c:pt>
                 <c:pt idx="3">
-                  <c:v>2.14</c:v>
+                  <c:v>3.07</c:v>
                 </c:pt>
                 <c:pt idx="4">
-                  <c:v>3.16</c:v>
+                  <c:v>2.13</c:v>
                 </c:pt>
               </c:numCache>
             </c:numRef>
@@ -335,19 +340,19 @@
                 <c:formatCode>General</c:formatCode>
                 <c:ptCount val="5"/>
                 <c:pt idx="0">
-                  <c:v>11.43</c:v>
+                  <c:v>8.53</c:v>
                 </c:pt>
                 <c:pt idx="1">
-                  <c:v>7.77</c:v>
+                  <c:v>8.71</c:v>
                 </c:pt>
                 <c:pt idx="2">
-                  <c:v>5.34</c:v>
+                  <c:v>6.66</c:v>
                 </c:pt>
                 <c:pt idx="3">
-                  <c:v>3.36</c:v>
+                  <c:v>4.14</c:v>
                 </c:pt>
                 <c:pt idx="4">
-                  <c:v>4.95</c:v>
+                  <c:v>2.33</c:v>
                 </c:pt>
               </c:numCache>
             </c:numRef>
@@ -1083,7 +1088,7 @@
           <a:p>
             <a:r>
               <a:rPr lang="en-US" dirty="0"/>
-              <a:t>All numbers are produced by our evaluation script on the synthetic data. They demonstrate correctness and feasibility; clinical effectiveness would need a real hospital study.</a:t>
+              <a:t>Demo: click Random call on the Ambulance page. Show the unit moving, then the toast when the crew leaves the scene, then approve the bay before the patient arrives.</a:t>
             </a:r>
             <a:endParaRPr lang="en-US" dirty="0"/>
           </a:p>
@@ -1171,7 +1176,7 @@
           <a:p>
             <a:r>
               <a:rPr lang="en-US" dirty="0"/>
-              <a:t>Forecasts feed the Resource Optimization Agent: peak days and ICU occupancy above 90% trigger recommendations such as pre-emptive discharges.</a:t>
+              <a:t>Presets: dengue surge, mass-casualty incident, nursing absence, ICU closure. Each recommendation can be applied in the twin and re-run, so the panel answers "what should we do", not just "what will happen".</a:t>
             </a:r>
             <a:endParaRPr lang="en-US" dirty="0"/>
           </a:p>
@@ -1259,7 +1264,7 @@
           <a:p>
             <a:r>
               <a:rPr lang="en-US" dirty="0"/>
-              <a:t>Mention Ctrl+K global search, voice input in the console, printable discharge summaries and the installable PWA.</a:t>
+              <a:t>Charges carry a stable reference, so re-syncing updates bed-days without duplicating lines. Cost estimates use the P10/P50/P90 stay from the LOS model. On discharge the invoice is finalised and the PM-JAY claim filed automatically.</a:t>
             </a:r>
             <a:endParaRPr lang="en-US" dirty="0"/>
           </a:p>
@@ -1347,7 +1352,7 @@
           <a:p>
             <a:r>
               <a:rPr lang="en-US" dirty="0"/>
-              <a:t>Tests run in about 15 seconds with a fresh database. Integration tests cover the complete human-in-the-loop flow including rollback on rejection.</a:t>
+              <a:t>These are the features clinicians actually touch during a shift. Mention that the copilot is available on every page and that approvals can be decided inside the chat.</a:t>
             </a:r>
             <a:endParaRPr lang="en-US" dirty="0"/>
           </a:p>
@@ -1435,7 +1440,7 @@
           <a:p>
             <a:r>
               <a:rPr lang="en-US" dirty="0"/>
-              <a:t>Close with the limitation: data is synthetic and integrations are simulated; clinical validation is the next step.</a:t>
+              <a:t>This slide usually answers the examiner question about trust: we report leakage-free validation, not training accuracy, and we show how often a human disagreed with the system.</a:t>
             </a:r>
             <a:endParaRPr lang="en-US" dirty="0"/>
           </a:p>
@@ -1523,7 +1528,7 @@
           <a:p>
             <a:r>
               <a:rPr lang="en-US" dirty="0"/>
-              <a:t>Keep the app running before the viva: start.bat, then log in as admin.</a:t>
+              <a:t>All numbers are produced by our evaluation script on the synthetic data. They demonstrate correctness and feasibility; clinical effectiveness would need a real hospital study.</a:t>
             </a:r>
             <a:endParaRPr lang="en-US" dirty="0"/>
           </a:p>
@@ -1547,6 +1552,270 @@
             <a:fld id="{F7021451-1387-4CA6-816F-3879F97B5CBC}" type="slidenum">
               <a:rPr lang="en-US"/>
               <a:t>16</a:t>
+            </a:fld>
+            <a:endParaRPr lang="en-US"/>
+          </a:p>
+        </p:txBody>
+      </p:sp>
+    </p:spTree>
+    <p:extLst>
+      <p:ext uri="{BB962C8B-B14F-4D97-AF65-F5344CB8AC3E}">
+        <p14:creationId xmlns:p14="http://schemas.microsoft.com/office/powerpoint/2010/main" val="1024086991"/>
+      </p:ext>
+    </p:extLst>
+  </p:cSld>
+  <p:clrMapOvr>
+    <a:masterClrMapping/>
+  </p:clrMapOvr>
+</p:notes>
+</file>
+
+<file path=ppt/notesSlides/notesSlide17.xml><?xml version="1.0" encoding="utf-8"?>
+<p:notes xmlns:a="http://schemas.openxmlformats.org/drawingml/2006/main" xmlns:r="http://schemas.openxmlformats.org/officeDocument/2006/relationships" xmlns:p="http://schemas.openxmlformats.org/presentationml/2006/main">
+  <p:cSld>
+    <p:spTree>
+      <p:nvGrpSpPr>
+        <p:cNvPr id="1" name=""/>
+        <p:cNvGrpSpPr/>
+        <p:nvPr/>
+      </p:nvGrpSpPr>
+      <p:grpSpPr>
+        <a:xfrm>
+          <a:off x="0" y="0"/>
+          <a:ext cx="0" cy="0"/>
+          <a:chOff x="0" y="0"/>
+          <a:chExt cx="0" cy="0"/>
+        </a:xfrm>
+      </p:grpSpPr>
+      <p:sp>
+        <p:nvSpPr>
+          <p:cNvPr id="2" name="Slide Image Placeholder 1"/>
+          <p:cNvSpPr>
+            <a:spLocks noGrp="1" noRot="1" noChangeAspect="1"/>
+          </p:cNvSpPr>
+          <p:nvPr>
+            <p:ph type="sldImg"/>
+          </p:nvPr>
+        </p:nvSpPr>
+        <p:spPr/>
+      </p:sp>
+      <p:sp>
+        <p:nvSpPr>
+          <p:cNvPr id="3" name="Notes Placeholder 2"/>
+          <p:cNvSpPr>
+            <a:spLocks noGrp="1"/>
+          </p:cNvSpPr>
+          <p:nvPr>
+            <p:ph type="body" idx="1"/>
+          </p:nvPr>
+        </p:nvSpPr>
+        <p:spPr/>
+        <p:txBody>
+          <a:bodyPr/>
+          <a:lstStyle/>
+          <a:p>
+            <a:r>
+              <a:rPr lang="en-US" dirty="0"/>
+              <a:t>Forecasts feed the Resource Optimization Agent: peak days and ICU occupancy above 90% trigger recommendations such as pre-emptive discharges. Be upfront that the naive baseline is slightly better on daily admissions — the noisiest series — and that we report it as measured.</a:t>
+            </a:r>
+            <a:endParaRPr lang="en-US" dirty="0"/>
+          </a:p>
+        </p:txBody>
+      </p:sp>
+      <p:sp>
+        <p:nvSpPr>
+          <p:cNvPr id="4" name="Slide Number Placeholder 3"/>
+          <p:cNvSpPr>
+            <a:spLocks noGrp="1"/>
+          </p:cNvSpPr>
+          <p:nvPr>
+            <p:ph type="sldNum" sz="quarter" idx="10"/>
+          </p:nvPr>
+        </p:nvSpPr>
+        <p:spPr/>
+        <p:txBody>
+          <a:bodyPr/>
+          <a:lstStyle/>
+          <a:p>
+            <a:fld id="{F7021451-1387-4CA6-816F-3879F97B5CBC}" type="slidenum">
+              <a:rPr lang="en-US"/>
+              <a:t>17</a:t>
+            </a:fld>
+            <a:endParaRPr lang="en-US"/>
+          </a:p>
+        </p:txBody>
+      </p:sp>
+    </p:spTree>
+    <p:extLst>
+      <p:ext uri="{BB962C8B-B14F-4D97-AF65-F5344CB8AC3E}">
+        <p14:creationId xmlns:p14="http://schemas.microsoft.com/office/powerpoint/2010/main" val="1024086991"/>
+      </p:ext>
+    </p:extLst>
+  </p:cSld>
+  <p:clrMapOvr>
+    <a:masterClrMapping/>
+  </p:clrMapOvr>
+</p:notes>
+</file>
+
+<file path=ppt/notesSlides/notesSlide18.xml><?xml version="1.0" encoding="utf-8"?>
+<p:notes xmlns:a="http://schemas.openxmlformats.org/drawingml/2006/main" xmlns:r="http://schemas.openxmlformats.org/officeDocument/2006/relationships" xmlns:p="http://schemas.openxmlformats.org/presentationml/2006/main">
+  <p:cSld>
+    <p:spTree>
+      <p:nvGrpSpPr>
+        <p:cNvPr id="1" name=""/>
+        <p:cNvGrpSpPr/>
+        <p:nvPr/>
+      </p:nvGrpSpPr>
+      <p:grpSpPr>
+        <a:xfrm>
+          <a:off x="0" y="0"/>
+          <a:ext cx="0" cy="0"/>
+          <a:chOff x="0" y="0"/>
+          <a:chExt cx="0" cy="0"/>
+        </a:xfrm>
+      </p:grpSpPr>
+      <p:sp>
+        <p:nvSpPr>
+          <p:cNvPr id="2" name="Slide Image Placeholder 1"/>
+          <p:cNvSpPr>
+            <a:spLocks noGrp="1" noRot="1" noChangeAspect="1"/>
+          </p:cNvSpPr>
+          <p:nvPr>
+            <p:ph type="sldImg"/>
+          </p:nvPr>
+        </p:nvSpPr>
+        <p:spPr/>
+      </p:sp>
+      <p:sp>
+        <p:nvSpPr>
+          <p:cNvPr id="3" name="Notes Placeholder 2"/>
+          <p:cNvSpPr>
+            <a:spLocks noGrp="1"/>
+          </p:cNvSpPr>
+          <p:nvPr>
+            <p:ph type="body" idx="1"/>
+          </p:nvPr>
+        </p:nvSpPr>
+        <p:spPr/>
+        <p:txBody>
+          <a:bodyPr/>
+          <a:lstStyle/>
+          <a:p>
+            <a:r>
+              <a:rPr lang="en-US" dirty="0"/>
+              <a:t>Mention Ctrl+K global search, voice input in the console, printable discharge summaries and the installable PWA.</a:t>
+            </a:r>
+            <a:endParaRPr lang="en-US" dirty="0"/>
+          </a:p>
+        </p:txBody>
+      </p:sp>
+      <p:sp>
+        <p:nvSpPr>
+          <p:cNvPr id="4" name="Slide Number Placeholder 3"/>
+          <p:cNvSpPr>
+            <a:spLocks noGrp="1"/>
+          </p:cNvSpPr>
+          <p:nvPr>
+            <p:ph type="sldNum" sz="quarter" idx="10"/>
+          </p:nvPr>
+        </p:nvSpPr>
+        <p:spPr/>
+        <p:txBody>
+          <a:bodyPr/>
+          <a:lstStyle/>
+          <a:p>
+            <a:fld id="{F7021451-1387-4CA6-816F-3879F97B5CBC}" type="slidenum">
+              <a:rPr lang="en-US"/>
+              <a:t>18</a:t>
+            </a:fld>
+            <a:endParaRPr lang="en-US"/>
+          </a:p>
+        </p:txBody>
+      </p:sp>
+    </p:spTree>
+    <p:extLst>
+      <p:ext uri="{BB962C8B-B14F-4D97-AF65-F5344CB8AC3E}">
+        <p14:creationId xmlns:p14="http://schemas.microsoft.com/office/powerpoint/2010/main" val="1024086991"/>
+      </p:ext>
+    </p:extLst>
+  </p:cSld>
+  <p:clrMapOvr>
+    <a:masterClrMapping/>
+  </p:clrMapOvr>
+</p:notes>
+</file>
+
+<file path=ppt/notesSlides/notesSlide19.xml><?xml version="1.0" encoding="utf-8"?>
+<p:notes xmlns:a="http://schemas.openxmlformats.org/drawingml/2006/main" xmlns:r="http://schemas.openxmlformats.org/officeDocument/2006/relationships" xmlns:p="http://schemas.openxmlformats.org/presentationml/2006/main">
+  <p:cSld>
+    <p:spTree>
+      <p:nvGrpSpPr>
+        <p:cNvPr id="1" name=""/>
+        <p:cNvGrpSpPr/>
+        <p:nvPr/>
+      </p:nvGrpSpPr>
+      <p:grpSpPr>
+        <a:xfrm>
+          <a:off x="0" y="0"/>
+          <a:ext cx="0" cy="0"/>
+          <a:chOff x="0" y="0"/>
+          <a:chExt cx="0" cy="0"/>
+        </a:xfrm>
+      </p:grpSpPr>
+      <p:sp>
+        <p:nvSpPr>
+          <p:cNvPr id="2" name="Slide Image Placeholder 1"/>
+          <p:cNvSpPr>
+            <a:spLocks noGrp="1" noRot="1" noChangeAspect="1"/>
+          </p:cNvSpPr>
+          <p:nvPr>
+            <p:ph type="sldImg"/>
+          </p:nvPr>
+        </p:nvSpPr>
+        <p:spPr/>
+      </p:sp>
+      <p:sp>
+        <p:nvSpPr>
+          <p:cNvPr id="3" name="Notes Placeholder 2"/>
+          <p:cNvSpPr>
+            <a:spLocks noGrp="1"/>
+          </p:cNvSpPr>
+          <p:nvPr>
+            <p:ph type="body" idx="1"/>
+          </p:nvPr>
+        </p:nvSpPr>
+        <p:spPr/>
+        <p:txBody>
+          <a:bodyPr/>
+          <a:lstStyle/>
+          <a:p>
+            <a:r>
+              <a:rPr lang="en-US" dirty="0"/>
+              <a:t>Tests run in about 15 seconds with a fresh database. Integration tests cover the complete human-in-the-loop flow including rollback on rejection.</a:t>
+            </a:r>
+            <a:endParaRPr lang="en-US" dirty="0"/>
+          </a:p>
+        </p:txBody>
+      </p:sp>
+      <p:sp>
+        <p:nvSpPr>
+          <p:cNvPr id="4" name="Slide Number Placeholder 3"/>
+          <p:cNvSpPr>
+            <a:spLocks noGrp="1"/>
+          </p:cNvSpPr>
+          <p:nvPr>
+            <p:ph type="sldNum" sz="quarter" idx="10"/>
+          </p:nvPr>
+        </p:nvSpPr>
+        <p:spPr/>
+        <p:txBody>
+          <a:bodyPr/>
+          <a:lstStyle/>
+          <a:p>
+            <a:fld id="{F7021451-1387-4CA6-816F-3879F97B5CBC}" type="slidenum">
+              <a:rPr lang="en-US"/>
+              <a:t>19</a:t>
             </a:fld>
             <a:endParaRPr lang="en-US"/>
           </a:p>
@@ -1653,6 +1922,182 @@
 </p:notes>
 </file>
 
+<file path=ppt/notesSlides/notesSlide20.xml><?xml version="1.0" encoding="utf-8"?>
+<p:notes xmlns:a="http://schemas.openxmlformats.org/drawingml/2006/main" xmlns:r="http://schemas.openxmlformats.org/officeDocument/2006/relationships" xmlns:p="http://schemas.openxmlformats.org/presentationml/2006/main">
+  <p:cSld>
+    <p:spTree>
+      <p:nvGrpSpPr>
+        <p:cNvPr id="1" name=""/>
+        <p:cNvGrpSpPr/>
+        <p:nvPr/>
+      </p:nvGrpSpPr>
+      <p:grpSpPr>
+        <a:xfrm>
+          <a:off x="0" y="0"/>
+          <a:ext cx="0" cy="0"/>
+          <a:chOff x="0" y="0"/>
+          <a:chExt cx="0" cy="0"/>
+        </a:xfrm>
+      </p:grpSpPr>
+      <p:sp>
+        <p:nvSpPr>
+          <p:cNvPr id="2" name="Slide Image Placeholder 1"/>
+          <p:cNvSpPr>
+            <a:spLocks noGrp="1" noRot="1" noChangeAspect="1"/>
+          </p:cNvSpPr>
+          <p:nvPr>
+            <p:ph type="sldImg"/>
+          </p:nvPr>
+        </p:nvSpPr>
+        <p:spPr/>
+      </p:sp>
+      <p:sp>
+        <p:nvSpPr>
+          <p:cNvPr id="3" name="Notes Placeholder 2"/>
+          <p:cNvSpPr>
+            <a:spLocks noGrp="1"/>
+          </p:cNvSpPr>
+          <p:nvPr>
+            <p:ph type="body" idx="1"/>
+          </p:nvPr>
+        </p:nvSpPr>
+        <p:spPr/>
+        <p:txBody>
+          <a:bodyPr/>
+          <a:lstStyle/>
+          <a:p>
+            <a:r>
+              <a:rPr lang="en-US" dirty="0"/>
+              <a:t>Close with the limitation: data is synthetic and integrations are simulated; clinical validation is the next step.</a:t>
+            </a:r>
+            <a:endParaRPr lang="en-US" dirty="0"/>
+          </a:p>
+        </p:txBody>
+      </p:sp>
+      <p:sp>
+        <p:nvSpPr>
+          <p:cNvPr id="4" name="Slide Number Placeholder 3"/>
+          <p:cNvSpPr>
+            <a:spLocks noGrp="1"/>
+          </p:cNvSpPr>
+          <p:nvPr>
+            <p:ph type="sldNum" sz="quarter" idx="10"/>
+          </p:nvPr>
+        </p:nvSpPr>
+        <p:spPr/>
+        <p:txBody>
+          <a:bodyPr/>
+          <a:lstStyle/>
+          <a:p>
+            <a:fld id="{F7021451-1387-4CA6-816F-3879F97B5CBC}" type="slidenum">
+              <a:rPr lang="en-US"/>
+              <a:t>20</a:t>
+            </a:fld>
+            <a:endParaRPr lang="en-US"/>
+          </a:p>
+        </p:txBody>
+      </p:sp>
+    </p:spTree>
+    <p:extLst>
+      <p:ext uri="{BB962C8B-B14F-4D97-AF65-F5344CB8AC3E}">
+        <p14:creationId xmlns:p14="http://schemas.microsoft.com/office/powerpoint/2010/main" val="1024086991"/>
+      </p:ext>
+    </p:extLst>
+  </p:cSld>
+  <p:clrMapOvr>
+    <a:masterClrMapping/>
+  </p:clrMapOvr>
+</p:notes>
+</file>
+
+<file path=ppt/notesSlides/notesSlide21.xml><?xml version="1.0" encoding="utf-8"?>
+<p:notes xmlns:a="http://schemas.openxmlformats.org/drawingml/2006/main" xmlns:r="http://schemas.openxmlformats.org/officeDocument/2006/relationships" xmlns:p="http://schemas.openxmlformats.org/presentationml/2006/main">
+  <p:cSld>
+    <p:spTree>
+      <p:nvGrpSpPr>
+        <p:cNvPr id="1" name=""/>
+        <p:cNvGrpSpPr/>
+        <p:nvPr/>
+      </p:nvGrpSpPr>
+      <p:grpSpPr>
+        <a:xfrm>
+          <a:off x="0" y="0"/>
+          <a:ext cx="0" cy="0"/>
+          <a:chOff x="0" y="0"/>
+          <a:chExt cx="0" cy="0"/>
+        </a:xfrm>
+      </p:grpSpPr>
+      <p:sp>
+        <p:nvSpPr>
+          <p:cNvPr id="2" name="Slide Image Placeholder 1"/>
+          <p:cNvSpPr>
+            <a:spLocks noGrp="1" noRot="1" noChangeAspect="1"/>
+          </p:cNvSpPr>
+          <p:nvPr>
+            <p:ph type="sldImg"/>
+          </p:nvPr>
+        </p:nvSpPr>
+        <p:spPr/>
+      </p:sp>
+      <p:sp>
+        <p:nvSpPr>
+          <p:cNvPr id="3" name="Notes Placeholder 2"/>
+          <p:cNvSpPr>
+            <a:spLocks noGrp="1"/>
+          </p:cNvSpPr>
+          <p:nvPr>
+            <p:ph type="body" idx="1"/>
+          </p:nvPr>
+        </p:nvSpPr>
+        <p:spPr/>
+        <p:txBody>
+          <a:bodyPr/>
+          <a:lstStyle/>
+          <a:p>
+            <a:r>
+              <a:rPr lang="en-US" dirty="0"/>
+              <a:t>Keep the app running before the viva: start.bat, then log in as admin.</a:t>
+            </a:r>
+            <a:endParaRPr lang="en-US" dirty="0"/>
+          </a:p>
+        </p:txBody>
+      </p:sp>
+      <p:sp>
+        <p:nvSpPr>
+          <p:cNvPr id="4" name="Slide Number Placeholder 3"/>
+          <p:cNvSpPr>
+            <a:spLocks noGrp="1"/>
+          </p:cNvSpPr>
+          <p:nvPr>
+            <p:ph type="sldNum" sz="quarter" idx="10"/>
+          </p:nvPr>
+        </p:nvSpPr>
+        <p:spPr/>
+        <p:txBody>
+          <a:bodyPr/>
+          <a:lstStyle/>
+          <a:p>
+            <a:fld id="{F7021451-1387-4CA6-816F-3879F97B5CBC}" type="slidenum">
+              <a:rPr lang="en-US"/>
+              <a:t>21</a:t>
+            </a:fld>
+            <a:endParaRPr lang="en-US"/>
+          </a:p>
+        </p:txBody>
+      </p:sp>
+    </p:spTree>
+    <p:extLst>
+      <p:ext uri="{BB962C8B-B14F-4D97-AF65-F5344CB8AC3E}">
+        <p14:creationId xmlns:p14="http://schemas.microsoft.com/office/powerpoint/2010/main" val="1024086991"/>
+      </p:ext>
+    </p:extLst>
+  </p:cSld>
+  <p:clrMapOvr>
+    <a:masterClrMapping/>
+  </p:clrMapOvr>
+</p:notes>
+</file>
+
 <file path=ppt/notesSlides/notesSlide3.xml><?xml version="1.0" encoding="utf-8"?>
 <p:notes xmlns:a="http://schemas.openxmlformats.org/drawingml/2006/main" xmlns:r="http://schemas.openxmlformats.org/officeDocument/2006/relationships" xmlns:p="http://schemas.openxmlformats.org/presentationml/2006/main">
   <p:cSld>
@@ -1699,7 +2144,7 @@
           <a:p>
             <a:r>
               <a:rPr lang="en-US" dirty="0"/>
-              <a:t>Instead of one big AI model we use nine agents: the eight from the synopsis plus a Notification agent. The orchestrator plans which agents are needed, they share findings on a blackboard and talk using FIPA performatives like PROPOSE and REFUSE.</a:t>
+              <a:t>Instead of one big AI model we use eleven agents: the eight from the synopsis plus Notification, Billing &amp; Insurance and Ambulance Dispatch. The orchestrator plans which agents are needed, they share findings on a blackboard and talk using FIPA performatives like PROPOSE and REFUSE.</a:t>
             </a:r>
             <a:endParaRPr lang="en-US" dirty="0"/>
           </a:p>
@@ -2870,12 +3315,12 @@
         </p:nvSpPr>
         <p:spPr>
           <a:xfrm>
-            <a:off x="6583680" y="765810"/>
-            <a:ext cx="5120640" cy="5326380"/>
+            <a:off x="6583680" y="1623060"/>
+            <a:ext cx="5120640" cy="3611880"/>
           </a:xfrm>
           <a:prstGeom prst="roundRect">
             <a:avLst>
-              <a:gd name="adj" fmla="val 1429"/>
+              <a:gd name="adj" fmla="val 2025"/>
             </a:avLst>
           </a:prstGeom>
           <a:solidFill>
@@ -2905,8 +3350,8 @@
         </p:blipFill>
         <p:spPr>
           <a:xfrm>
-            <a:off x="6675120" y="857250"/>
-            <a:ext cx="4937760" cy="5143500"/>
+            <a:off x="6675120" y="1714500"/>
+            <a:ext cx="4937760" cy="3429000"/>
           </a:xfrm>
           <a:prstGeom prst="rect">
             <a:avLst/>
@@ -3582,6 +4027,923 @@
     <p:bg>
       <p:bgPr>
         <a:solidFill>
+          <a:srgbClr val="F6FAF9"/>
+        </a:solidFill>
+      </p:bgPr>
+    </p:bg>
+    <p:spTree>
+      <p:nvGrpSpPr>
+        <p:cNvPr id="1" name=""/>
+        <p:cNvGrpSpPr/>
+        <p:nvPr/>
+      </p:nvGrpSpPr>
+      <p:grpSpPr>
+        <a:xfrm>
+          <a:off x="0" y="0"/>
+          <a:ext cx="0" cy="0"/>
+          <a:chOff x="0" y="0"/>
+          <a:chExt cx="0" cy="0"/>
+        </a:xfrm>
+      </p:grpSpPr>
+      <p:sp>
+        <p:nvSpPr>
+          <p:cNvPr id="2" name="Text 0"/>
+          <p:cNvSpPr txBox="1"/>
+          <p:nvPr/>
+        </p:nvSpPr>
+        <p:spPr>
+          <a:xfrm>
+            <a:off x="548640" y="365760"/>
+            <a:ext cx="11064240" cy="640080"/>
+          </a:xfrm>
+          <a:prstGeom prst="rect">
+            <a:avLst/>
+          </a:prstGeom>
+          <a:noFill/>
+          <a:ln/>
+        </p:spPr>
+        <p:txBody>
+          <a:bodyPr wrap="square" lIns="0" tIns="0" rIns="0" bIns="0" rtlCol="0" anchor="ctr"/>
+          <a:lstStyle/>
+          <a:p>
+            <a:pPr indent="0" marL="0">
+              <a:buNone/>
+            </a:pPr>
+            <a:r>
+              <a:rPr lang="en-US" sz="3200" b="1" dirty="0">
+                <a:solidFill>
+                  <a:srgbClr val="0F5C54"/>
+                </a:solidFill>
+                <a:latin typeface="Cambria" pitchFamily="34" charset="0"/>
+                <a:ea typeface="Cambria" pitchFamily="34" charset="-122"/>
+                <a:cs typeface="Cambria" pitchFamily="34" charset="-120"/>
+              </a:rPr>
+              <a:t>Care starts before the hospital</a:t>
+            </a:r>
+            <a:endParaRPr lang="en-US" sz="3200" dirty="0"/>
+          </a:p>
+        </p:txBody>
+      </p:sp>
+      <p:sp>
+        <p:nvSpPr>
+          <p:cNvPr id="3" name="Text 1"/>
+          <p:cNvSpPr txBox="1"/>
+          <p:nvPr/>
+        </p:nvSpPr>
+        <p:spPr>
+          <a:xfrm>
+            <a:off x="548640" y="1005840"/>
+            <a:ext cx="11064240" cy="365760"/>
+          </a:xfrm>
+          <a:prstGeom prst="rect">
+            <a:avLst/>
+          </a:prstGeom>
+          <a:noFill/>
+          <a:ln/>
+        </p:spPr>
+        <p:txBody>
+          <a:bodyPr wrap="square" lIns="0" tIns="0" rIns="0" bIns="0" rtlCol="0" anchor="t"/>
+          <a:lstStyle/>
+          <a:p>
+            <a:pPr indent="0" marL="0">
+              <a:buNone/>
+            </a:pPr>
+            <a:r>
+              <a:rPr lang="en-US" sz="1500" i="1" dirty="0">
+                <a:solidFill>
+                  <a:srgbClr val="64748B"/>
+                </a:solidFill>
+                <a:latin typeface="Calibri" pitchFamily="34" charset="0"/>
+                <a:ea typeface="Calibri" pitchFamily="34" charset="-122"/>
+                <a:cs typeface="Calibri" pitchFamily="34" charset="-120"/>
+              </a:rPr>
+              <a:t>108 dispatch → live tracking → ED pre-alert: the bay and the team are ready when the patient arrives</a:t>
+            </a:r>
+            <a:endParaRPr lang="en-US" sz="1500" dirty="0"/>
+          </a:p>
+        </p:txBody>
+      </p:sp>
+      <p:sp>
+        <p:nvSpPr>
+          <p:cNvPr id="4" name="Shape 2"/>
+          <p:cNvSpPr/>
+          <p:nvPr/>
+        </p:nvSpPr>
+        <p:spPr>
+          <a:xfrm>
+            <a:off x="584955" y="1463040"/>
+            <a:ext cx="6968251" cy="5120640"/>
+          </a:xfrm>
+          <a:prstGeom prst="roundRect">
+            <a:avLst>
+              <a:gd name="adj" fmla="val 1429"/>
+            </a:avLst>
+          </a:prstGeom>
+          <a:solidFill>
+            <a:srgbClr val="FFFFFF"/>
+          </a:solidFill>
+          <a:ln w="9525">
+            <a:solidFill>
+              <a:srgbClr val="E2E8F0"/>
+            </a:solidFill>
+            <a:prstDash val="solid"/>
+          </a:ln>
+          <a:effectLst>
+            <a:outerShdw sx="100000" sy="100000" kx="0" ky="0" algn="bl" rotWithShape="0" blurRad="101600" dist="25400" dir="5400000">
+              <a:srgbClr val="000000">
+                <a:alpha val="14000"/>
+              </a:srgbClr>
+            </a:outerShdw>
+          </a:effectLst>
+        </p:spPr>
+      </p:sp>
+      <p:pic>
+        <p:nvPicPr>
+          <p:cNvPr id="5" name="Image 0" descr="C:\Users\HP\AppData\Local\Temp\claude\D--codin-idea-lab\87151ddf-948a-4e83-8159-c0449757400e\scratchpad\report\shots\ambulance.png">    </p:cNvPr>
+          <p:cNvPicPr>
+            <a:picLocks noChangeAspect="1"/>
+          </p:cNvPicPr>
+          <p:nvPr/>
+        </p:nvPicPr>
+        <p:blipFill>
+          <a:blip r:embed="rId1"/>
+          <a:stretch>
+            <a:fillRect/>
+          </a:stretch>
+        </p:blipFill>
+        <p:spPr>
+          <a:xfrm>
+            <a:off x="658107" y="1536192"/>
+            <a:ext cx="6821947" cy="4974336"/>
+          </a:xfrm>
+          <a:prstGeom prst="rect">
+            <a:avLst/>
+          </a:prstGeom>
+        </p:spPr>
+      </p:pic>
+      <p:sp>
+        <p:nvSpPr>
+          <p:cNvPr id="6" name="Shape 3"/>
+          <p:cNvSpPr/>
+          <p:nvPr/>
+        </p:nvSpPr>
+        <p:spPr>
+          <a:xfrm>
+            <a:off x="8001000" y="1600200"/>
+            <a:ext cx="411480" cy="411480"/>
+          </a:xfrm>
+          <a:prstGeom prst="ellipse">
+            <a:avLst/>
+          </a:prstGeom>
+          <a:solidFill>
+            <a:srgbClr val="0F5C54"/>
+          </a:solidFill>
+          <a:ln w="12700">
+            <a:solidFill>
+              <a:srgbClr val="0F5C54"/>
+            </a:solidFill>
+            <a:prstDash val="solid"/>
+          </a:ln>
+        </p:spPr>
+      </p:sp>
+      <p:sp>
+        <p:nvSpPr>
+          <p:cNvPr id="7" name="Text 4"/>
+          <p:cNvSpPr txBox="1"/>
+          <p:nvPr/>
+        </p:nvSpPr>
+        <p:spPr>
+          <a:xfrm>
+            <a:off x="8001000" y="1600200"/>
+            <a:ext cx="411480" cy="411480"/>
+          </a:xfrm>
+          <a:prstGeom prst="rect">
+            <a:avLst/>
+          </a:prstGeom>
+          <a:noFill/>
+          <a:ln/>
+        </p:spPr>
+        <p:txBody>
+          <a:bodyPr wrap="square" lIns="0" tIns="0" rIns="0" bIns="0" rtlCol="0" anchor="ctr"/>
+          <a:lstStyle/>
+          <a:p>
+            <a:pPr algn="ctr" indent="0" marL="0">
+              <a:buNone/>
+            </a:pPr>
+            <a:r>
+              <a:rPr lang="en-US" sz="1200" b="1" dirty="0">
+                <a:solidFill>
+                  <a:srgbClr val="FFFFFF"/>
+                </a:solidFill>
+                <a:latin typeface="Calibri" pitchFamily="34" charset="0"/>
+                <a:ea typeface="Calibri" pitchFamily="34" charset="-122"/>
+                <a:cs typeface="Calibri" pitchFamily="34" charset="-120"/>
+              </a:rPr>
+              <a:t>1</a:t>
+            </a:r>
+            <a:endParaRPr lang="en-US" sz="1200" dirty="0"/>
+          </a:p>
+        </p:txBody>
+      </p:sp>
+      <p:sp>
+        <p:nvSpPr>
+          <p:cNvPr id="8" name="Text 5"/>
+          <p:cNvSpPr txBox="1"/>
+          <p:nvPr/>
+        </p:nvSpPr>
+        <p:spPr>
+          <a:xfrm>
+            <a:off x="8595360" y="1581912"/>
+            <a:ext cx="3108960" cy="320040"/>
+          </a:xfrm>
+          <a:prstGeom prst="rect">
+            <a:avLst/>
+          </a:prstGeom>
+          <a:noFill/>
+          <a:ln/>
+        </p:spPr>
+        <p:txBody>
+          <a:bodyPr wrap="square" lIns="0" tIns="0" rIns="0" bIns="0" rtlCol="0" anchor="t"/>
+          <a:lstStyle/>
+          <a:p>
+            <a:pPr indent="0" marL="0">
+              <a:buNone/>
+            </a:pPr>
+            <a:r>
+              <a:rPr lang="en-US" sz="1500" b="1" dirty="0">
+                <a:solidFill>
+                  <a:srgbClr val="0F172A"/>
+                </a:solidFill>
+                <a:latin typeface="Calibri" pitchFamily="34" charset="0"/>
+                <a:ea typeface="Calibri" pitchFamily="34" charset="-122"/>
+                <a:cs typeface="Calibri" pitchFamily="34" charset="-120"/>
+              </a:rPr>
+              <a:t>Pre-triage the call</a:t>
+            </a:r>
+            <a:endParaRPr lang="en-US" sz="1500" dirty="0"/>
+          </a:p>
+        </p:txBody>
+      </p:sp>
+      <p:sp>
+        <p:nvSpPr>
+          <p:cNvPr id="9" name="Text 6"/>
+          <p:cNvSpPr txBox="1"/>
+          <p:nvPr/>
+        </p:nvSpPr>
+        <p:spPr>
+          <a:xfrm>
+            <a:off x="8595360" y="1901952"/>
+            <a:ext cx="3108960" cy="640080"/>
+          </a:xfrm>
+          <a:prstGeom prst="rect">
+            <a:avLst/>
+          </a:prstGeom>
+          <a:noFill/>
+          <a:ln/>
+        </p:spPr>
+        <p:txBody>
+          <a:bodyPr wrap="square" lIns="0" tIns="0" rIns="0" bIns="0" rtlCol="0" anchor="t"/>
+          <a:lstStyle/>
+          <a:p>
+            <a:pPr indent="0" marL="0">
+              <a:buNone/>
+            </a:pPr>
+            <a:r>
+              <a:rPr lang="en-US" sz="1200" dirty="0">
+                <a:solidFill>
+                  <a:srgbClr val="64748B"/>
+                </a:solidFill>
+                <a:latin typeface="Calibri" pitchFamily="34" charset="0"/>
+                <a:ea typeface="Calibri" pitchFamily="34" charset="-122"/>
+                <a:cs typeface="Calibri" pitchFamily="34" charset="-120"/>
+              </a:rPr>
+              <a:t>NEWS2 + red flags from the caller description and paramedic vitals</a:t>
+            </a:r>
+            <a:endParaRPr lang="en-US" sz="1200" dirty="0"/>
+          </a:p>
+        </p:txBody>
+      </p:sp>
+      <p:sp>
+        <p:nvSpPr>
+          <p:cNvPr id="10" name="Shape 7"/>
+          <p:cNvSpPr/>
+          <p:nvPr/>
+        </p:nvSpPr>
+        <p:spPr>
+          <a:xfrm>
+            <a:off x="8001000" y="2624328"/>
+            <a:ext cx="411480" cy="411480"/>
+          </a:xfrm>
+          <a:prstGeom prst="ellipse">
+            <a:avLst/>
+          </a:prstGeom>
+          <a:solidFill>
+            <a:srgbClr val="0F5C54"/>
+          </a:solidFill>
+          <a:ln w="12700">
+            <a:solidFill>
+              <a:srgbClr val="0F5C54"/>
+            </a:solidFill>
+            <a:prstDash val="solid"/>
+          </a:ln>
+        </p:spPr>
+      </p:sp>
+      <p:sp>
+        <p:nvSpPr>
+          <p:cNvPr id="11" name="Text 8"/>
+          <p:cNvSpPr txBox="1"/>
+          <p:nvPr/>
+        </p:nvSpPr>
+        <p:spPr>
+          <a:xfrm>
+            <a:off x="8001000" y="2624328"/>
+            <a:ext cx="411480" cy="411480"/>
+          </a:xfrm>
+          <a:prstGeom prst="rect">
+            <a:avLst/>
+          </a:prstGeom>
+          <a:noFill/>
+          <a:ln/>
+        </p:spPr>
+        <p:txBody>
+          <a:bodyPr wrap="square" lIns="0" tIns="0" rIns="0" bIns="0" rtlCol="0" anchor="ctr"/>
+          <a:lstStyle/>
+          <a:p>
+            <a:pPr algn="ctr" indent="0" marL="0">
+              <a:buNone/>
+            </a:pPr>
+            <a:r>
+              <a:rPr lang="en-US" sz="1200" b="1" dirty="0">
+                <a:solidFill>
+                  <a:srgbClr val="FFFFFF"/>
+                </a:solidFill>
+                <a:latin typeface="Calibri" pitchFamily="34" charset="0"/>
+                <a:ea typeface="Calibri" pitchFamily="34" charset="-122"/>
+                <a:cs typeface="Calibri" pitchFamily="34" charset="-120"/>
+              </a:rPr>
+              <a:t>2</a:t>
+            </a:r>
+            <a:endParaRPr lang="en-US" sz="1200" dirty="0"/>
+          </a:p>
+        </p:txBody>
+      </p:sp>
+      <p:sp>
+        <p:nvSpPr>
+          <p:cNvPr id="12" name="Text 9"/>
+          <p:cNvSpPr txBox="1"/>
+          <p:nvPr/>
+        </p:nvSpPr>
+        <p:spPr>
+          <a:xfrm>
+            <a:off x="8595360" y="2606040"/>
+            <a:ext cx="3108960" cy="320040"/>
+          </a:xfrm>
+          <a:prstGeom prst="rect">
+            <a:avLst/>
+          </a:prstGeom>
+          <a:noFill/>
+          <a:ln/>
+        </p:spPr>
+        <p:txBody>
+          <a:bodyPr wrap="square" lIns="0" tIns="0" rIns="0" bIns="0" rtlCol="0" anchor="t"/>
+          <a:lstStyle/>
+          <a:p>
+            <a:pPr indent="0" marL="0">
+              <a:buNone/>
+            </a:pPr>
+            <a:r>
+              <a:rPr lang="en-US" sz="1500" b="1" dirty="0">
+                <a:solidFill>
+                  <a:srgbClr val="0F172A"/>
+                </a:solidFill>
+                <a:latin typeface="Calibri" pitchFamily="34" charset="0"/>
+                <a:ea typeface="Calibri" pitchFamily="34" charset="-122"/>
+                <a:cs typeface="Calibri" pitchFamily="34" charset="-120"/>
+              </a:rPr>
+              <a:t>Nearest capable unit</a:t>
+            </a:r>
+            <a:endParaRPr lang="en-US" sz="1500" dirty="0"/>
+          </a:p>
+        </p:txBody>
+      </p:sp>
+      <p:sp>
+        <p:nvSpPr>
+          <p:cNvPr id="13" name="Text 10"/>
+          <p:cNvSpPr txBox="1"/>
+          <p:nvPr/>
+        </p:nvSpPr>
+        <p:spPr>
+          <a:xfrm>
+            <a:off x="8595360" y="2926080"/>
+            <a:ext cx="3108960" cy="640080"/>
+          </a:xfrm>
+          <a:prstGeom prst="rect">
+            <a:avLst/>
+          </a:prstGeom>
+          <a:noFill/>
+          <a:ln/>
+        </p:spPr>
+        <p:txBody>
+          <a:bodyPr wrap="square" lIns="0" tIns="0" rIns="0" bIns="0" rtlCol="0" anchor="t"/>
+          <a:lstStyle/>
+          <a:p>
+            <a:pPr indent="0" marL="0">
+              <a:buNone/>
+            </a:pPr>
+            <a:r>
+              <a:rPr lang="en-US" sz="1200" dirty="0">
+                <a:solidFill>
+                  <a:srgbClr val="64748B"/>
+                </a:solidFill>
+                <a:latin typeface="Calibri" pitchFamily="34" charset="0"/>
+                <a:ea typeface="Calibri" pitchFamily="34" charset="-122"/>
+                <a:cs typeface="Calibri" pitchFamily="34" charset="-120"/>
+              </a:rPr>
+              <a:t>ETA + penalty for a BLS unit on a critical call; dispatched without an approval hold</a:t>
+            </a:r>
+            <a:endParaRPr lang="en-US" sz="1200" dirty="0"/>
+          </a:p>
+        </p:txBody>
+      </p:sp>
+      <p:sp>
+        <p:nvSpPr>
+          <p:cNvPr id="14" name="Shape 11"/>
+          <p:cNvSpPr/>
+          <p:nvPr/>
+        </p:nvSpPr>
+        <p:spPr>
+          <a:xfrm>
+            <a:off x="8001000" y="3648456"/>
+            <a:ext cx="411480" cy="411480"/>
+          </a:xfrm>
+          <a:prstGeom prst="ellipse">
+            <a:avLst/>
+          </a:prstGeom>
+          <a:solidFill>
+            <a:srgbClr val="0F5C54"/>
+          </a:solidFill>
+          <a:ln w="12700">
+            <a:solidFill>
+              <a:srgbClr val="0F5C54"/>
+            </a:solidFill>
+            <a:prstDash val="solid"/>
+          </a:ln>
+        </p:spPr>
+      </p:sp>
+      <p:sp>
+        <p:nvSpPr>
+          <p:cNvPr id="15" name="Text 12"/>
+          <p:cNvSpPr txBox="1"/>
+          <p:nvPr/>
+        </p:nvSpPr>
+        <p:spPr>
+          <a:xfrm>
+            <a:off x="8001000" y="3648456"/>
+            <a:ext cx="411480" cy="411480"/>
+          </a:xfrm>
+          <a:prstGeom prst="rect">
+            <a:avLst/>
+          </a:prstGeom>
+          <a:noFill/>
+          <a:ln/>
+        </p:spPr>
+        <p:txBody>
+          <a:bodyPr wrap="square" lIns="0" tIns="0" rIns="0" bIns="0" rtlCol="0" anchor="ctr"/>
+          <a:lstStyle/>
+          <a:p>
+            <a:pPr algn="ctr" indent="0" marL="0">
+              <a:buNone/>
+            </a:pPr>
+            <a:r>
+              <a:rPr lang="en-US" sz="1200" b="1" dirty="0">
+                <a:solidFill>
+                  <a:srgbClr val="FFFFFF"/>
+                </a:solidFill>
+                <a:latin typeface="Calibri" pitchFamily="34" charset="0"/>
+                <a:ea typeface="Calibri" pitchFamily="34" charset="-122"/>
+                <a:cs typeface="Calibri" pitchFamily="34" charset="-120"/>
+              </a:rPr>
+              <a:t>3</a:t>
+            </a:r>
+            <a:endParaRPr lang="en-US" sz="1200" dirty="0"/>
+          </a:p>
+        </p:txBody>
+      </p:sp>
+      <p:sp>
+        <p:nvSpPr>
+          <p:cNvPr id="16" name="Text 13"/>
+          <p:cNvSpPr txBox="1"/>
+          <p:nvPr/>
+        </p:nvSpPr>
+        <p:spPr>
+          <a:xfrm>
+            <a:off x="8595360" y="3630168"/>
+            <a:ext cx="3108960" cy="320040"/>
+          </a:xfrm>
+          <a:prstGeom prst="rect">
+            <a:avLst/>
+          </a:prstGeom>
+          <a:noFill/>
+          <a:ln/>
+        </p:spPr>
+        <p:txBody>
+          <a:bodyPr wrap="square" lIns="0" tIns="0" rIns="0" bIns="0" rtlCol="0" anchor="t"/>
+          <a:lstStyle/>
+          <a:p>
+            <a:pPr indent="0" marL="0">
+              <a:buNone/>
+            </a:pPr>
+            <a:r>
+              <a:rPr lang="en-US" sz="1500" b="1" dirty="0">
+                <a:solidFill>
+                  <a:srgbClr val="0F172A"/>
+                </a:solidFill>
+                <a:latin typeface="Calibri" pitchFamily="34" charset="0"/>
+                <a:ea typeface="Calibri" pitchFamily="34" charset="-122"/>
+                <a:cs typeface="Calibri" pitchFamily="34" charset="-120"/>
+              </a:rPr>
+              <a:t>Live tracking</a:t>
+            </a:r>
+            <a:endParaRPr lang="en-US" sz="1500" dirty="0"/>
+          </a:p>
+        </p:txBody>
+      </p:sp>
+      <p:sp>
+        <p:nvSpPr>
+          <p:cNvPr id="17" name="Text 14"/>
+          <p:cNvSpPr txBox="1"/>
+          <p:nvPr/>
+        </p:nvSpPr>
+        <p:spPr>
+          <a:xfrm>
+            <a:off x="8595360" y="3950208"/>
+            <a:ext cx="3108960" cy="640080"/>
+          </a:xfrm>
+          <a:prstGeom prst="rect">
+            <a:avLst/>
+          </a:prstGeom>
+          <a:noFill/>
+          <a:ln/>
+        </p:spPr>
+        <p:txBody>
+          <a:bodyPr wrap="square" lIns="0" tIns="0" rIns="0" bIns="0" rtlCol="0" anchor="t"/>
+          <a:lstStyle/>
+          <a:p>
+            <a:pPr indent="0" marL="0">
+              <a:buNone/>
+            </a:pPr>
+            <a:r>
+              <a:rPr lang="en-US" sz="1200" dirty="0">
+                <a:solidFill>
+                  <a:srgbClr val="64748B"/>
+                </a:solidFill>
+                <a:latin typeface="Calibri" pitchFamily="34" charset="0"/>
+                <a:ea typeface="Calibri" pitchFamily="34" charset="-122"/>
+                <a:cs typeface="Calibri" pitchFamily="34" charset="-120"/>
+              </a:rPr>
+              <a:t>Positions stream to every screen over WebSockets</a:t>
+            </a:r>
+            <a:endParaRPr lang="en-US" sz="1200" dirty="0"/>
+          </a:p>
+        </p:txBody>
+      </p:sp>
+      <p:sp>
+        <p:nvSpPr>
+          <p:cNvPr id="18" name="Shape 15"/>
+          <p:cNvSpPr/>
+          <p:nvPr/>
+        </p:nvSpPr>
+        <p:spPr>
+          <a:xfrm>
+            <a:off x="8001000" y="4672584"/>
+            <a:ext cx="411480" cy="411480"/>
+          </a:xfrm>
+          <a:prstGeom prst="ellipse">
+            <a:avLst/>
+          </a:prstGeom>
+          <a:solidFill>
+            <a:srgbClr val="F97360"/>
+          </a:solidFill>
+          <a:ln w="12700">
+            <a:solidFill>
+              <a:srgbClr val="F97360"/>
+            </a:solidFill>
+            <a:prstDash val="solid"/>
+          </a:ln>
+        </p:spPr>
+      </p:sp>
+      <p:sp>
+        <p:nvSpPr>
+          <p:cNvPr id="19" name="Text 16"/>
+          <p:cNvSpPr txBox="1"/>
+          <p:nvPr/>
+        </p:nvSpPr>
+        <p:spPr>
+          <a:xfrm>
+            <a:off x="8001000" y="4672584"/>
+            <a:ext cx="411480" cy="411480"/>
+          </a:xfrm>
+          <a:prstGeom prst="rect">
+            <a:avLst/>
+          </a:prstGeom>
+          <a:noFill/>
+          <a:ln/>
+        </p:spPr>
+        <p:txBody>
+          <a:bodyPr wrap="square" lIns="0" tIns="0" rIns="0" bIns="0" rtlCol="0" anchor="ctr"/>
+          <a:lstStyle/>
+          <a:p>
+            <a:pPr algn="ctr" indent="0" marL="0">
+              <a:buNone/>
+            </a:pPr>
+            <a:r>
+              <a:rPr lang="en-US" sz="1200" b="1" dirty="0">
+                <a:solidFill>
+                  <a:srgbClr val="FFFFFF"/>
+                </a:solidFill>
+                <a:latin typeface="Calibri" pitchFamily="34" charset="0"/>
+                <a:ea typeface="Calibri" pitchFamily="34" charset="-122"/>
+                <a:cs typeface="Calibri" pitchFamily="34" charset="-120"/>
+              </a:rPr>
+              <a:t>4</a:t>
+            </a:r>
+            <a:endParaRPr lang="en-US" sz="1200" dirty="0"/>
+          </a:p>
+        </p:txBody>
+      </p:sp>
+      <p:sp>
+        <p:nvSpPr>
+          <p:cNvPr id="20" name="Text 17"/>
+          <p:cNvSpPr txBox="1"/>
+          <p:nvPr/>
+        </p:nvSpPr>
+        <p:spPr>
+          <a:xfrm>
+            <a:off x="8595360" y="4654296"/>
+            <a:ext cx="3108960" cy="320040"/>
+          </a:xfrm>
+          <a:prstGeom prst="rect">
+            <a:avLst/>
+          </a:prstGeom>
+          <a:noFill/>
+          <a:ln/>
+        </p:spPr>
+        <p:txBody>
+          <a:bodyPr wrap="square" lIns="0" tIns="0" rIns="0" bIns="0" rtlCol="0" anchor="t"/>
+          <a:lstStyle/>
+          <a:p>
+            <a:pPr indent="0" marL="0">
+              <a:buNone/>
+            </a:pPr>
+            <a:r>
+              <a:rPr lang="en-US" sz="1500" b="1" dirty="0">
+                <a:solidFill>
+                  <a:srgbClr val="0F172A"/>
+                </a:solidFill>
+                <a:latin typeface="Calibri" pitchFamily="34" charset="0"/>
+                <a:ea typeface="Calibri" pitchFamily="34" charset="-122"/>
+                <a:cs typeface="Calibri" pitchFamily="34" charset="-120"/>
+              </a:rPr>
+              <a:t>Pre-arrival alert</a:t>
+            </a:r>
+            <a:endParaRPr lang="en-US" sz="1500" dirty="0"/>
+          </a:p>
+        </p:txBody>
+      </p:sp>
+      <p:sp>
+        <p:nvSpPr>
+          <p:cNvPr id="21" name="Text 18"/>
+          <p:cNvSpPr txBox="1"/>
+          <p:nvPr/>
+        </p:nvSpPr>
+        <p:spPr>
+          <a:xfrm>
+            <a:off x="8595360" y="4974336"/>
+            <a:ext cx="3108960" cy="640080"/>
+          </a:xfrm>
+          <a:prstGeom prst="rect">
+            <a:avLst/>
+          </a:prstGeom>
+          <a:noFill/>
+          <a:ln/>
+        </p:spPr>
+        <p:txBody>
+          <a:bodyPr wrap="square" lIns="0" tIns="0" rIns="0" bIns="0" rtlCol="0" anchor="t"/>
+          <a:lstStyle/>
+          <a:p>
+            <a:pPr indent="0" marL="0">
+              <a:buNone/>
+            </a:pPr>
+            <a:r>
+              <a:rPr lang="en-US" sz="1200" dirty="0">
+                <a:solidFill>
+                  <a:srgbClr val="64748B"/>
+                </a:solidFill>
+                <a:latin typeface="Calibri" pitchFamily="34" charset="0"/>
+                <a:ea typeface="Calibri" pitchFamily="34" charset="-122"/>
+                <a:cs typeface="Calibri" pitchFamily="34" charset="-120"/>
+              </a:rPr>
+              <a:t>Incoming ED case created in transit; agents hold a bay and a team</a:t>
+            </a:r>
+            <a:endParaRPr lang="en-US" sz="1200" dirty="0"/>
+          </a:p>
+        </p:txBody>
+      </p:sp>
+      <p:sp>
+        <p:nvSpPr>
+          <p:cNvPr id="22" name="Shape 19"/>
+          <p:cNvSpPr/>
+          <p:nvPr/>
+        </p:nvSpPr>
+        <p:spPr>
+          <a:xfrm>
+            <a:off x="8001000" y="5696712"/>
+            <a:ext cx="411480" cy="411480"/>
+          </a:xfrm>
+          <a:prstGeom prst="ellipse">
+            <a:avLst/>
+          </a:prstGeom>
+          <a:solidFill>
+            <a:srgbClr val="0F5C54"/>
+          </a:solidFill>
+          <a:ln w="12700">
+            <a:solidFill>
+              <a:srgbClr val="0F5C54"/>
+            </a:solidFill>
+            <a:prstDash val="solid"/>
+          </a:ln>
+        </p:spPr>
+      </p:sp>
+      <p:sp>
+        <p:nvSpPr>
+          <p:cNvPr id="23" name="Text 20"/>
+          <p:cNvSpPr txBox="1"/>
+          <p:nvPr/>
+        </p:nvSpPr>
+        <p:spPr>
+          <a:xfrm>
+            <a:off x="8001000" y="5696712"/>
+            <a:ext cx="411480" cy="411480"/>
+          </a:xfrm>
+          <a:prstGeom prst="rect">
+            <a:avLst/>
+          </a:prstGeom>
+          <a:noFill/>
+          <a:ln/>
+        </p:spPr>
+        <p:txBody>
+          <a:bodyPr wrap="square" lIns="0" tIns="0" rIns="0" bIns="0" rtlCol="0" anchor="ctr"/>
+          <a:lstStyle/>
+          <a:p>
+            <a:pPr algn="ctr" indent="0" marL="0">
+              <a:buNone/>
+            </a:pPr>
+            <a:r>
+              <a:rPr lang="en-US" sz="1200" b="1" dirty="0">
+                <a:solidFill>
+                  <a:srgbClr val="FFFFFF"/>
+                </a:solidFill>
+                <a:latin typeface="Calibri" pitchFamily="34" charset="0"/>
+                <a:ea typeface="Calibri" pitchFamily="34" charset="-122"/>
+                <a:cs typeface="Calibri" pitchFamily="34" charset="-120"/>
+              </a:rPr>
+              <a:t>5</a:t>
+            </a:r>
+            <a:endParaRPr lang="en-US" sz="1200" dirty="0"/>
+          </a:p>
+        </p:txBody>
+      </p:sp>
+      <p:sp>
+        <p:nvSpPr>
+          <p:cNvPr id="24" name="Text 21"/>
+          <p:cNvSpPr txBox="1"/>
+          <p:nvPr/>
+        </p:nvSpPr>
+        <p:spPr>
+          <a:xfrm>
+            <a:off x="8595360" y="5678424"/>
+            <a:ext cx="3108960" cy="320040"/>
+          </a:xfrm>
+          <a:prstGeom prst="rect">
+            <a:avLst/>
+          </a:prstGeom>
+          <a:noFill/>
+          <a:ln/>
+        </p:spPr>
+        <p:txBody>
+          <a:bodyPr wrap="square" lIns="0" tIns="0" rIns="0" bIns="0" rtlCol="0" anchor="t"/>
+          <a:lstStyle/>
+          <a:p>
+            <a:pPr indent="0" marL="0">
+              <a:buNone/>
+            </a:pPr>
+            <a:r>
+              <a:rPr lang="en-US" sz="1500" b="1" dirty="0">
+                <a:solidFill>
+                  <a:srgbClr val="0F172A"/>
+                </a:solidFill>
+                <a:latin typeface="Calibri" pitchFamily="34" charset="0"/>
+                <a:ea typeface="Calibri" pitchFamily="34" charset="-122"/>
+                <a:cs typeface="Calibri" pitchFamily="34" charset="-120"/>
+              </a:rPr>
+              <a:t>Arrival</a:t>
+            </a:r>
+            <a:endParaRPr lang="en-US" sz="1500" dirty="0"/>
+          </a:p>
+        </p:txBody>
+      </p:sp>
+      <p:sp>
+        <p:nvSpPr>
+          <p:cNvPr id="25" name="Text 22"/>
+          <p:cNvSpPr txBox="1"/>
+          <p:nvPr/>
+        </p:nvSpPr>
+        <p:spPr>
+          <a:xfrm>
+            <a:off x="8595360" y="5998464"/>
+            <a:ext cx="3108960" cy="640080"/>
+          </a:xfrm>
+          <a:prstGeom prst="rect">
+            <a:avLst/>
+          </a:prstGeom>
+          <a:noFill/>
+          <a:ln/>
+        </p:spPr>
+        <p:txBody>
+          <a:bodyPr wrap="square" lIns="0" tIns="0" rIns="0" bIns="0" rtlCol="0" anchor="t"/>
+          <a:lstStyle/>
+          <a:p>
+            <a:pPr indent="0" marL="0">
+              <a:buNone/>
+            </a:pPr>
+            <a:r>
+              <a:rPr lang="en-US" sz="1200" dirty="0">
+                <a:solidFill>
+                  <a:srgbClr val="64748B"/>
+                </a:solidFill>
+                <a:latin typeface="Calibri" pitchFamily="34" charset="0"/>
+                <a:ea typeface="Calibri" pitchFamily="34" charset="-122"/>
+                <a:cs typeface="Calibri" pitchFamily="34" charset="-120"/>
+              </a:rPr>
+              <a:t>Straight into the reserved bay — no search, no waiting</a:t>
+            </a:r>
+            <a:endParaRPr lang="en-US" sz="1200" dirty="0"/>
+          </a:p>
+        </p:txBody>
+      </p:sp>
+      <p:sp>
+        <p:nvSpPr>
+          <p:cNvPr id="26" name="Text 23"/>
+          <p:cNvSpPr txBox="1"/>
+          <p:nvPr/>
+        </p:nvSpPr>
+        <p:spPr>
+          <a:xfrm>
+            <a:off x="11384280" y="6400800"/>
+            <a:ext cx="365760" cy="274320"/>
+          </a:xfrm>
+          <a:prstGeom prst="rect">
+            <a:avLst/>
+          </a:prstGeom>
+          <a:noFill/>
+          <a:ln/>
+        </p:spPr>
+        <p:txBody>
+          <a:bodyPr wrap="square" lIns="0" tIns="0" rIns="0" bIns="0" rtlCol="0" anchor="t"/>
+          <a:lstStyle/>
+          <a:p>
+            <a:pPr algn="r" indent="0" marL="0">
+              <a:buNone/>
+            </a:pPr>
+            <a:r>
+              <a:rPr lang="en-US" sz="1000" dirty="0">
+                <a:solidFill>
+                  <a:srgbClr val="64748B"/>
+                </a:solidFill>
+                <a:latin typeface="Calibri" pitchFamily="34" charset="0"/>
+                <a:ea typeface="Calibri" pitchFamily="34" charset="-122"/>
+                <a:cs typeface="Calibri" pitchFamily="34" charset="-120"/>
+              </a:rPr>
+              <a:t>11</a:t>
+            </a:r>
+            <a:endParaRPr lang="en-US" sz="1000" dirty="0"/>
+          </a:p>
+        </p:txBody>
+      </p:sp>
+    </p:spTree>
+  </p:cSld>
+  <p:clrMapOvr>
+    <a:masterClrMapping/>
+  </p:clrMapOvr>
+</p:sld>
+</file>
+
+<file path=ppt/slides/slide12.xml><?xml version="1.0" encoding="utf-8"?>
+<p:sld xmlns:a="http://schemas.openxmlformats.org/drawingml/2006/main" xmlns:r="http://schemas.openxmlformats.org/officeDocument/2006/relationships" xmlns:p="http://schemas.openxmlformats.org/presentationml/2006/main">
+  <p:cSld name="Slide 12">
+    <p:bg>
+      <p:bgPr>
+        <a:solidFill>
           <a:srgbClr val="FFFFFF"/>
         </a:solidFill>
       </p:bgPr>
@@ -3633,7 +4995,7 @@
                 <a:ea typeface="Cambria" pitchFamily="34" charset="-122"/>
                 <a:cs typeface="Cambria" pitchFamily="34" charset="-120"/>
               </a:rPr>
-              <a:t>Results</a:t>
+              <a:t>Hospital digital twin: decisions before the pressure arrives</a:t>
             </a:r>
             <a:endParaRPr lang="en-US" sz="3200" dirty="0"/>
           </a:p>
@@ -3672,7 +5034,7 @@
                 <a:ea typeface="Calibri" pitchFamily="34" charset="-122"/>
                 <a:cs typeface="Calibri" pitchFamily="34" charset="-120"/>
               </a:rPr>
-              <a:t>Measured on the synthetic 108-bed hospital</a:t>
+              <a:t>Monte-Carlo simulation starting from the live hospital state — and it recommends what to do</a:t>
             </a:r>
             <a:endParaRPr lang="en-US" sz="1500" dirty="0"/>
           </a:p>
@@ -3686,12 +5048,445 @@
         </p:nvSpPr>
         <p:spPr>
           <a:xfrm>
-            <a:off x="548640" y="1600200"/>
-            <a:ext cx="3520440" cy="2240280"/>
+            <a:off x="1579169" y="1417320"/>
+            <a:ext cx="4705502" cy="5212080"/>
           </a:xfrm>
           <a:prstGeom prst="roundRect">
             <a:avLst>
-              <a:gd name="adj" fmla="val 3265"/>
+              <a:gd name="adj" fmla="val 1555"/>
+            </a:avLst>
+          </a:prstGeom>
+          <a:solidFill>
+            <a:srgbClr val="FFFFFF"/>
+          </a:solidFill>
+          <a:ln w="9525">
+            <a:solidFill>
+              <a:srgbClr val="E2E8F0"/>
+            </a:solidFill>
+            <a:prstDash val="solid"/>
+          </a:ln>
+          <a:effectLst>
+            <a:outerShdw sx="100000" sy="100000" kx="0" ky="0" algn="bl" rotWithShape="0" blurRad="101600" dist="25400" dir="5400000">
+              <a:srgbClr val="000000">
+                <a:alpha val="14000"/>
+              </a:srgbClr>
+            </a:outerShdw>
+          </a:effectLst>
+        </p:spPr>
+      </p:sp>
+      <p:pic>
+        <p:nvPicPr>
+          <p:cNvPr id="5" name="Image 0" descr="C:\Users\HP\AppData\Local\Temp\claude\D--codin-idea-lab\87151ddf-948a-4e83-8159-c0449757400e\scratchpad\report\shots\twin.png">    </p:cNvPr>
+          <p:cNvPicPr>
+            <a:picLocks noChangeAspect="1"/>
+          </p:cNvPicPr>
+          <p:nvPr/>
+        </p:nvPicPr>
+        <p:blipFill>
+          <a:blip r:embed="rId1"/>
+          <a:stretch>
+            <a:fillRect/>
+          </a:stretch>
+        </p:blipFill>
+        <p:spPr>
+          <a:xfrm>
+            <a:off x="1652321" y="1490472"/>
+            <a:ext cx="4559198" cy="5065776"/>
+          </a:xfrm>
+          <a:prstGeom prst="rect">
+            <a:avLst/>
+          </a:prstGeom>
+        </p:spPr>
+      </p:pic>
+      <p:sp>
+        <p:nvSpPr>
+          <p:cNvPr id="6" name="Text 3"/>
+          <p:cNvSpPr txBox="1"/>
+          <p:nvPr/>
+        </p:nvSpPr>
+        <p:spPr>
+          <a:xfrm>
+            <a:off x="7635240" y="1554480"/>
+            <a:ext cx="4114800" cy="365760"/>
+          </a:xfrm>
+          <a:prstGeom prst="rect">
+            <a:avLst/>
+          </a:prstGeom>
+          <a:noFill/>
+          <a:ln/>
+        </p:spPr>
+        <p:txBody>
+          <a:bodyPr wrap="square" lIns="0" tIns="0" rIns="0" bIns="0" rtlCol="0" anchor="t"/>
+          <a:lstStyle/>
+          <a:p>
+            <a:pPr indent="0" marL="0">
+              <a:buNone/>
+            </a:pPr>
+            <a:r>
+              <a:rPr lang="en-US" sz="1500" b="1" dirty="0">
+                <a:solidFill>
+                  <a:srgbClr val="0F5C54"/>
+                </a:solidFill>
+                <a:latin typeface="Calibri" pitchFamily="34" charset="0"/>
+                <a:ea typeface="Calibri" pitchFamily="34" charset="-122"/>
+                <a:cs typeface="Calibri" pitchFamily="34" charset="-120"/>
+              </a:rPr>
+              <a:t>Baseline vs +50% ED arrivals (72 h)</a:t>
+            </a:r>
+            <a:endParaRPr lang="en-US" sz="1500" dirty="0"/>
+          </a:p>
+        </p:txBody>
+      </p:sp>
+      <p:sp>
+        <p:nvSpPr>
+          <p:cNvPr id="7" name="Shape 4"/>
+          <p:cNvSpPr/>
+          <p:nvPr/>
+        </p:nvSpPr>
+        <p:spPr>
+          <a:xfrm>
+            <a:off x="7635240" y="2011680"/>
+            <a:ext cx="4069080" cy="914400"/>
+          </a:xfrm>
+          <a:prstGeom prst="roundRect">
+            <a:avLst>
+              <a:gd name="adj" fmla="val 8000"/>
+            </a:avLst>
+          </a:prstGeom>
+          <a:solidFill>
+            <a:srgbClr val="FFFFFF"/>
+          </a:solidFill>
+          <a:ln w="9525">
+            <a:solidFill>
+              <a:srgbClr val="E2E8F0"/>
+            </a:solidFill>
+            <a:prstDash val="solid"/>
+          </a:ln>
+          <a:effectLst>
+            <a:outerShdw sx="100000" sy="100000" kx="0" ky="0" algn="bl" rotWithShape="0" blurRad="101600" dist="25400" dir="5400000">
+              <a:srgbClr val="000000">
+                <a:alpha val="14000"/>
+              </a:srgbClr>
+            </a:outerShdw>
+          </a:effectLst>
+        </p:spPr>
+      </p:sp>
+      <p:sp>
+        <p:nvSpPr>
+          <p:cNvPr id="8" name="Text 5"/>
+          <p:cNvSpPr txBox="1"/>
+          <p:nvPr/>
+        </p:nvSpPr>
+        <p:spPr>
+          <a:xfrm>
+            <a:off x="7818120" y="2121408"/>
+            <a:ext cx="3749040" cy="274320"/>
+          </a:xfrm>
+          <a:prstGeom prst="rect">
+            <a:avLst/>
+          </a:prstGeom>
+          <a:noFill/>
+          <a:ln/>
+        </p:spPr>
+        <p:txBody>
+          <a:bodyPr wrap="square" lIns="0" tIns="0" rIns="0" bIns="0" rtlCol="0" anchor="t"/>
+          <a:lstStyle/>
+          <a:p>
+            <a:pPr indent="0" marL="0">
+              <a:buNone/>
+            </a:pPr>
+            <a:r>
+              <a:rPr lang="en-US" sz="1250" dirty="0">
+                <a:solidFill>
+                  <a:srgbClr val="64748B"/>
+                </a:solidFill>
+                <a:latin typeface="Calibri" pitchFamily="34" charset="0"/>
+                <a:ea typeface="Calibri" pitchFamily="34" charset="-122"/>
+                <a:cs typeface="Calibri" pitchFamily="34" charset="-120"/>
+              </a:rPr>
+              <a:t>ED boarding</a:t>
+            </a:r>
+            <a:endParaRPr lang="en-US" sz="1250" dirty="0"/>
+          </a:p>
+        </p:txBody>
+      </p:sp>
+      <p:sp>
+        <p:nvSpPr>
+          <p:cNvPr id="9" name="Text 6"/>
+          <p:cNvSpPr txBox="1"/>
+          <p:nvPr/>
+        </p:nvSpPr>
+        <p:spPr>
+          <a:xfrm>
+            <a:off x="7818120" y="2414016"/>
+            <a:ext cx="3749040" cy="411480"/>
+          </a:xfrm>
+          <a:prstGeom prst="rect">
+            <a:avLst/>
+          </a:prstGeom>
+          <a:noFill/>
+          <a:ln/>
+        </p:spPr>
+        <p:txBody>
+          <a:bodyPr wrap="square" lIns="0" tIns="0" rIns="0" bIns="0" rtlCol="0" anchor="t"/>
+          <a:lstStyle/>
+          <a:p>
+            <a:pPr indent="0" marL="0">
+              <a:buNone/>
+            </a:pPr>
+            <a:r>
+              <a:rPr lang="en-US" sz="1500" b="1" dirty="0">
+                <a:solidFill>
+                  <a:srgbClr val="0F172A"/>
+                </a:solidFill>
+                <a:latin typeface="Calibri" pitchFamily="34" charset="0"/>
+                <a:ea typeface="Calibri" pitchFamily="34" charset="-122"/>
+                <a:cs typeface="Calibri" pitchFamily="34" charset="-120"/>
+              </a:rPr>
+              <a:t>133 → 283 patient-hours</a:t>
+            </a:r>
+            <a:endParaRPr lang="en-US" sz="1500" dirty="0"/>
+          </a:p>
+        </p:txBody>
+      </p:sp>
+      <p:sp>
+        <p:nvSpPr>
+          <p:cNvPr id="10" name="Shape 7"/>
+          <p:cNvSpPr/>
+          <p:nvPr/>
+        </p:nvSpPr>
+        <p:spPr>
+          <a:xfrm>
+            <a:off x="7635240" y="3063240"/>
+            <a:ext cx="4069080" cy="914400"/>
+          </a:xfrm>
+          <a:prstGeom prst="roundRect">
+            <a:avLst>
+              <a:gd name="adj" fmla="val 8000"/>
+            </a:avLst>
+          </a:prstGeom>
+          <a:solidFill>
+            <a:srgbClr val="FFFFFF"/>
+          </a:solidFill>
+          <a:ln w="9525">
+            <a:solidFill>
+              <a:srgbClr val="E2E8F0"/>
+            </a:solidFill>
+            <a:prstDash val="solid"/>
+          </a:ln>
+          <a:effectLst>
+            <a:outerShdw sx="100000" sy="100000" kx="0" ky="0" algn="bl" rotWithShape="0" blurRad="101600" dist="25400" dir="5400000">
+              <a:srgbClr val="000000">
+                <a:alpha val="14000"/>
+              </a:srgbClr>
+            </a:outerShdw>
+          </a:effectLst>
+        </p:spPr>
+      </p:sp>
+      <p:sp>
+        <p:nvSpPr>
+          <p:cNvPr id="11" name="Text 8"/>
+          <p:cNvSpPr txBox="1"/>
+          <p:nvPr/>
+        </p:nvSpPr>
+        <p:spPr>
+          <a:xfrm>
+            <a:off x="7818120" y="3172968"/>
+            <a:ext cx="3749040" cy="274320"/>
+          </a:xfrm>
+          <a:prstGeom prst="rect">
+            <a:avLst/>
+          </a:prstGeom>
+          <a:noFill/>
+          <a:ln/>
+        </p:spPr>
+        <p:txBody>
+          <a:bodyPr wrap="square" lIns="0" tIns="0" rIns="0" bIns="0" rtlCol="0" anchor="t"/>
+          <a:lstStyle/>
+          <a:p>
+            <a:pPr indent="0" marL="0">
+              <a:buNone/>
+            </a:pPr>
+            <a:r>
+              <a:rPr lang="en-US" sz="1250" dirty="0">
+                <a:solidFill>
+                  <a:srgbClr val="64748B"/>
+                </a:solidFill>
+                <a:latin typeface="Calibri" pitchFamily="34" charset="0"/>
+                <a:ea typeface="Calibri" pitchFamily="34" charset="-122"/>
+                <a:cs typeface="Calibri" pitchFamily="34" charset="-120"/>
+              </a:rPr>
+              <a:t>ED saturated</a:t>
+            </a:r>
+            <a:endParaRPr lang="en-US" sz="1250" dirty="0"/>
+          </a:p>
+        </p:txBody>
+      </p:sp>
+      <p:sp>
+        <p:nvSpPr>
+          <p:cNvPr id="12" name="Text 9"/>
+          <p:cNvSpPr txBox="1"/>
+          <p:nvPr/>
+        </p:nvSpPr>
+        <p:spPr>
+          <a:xfrm>
+            <a:off x="7818120" y="3465576"/>
+            <a:ext cx="3749040" cy="411480"/>
+          </a:xfrm>
+          <a:prstGeom prst="rect">
+            <a:avLst/>
+          </a:prstGeom>
+          <a:noFill/>
+          <a:ln/>
+        </p:spPr>
+        <p:txBody>
+          <a:bodyPr wrap="square" lIns="0" tIns="0" rIns="0" bIns="0" rtlCol="0" anchor="t"/>
+          <a:lstStyle/>
+          <a:p>
+            <a:pPr indent="0" marL="0">
+              <a:buNone/>
+            </a:pPr>
+            <a:r>
+              <a:rPr lang="en-US" sz="1500" b="1" dirty="0">
+                <a:solidFill>
+                  <a:srgbClr val="0F172A"/>
+                </a:solidFill>
+                <a:latin typeface="Calibri" pitchFamily="34" charset="0"/>
+                <a:ea typeface="Calibri" pitchFamily="34" charset="-122"/>
+                <a:cs typeface="Calibri" pitchFamily="34" charset="-120"/>
+              </a:rPr>
+              <a:t>14 → 64 hours</a:t>
+            </a:r>
+            <a:endParaRPr lang="en-US" sz="1500" dirty="0"/>
+          </a:p>
+        </p:txBody>
+      </p:sp>
+      <p:sp>
+        <p:nvSpPr>
+          <p:cNvPr id="13" name="Shape 10"/>
+          <p:cNvSpPr/>
+          <p:nvPr/>
+        </p:nvSpPr>
+        <p:spPr>
+          <a:xfrm>
+            <a:off x="7635240" y="4114800"/>
+            <a:ext cx="4069080" cy="914400"/>
+          </a:xfrm>
+          <a:prstGeom prst="roundRect">
+            <a:avLst>
+              <a:gd name="adj" fmla="val 8000"/>
+            </a:avLst>
+          </a:prstGeom>
+          <a:solidFill>
+            <a:srgbClr val="FFFFFF"/>
+          </a:solidFill>
+          <a:ln w="9525">
+            <a:solidFill>
+              <a:srgbClr val="E2E8F0"/>
+            </a:solidFill>
+            <a:prstDash val="solid"/>
+          </a:ln>
+          <a:effectLst>
+            <a:outerShdw sx="100000" sy="100000" kx="0" ky="0" algn="bl" rotWithShape="0" blurRad="101600" dist="25400" dir="5400000">
+              <a:srgbClr val="000000">
+                <a:alpha val="14000"/>
+              </a:srgbClr>
+            </a:outerShdw>
+          </a:effectLst>
+        </p:spPr>
+      </p:sp>
+      <p:sp>
+        <p:nvSpPr>
+          <p:cNvPr id="14" name="Text 11"/>
+          <p:cNvSpPr txBox="1"/>
+          <p:nvPr/>
+        </p:nvSpPr>
+        <p:spPr>
+          <a:xfrm>
+            <a:off x="7818120" y="4224528"/>
+            <a:ext cx="3749040" cy="274320"/>
+          </a:xfrm>
+          <a:prstGeom prst="rect">
+            <a:avLst/>
+          </a:prstGeom>
+          <a:noFill/>
+          <a:ln/>
+        </p:spPr>
+        <p:txBody>
+          <a:bodyPr wrap="square" lIns="0" tIns="0" rIns="0" bIns="0" rtlCol="0" anchor="t"/>
+          <a:lstStyle/>
+          <a:p>
+            <a:pPr indent="0" marL="0">
+              <a:buNone/>
+            </a:pPr>
+            <a:r>
+              <a:rPr lang="en-US" sz="1250" dirty="0">
+                <a:solidFill>
+                  <a:srgbClr val="64748B"/>
+                </a:solidFill>
+                <a:latin typeface="Calibri" pitchFamily="34" charset="0"/>
+                <a:ea typeface="Calibri" pitchFamily="34" charset="-122"/>
+                <a:cs typeface="Calibri" pitchFamily="34" charset="-120"/>
+              </a:rPr>
+              <a:t>Electives cancelled</a:t>
+            </a:r>
+            <a:endParaRPr lang="en-US" sz="1250" dirty="0"/>
+          </a:p>
+        </p:txBody>
+      </p:sp>
+      <p:sp>
+        <p:nvSpPr>
+          <p:cNvPr id="15" name="Text 12"/>
+          <p:cNvSpPr txBox="1"/>
+          <p:nvPr/>
+        </p:nvSpPr>
+        <p:spPr>
+          <a:xfrm>
+            <a:off x="7818120" y="4517136"/>
+            <a:ext cx="3749040" cy="411480"/>
+          </a:xfrm>
+          <a:prstGeom prst="rect">
+            <a:avLst/>
+          </a:prstGeom>
+          <a:noFill/>
+          <a:ln/>
+        </p:spPr>
+        <p:txBody>
+          <a:bodyPr wrap="square" lIns="0" tIns="0" rIns="0" bIns="0" rtlCol="0" anchor="t"/>
+          <a:lstStyle/>
+          <a:p>
+            <a:pPr indent="0" marL="0">
+              <a:buNone/>
+            </a:pPr>
+            <a:r>
+              <a:rPr lang="en-US" sz="1500" b="1" dirty="0">
+                <a:solidFill>
+                  <a:srgbClr val="0F172A"/>
+                </a:solidFill>
+                <a:latin typeface="Calibri" pitchFamily="34" charset="0"/>
+                <a:ea typeface="Calibri" pitchFamily="34" charset="-122"/>
+                <a:cs typeface="Calibri" pitchFamily="34" charset="-120"/>
+              </a:rPr>
+              <a:t>13 → 19</a:t>
+            </a:r>
+            <a:endParaRPr lang="en-US" sz="1500" dirty="0"/>
+          </a:p>
+        </p:txBody>
+      </p:sp>
+      <p:sp>
+        <p:nvSpPr>
+          <p:cNvPr id="16" name="Shape 13"/>
+          <p:cNvSpPr/>
+          <p:nvPr/>
+        </p:nvSpPr>
+        <p:spPr>
+          <a:xfrm>
+            <a:off x="7635240" y="5166360"/>
+            <a:ext cx="4069080" cy="914400"/>
+          </a:xfrm>
+          <a:prstGeom prst="roundRect">
+            <a:avLst>
+              <a:gd name="adj" fmla="val 8000"/>
             </a:avLst>
           </a:prstGeom>
           <a:solidFill>
@@ -3714,14 +5509,14 @@
       </p:sp>
       <p:sp>
         <p:nvSpPr>
-          <p:cNvPr id="5" name="Text 3"/>
-          <p:cNvSpPr txBox="1"/>
-          <p:nvPr/>
-        </p:nvSpPr>
-        <p:spPr>
-          <a:xfrm>
-            <a:off x="822960" y="1920240"/>
-            <a:ext cx="3017520" cy="914400"/>
+          <p:cNvPr id="17" name="Text 14"/>
+          <p:cNvSpPr txBox="1"/>
+          <p:nvPr/>
+        </p:nvSpPr>
+        <p:spPr>
+          <a:xfrm>
+            <a:off x="7818120" y="5276088"/>
+            <a:ext cx="3749040" cy="274320"/>
           </a:xfrm>
           <a:prstGeom prst="rect">
             <a:avLst/>
@@ -3737,30 +5532,30 @@
               <a:buNone/>
             </a:pPr>
             <a:r>
-              <a:rPr lang="en-US" sz="4400" b="1" dirty="0">
-                <a:solidFill>
-                  <a:srgbClr val="0F5C54"/>
-                </a:solidFill>
-                <a:latin typeface="Cambria" pitchFamily="34" charset="0"/>
-                <a:ea typeface="Cambria" pitchFamily="34" charset="-122"/>
-                <a:cs typeface="Cambria" pitchFamily="34" charset="-120"/>
-              </a:rPr>
-              <a:t>89.6%</a:t>
-            </a:r>
-            <a:endParaRPr lang="en-US" sz="4400" dirty="0"/>
-          </a:p>
-        </p:txBody>
-      </p:sp>
-      <p:sp>
-        <p:nvSpPr>
-          <p:cNvPr id="6" name="Text 4"/>
-          <p:cNvSpPr txBox="1"/>
-          <p:nvPr/>
-        </p:nvSpPr>
-        <p:spPr>
-          <a:xfrm>
-            <a:off x="822960" y="2926080"/>
-            <a:ext cx="3017520" cy="731520"/>
+              <a:rPr lang="en-US" sz="1250" dirty="0">
+                <a:solidFill>
+                  <a:srgbClr val="64748B"/>
+                </a:solidFill>
+                <a:latin typeface="Calibri" pitchFamily="34" charset="0"/>
+                <a:ea typeface="Calibri" pitchFamily="34" charset="-122"/>
+                <a:cs typeface="Calibri" pitchFamily="34" charset="-120"/>
+              </a:rPr>
+              <a:t>Best single lever</a:t>
+            </a:r>
+            <a:endParaRPr lang="en-US" sz="1250" dirty="0"/>
+          </a:p>
+        </p:txBody>
+      </p:sp>
+      <p:sp>
+        <p:nvSpPr>
+          <p:cNvPr id="18" name="Text 15"/>
+          <p:cNvSpPr txBox="1"/>
+          <p:nvPr/>
+        </p:nvSpPr>
+        <p:spPr>
+          <a:xfrm>
+            <a:off x="7818120" y="5568696"/>
+            <a:ext cx="3749040" cy="411480"/>
           </a:xfrm>
           <a:prstGeom prst="rect">
             <a:avLst/>
@@ -3776,583 +5571,87 @@
               <a:buNone/>
             </a:pPr>
             <a:r>
-              <a:rPr lang="en-US" sz="1400" dirty="0">
-                <a:solidFill>
-                  <a:srgbClr val="64748B"/>
-                </a:solidFill>
-                <a:latin typeface="Calibri" pitchFamily="34" charset="0"/>
-                <a:ea typeface="Calibri" pitchFamily="34" charset="-122"/>
-                <a:cs typeface="Calibri" pitchFamily="34" charset="-120"/>
-              </a:rPr>
-              <a:t>intent accuracy on 48 held-out requests</a:t>
-            </a:r>
-            <a:endParaRPr lang="en-US" sz="1400" dirty="0"/>
-          </a:p>
-        </p:txBody>
-      </p:sp>
-      <p:sp>
-        <p:nvSpPr>
-          <p:cNvPr id="7" name="Shape 5"/>
-          <p:cNvSpPr/>
-          <p:nvPr/>
-        </p:nvSpPr>
-        <p:spPr>
-          <a:xfrm>
-            <a:off x="4297680" y="1600200"/>
-            <a:ext cx="3520440" cy="2240280"/>
-          </a:xfrm>
-          <a:prstGeom prst="roundRect">
-            <a:avLst>
-              <a:gd name="adj" fmla="val 3265"/>
-            </a:avLst>
-          </a:prstGeom>
-          <a:solidFill>
-            <a:srgbClr val="FFFFFF"/>
-          </a:solidFill>
-          <a:ln w="9525">
-            <a:solidFill>
-              <a:srgbClr val="E2E8F0"/>
-            </a:solidFill>
-            <a:prstDash val="solid"/>
-          </a:ln>
-          <a:effectLst>
-            <a:outerShdw sx="100000" sy="100000" kx="0" ky="0" algn="bl" rotWithShape="0" blurRad="101600" dist="25400" dir="5400000">
-              <a:srgbClr val="000000">
-                <a:alpha val="14000"/>
-              </a:srgbClr>
-            </a:outerShdw>
-          </a:effectLst>
-        </p:spPr>
-      </p:sp>
-      <p:sp>
-        <p:nvSpPr>
-          <p:cNvPr id="8" name="Text 6"/>
-          <p:cNvSpPr txBox="1"/>
-          <p:nvPr/>
-        </p:nvSpPr>
-        <p:spPr>
-          <a:xfrm>
-            <a:off x="4572000" y="1920240"/>
-            <a:ext cx="3017520" cy="914400"/>
-          </a:xfrm>
-          <a:prstGeom prst="rect">
-            <a:avLst/>
-          </a:prstGeom>
-          <a:noFill/>
-          <a:ln/>
-        </p:spPr>
-        <p:txBody>
-          <a:bodyPr wrap="square" lIns="0" tIns="0" rIns="0" bIns="0" rtlCol="0" anchor="t"/>
-          <a:lstStyle/>
-          <a:p>
-            <a:pPr indent="0" marL="0">
-              <a:buNone/>
-            </a:pPr>
-            <a:r>
-              <a:rPr lang="en-US" sz="4400" b="1" dirty="0">
-                <a:solidFill>
-                  <a:srgbClr val="0F5C54"/>
-                </a:solidFill>
-                <a:latin typeface="Cambria" pitchFamily="34" charset="0"/>
-                <a:ea typeface="Cambria" pitchFamily="34" charset="-122"/>
-                <a:cs typeface="Cambria" pitchFamily="34" charset="-120"/>
-              </a:rPr>
-              <a:t>7.87%</a:t>
-            </a:r>
-            <a:endParaRPr lang="en-US" sz="4400" dirty="0"/>
-          </a:p>
-        </p:txBody>
-      </p:sp>
-      <p:sp>
-        <p:nvSpPr>
-          <p:cNvPr id="9" name="Text 7"/>
-          <p:cNvSpPr txBox="1"/>
-          <p:nvPr/>
-        </p:nvSpPr>
-        <p:spPr>
-          <a:xfrm>
-            <a:off x="4572000" y="2926080"/>
-            <a:ext cx="3017520" cy="731520"/>
-          </a:xfrm>
-          <a:prstGeom prst="rect">
-            <a:avLst/>
-          </a:prstGeom>
-          <a:noFill/>
-          <a:ln/>
-        </p:spPr>
-        <p:txBody>
-          <a:bodyPr wrap="square" lIns="0" tIns="0" rIns="0" bIns="0" rtlCol="0" anchor="t"/>
-          <a:lstStyle/>
-          <a:p>
-            <a:pPr indent="0" marL="0">
-              <a:buNone/>
-            </a:pPr>
-            <a:r>
-              <a:rPr lang="en-US" sz="1400" dirty="0">
-                <a:solidFill>
-                  <a:srgbClr val="64748B"/>
-                </a:solidFill>
-                <a:latin typeface="Calibri" pitchFamily="34" charset="0"/>
-                <a:ea typeface="Calibri" pitchFamily="34" charset="-122"/>
-                <a:cs typeface="Calibri" pitchFamily="34" charset="-120"/>
-              </a:rPr>
-              <a:t>admission forecast MAPE (naive: 11.43%)</a:t>
-            </a:r>
-            <a:endParaRPr lang="en-US" sz="1400" dirty="0"/>
-          </a:p>
-        </p:txBody>
-      </p:sp>
-      <p:sp>
-        <p:nvSpPr>
-          <p:cNvPr id="10" name="Shape 8"/>
-          <p:cNvSpPr/>
-          <p:nvPr/>
-        </p:nvSpPr>
-        <p:spPr>
-          <a:xfrm>
-            <a:off x="8046720" y="1600200"/>
-            <a:ext cx="3520440" cy="2240280"/>
-          </a:xfrm>
-          <a:prstGeom prst="roundRect">
-            <a:avLst>
-              <a:gd name="adj" fmla="val 3265"/>
-            </a:avLst>
-          </a:prstGeom>
-          <a:solidFill>
-            <a:srgbClr val="FFFFFF"/>
-          </a:solidFill>
-          <a:ln w="9525">
-            <a:solidFill>
-              <a:srgbClr val="E2E8F0"/>
-            </a:solidFill>
-            <a:prstDash val="solid"/>
-          </a:ln>
-          <a:effectLst>
-            <a:outerShdw sx="100000" sy="100000" kx="0" ky="0" algn="bl" rotWithShape="0" blurRad="101600" dist="25400" dir="5400000">
-              <a:srgbClr val="000000">
-                <a:alpha val="14000"/>
-              </a:srgbClr>
-            </a:outerShdw>
-          </a:effectLst>
-        </p:spPr>
-      </p:sp>
-      <p:sp>
-        <p:nvSpPr>
-          <p:cNvPr id="11" name="Text 9"/>
-          <p:cNvSpPr txBox="1"/>
-          <p:nvPr/>
-        </p:nvSpPr>
-        <p:spPr>
-          <a:xfrm>
-            <a:off x="8321040" y="1920240"/>
-            <a:ext cx="3017520" cy="914400"/>
-          </a:xfrm>
-          <a:prstGeom prst="rect">
-            <a:avLst/>
-          </a:prstGeom>
-          <a:noFill/>
-          <a:ln/>
-        </p:spPr>
-        <p:txBody>
-          <a:bodyPr wrap="square" lIns="0" tIns="0" rIns="0" bIns="0" rtlCol="0" anchor="t"/>
-          <a:lstStyle/>
-          <a:p>
-            <a:pPr indent="0" marL="0">
-              <a:buNone/>
-            </a:pPr>
-            <a:r>
-              <a:rPr lang="en-US" sz="4400" b="1" dirty="0">
-                <a:solidFill>
-                  <a:srgbClr val="F97360"/>
-                </a:solidFill>
-                <a:latin typeface="Cambria" pitchFamily="34" charset="0"/>
-                <a:ea typeface="Cambria" pitchFamily="34" charset="-122"/>
-                <a:cs typeface="Cambria" pitchFamily="34" charset="-120"/>
-              </a:rPr>
-              <a:t>−21%</a:t>
-            </a:r>
-            <a:endParaRPr lang="en-US" sz="4400" dirty="0"/>
-          </a:p>
-        </p:txBody>
-      </p:sp>
-      <p:sp>
-        <p:nvSpPr>
-          <p:cNvPr id="12" name="Text 10"/>
-          <p:cNvSpPr txBox="1"/>
-          <p:nvPr/>
-        </p:nvSpPr>
-        <p:spPr>
-          <a:xfrm>
-            <a:off x="8321040" y="2926080"/>
-            <a:ext cx="3017520" cy="731520"/>
-          </a:xfrm>
-          <a:prstGeom prst="rect">
-            <a:avLst/>
-          </a:prstGeom>
-          <a:noFill/>
-          <a:ln/>
-        </p:spPr>
-        <p:txBody>
-          <a:bodyPr wrap="square" lIns="0" tIns="0" rIns="0" bIns="0" rtlCol="0" anchor="t"/>
-          <a:lstStyle/>
-          <a:p>
-            <a:pPr indent="0" marL="0">
-              <a:buNone/>
-            </a:pPr>
-            <a:r>
-              <a:rPr lang="en-US" sz="1400" dirty="0">
-                <a:solidFill>
-                  <a:srgbClr val="64748B"/>
-                </a:solidFill>
-                <a:latin typeface="Calibri" pitchFamily="34" charset="0"/>
-                <a:ea typeface="Calibri" pitchFamily="34" charset="-122"/>
-                <a:cs typeface="Calibri" pitchFamily="34" charset="-120"/>
-              </a:rPr>
-              <a:t>length-of-stay error vs baseline (MAE 2.07 d)</a:t>
-            </a:r>
-            <a:endParaRPr lang="en-US" sz="1400" dirty="0"/>
-          </a:p>
-        </p:txBody>
-      </p:sp>
-      <p:sp>
-        <p:nvSpPr>
-          <p:cNvPr id="13" name="Shape 11"/>
-          <p:cNvSpPr/>
-          <p:nvPr/>
-        </p:nvSpPr>
-        <p:spPr>
-          <a:xfrm>
-            <a:off x="548640" y="4069080"/>
-            <a:ext cx="3520440" cy="2240280"/>
-          </a:xfrm>
-          <a:prstGeom prst="roundRect">
-            <a:avLst>
-              <a:gd name="adj" fmla="val 3265"/>
-            </a:avLst>
-          </a:prstGeom>
-          <a:solidFill>
-            <a:srgbClr val="FFFFFF"/>
-          </a:solidFill>
-          <a:ln w="9525">
-            <a:solidFill>
-              <a:srgbClr val="E2E8F0"/>
-            </a:solidFill>
-            <a:prstDash val="solid"/>
-          </a:ln>
-          <a:effectLst>
-            <a:outerShdw sx="100000" sy="100000" kx="0" ky="0" algn="bl" rotWithShape="0" blurRad="101600" dist="25400" dir="5400000">
-              <a:srgbClr val="000000">
-                <a:alpha val="14000"/>
-              </a:srgbClr>
-            </a:outerShdw>
-          </a:effectLst>
-        </p:spPr>
-      </p:sp>
-      <p:sp>
-        <p:nvSpPr>
-          <p:cNvPr id="14" name="Text 12"/>
-          <p:cNvSpPr txBox="1"/>
-          <p:nvPr/>
-        </p:nvSpPr>
-        <p:spPr>
-          <a:xfrm>
-            <a:off x="822960" y="4389120"/>
-            <a:ext cx="3017520" cy="914400"/>
-          </a:xfrm>
-          <a:prstGeom prst="rect">
-            <a:avLst/>
-          </a:prstGeom>
-          <a:noFill/>
-          <a:ln/>
-        </p:spPr>
-        <p:txBody>
-          <a:bodyPr wrap="square" lIns="0" tIns="0" rIns="0" bIns="0" rtlCol="0" anchor="t"/>
-          <a:lstStyle/>
-          <a:p>
-            <a:pPr indent="0" marL="0">
-              <a:buNone/>
-            </a:pPr>
-            <a:r>
-              <a:rPr lang="en-US" sz="4400" b="1" dirty="0">
-                <a:solidFill>
-                  <a:srgbClr val="0F5C54"/>
-                </a:solidFill>
-                <a:latin typeface="Cambria" pitchFamily="34" charset="0"/>
-                <a:ea typeface="Cambria" pitchFamily="34" charset="-122"/>
-                <a:cs typeface="Cambria" pitchFamily="34" charset="-120"/>
-              </a:rPr>
-              <a:t>2.0 s</a:t>
-            </a:r>
-            <a:endParaRPr lang="en-US" sz="4400" dirty="0"/>
-          </a:p>
-        </p:txBody>
-      </p:sp>
-      <p:sp>
-        <p:nvSpPr>
-          <p:cNvPr id="15" name="Text 13"/>
-          <p:cNvSpPr txBox="1"/>
-          <p:nvPr/>
-        </p:nvSpPr>
-        <p:spPr>
-          <a:xfrm>
-            <a:off x="822960" y="5394960"/>
-            <a:ext cx="3017520" cy="731520"/>
-          </a:xfrm>
-          <a:prstGeom prst="rect">
-            <a:avLst/>
-          </a:prstGeom>
-          <a:noFill/>
-          <a:ln/>
-        </p:spPr>
-        <p:txBody>
-          <a:bodyPr wrap="square" lIns="0" tIns="0" rIns="0" bIns="0" rtlCol="0" anchor="t"/>
-          <a:lstStyle/>
-          <a:p>
-            <a:pPr indent="0" marL="0">
-              <a:buNone/>
-            </a:pPr>
-            <a:r>
-              <a:rPr lang="en-US" sz="1400" dirty="0">
-                <a:solidFill>
-                  <a:srgbClr val="64748B"/>
-                </a:solidFill>
-                <a:latin typeface="Calibri" pitchFamily="34" charset="0"/>
-                <a:ea typeface="Calibri" pitchFamily="34" charset="-122"/>
-                <a:cs typeface="Calibri" pitchFamily="34" charset="-120"/>
-              </a:rPr>
-              <a:t>optimal 7-day roster for 77 staff</a:t>
-            </a:r>
-            <a:endParaRPr lang="en-US" sz="1400" dirty="0"/>
-          </a:p>
-        </p:txBody>
-      </p:sp>
-      <p:sp>
-        <p:nvSpPr>
-          <p:cNvPr id="16" name="Shape 14"/>
-          <p:cNvSpPr/>
-          <p:nvPr/>
-        </p:nvSpPr>
-        <p:spPr>
-          <a:xfrm>
-            <a:off x="4297680" y="4069080"/>
-            <a:ext cx="3520440" cy="2240280"/>
-          </a:xfrm>
-          <a:prstGeom prst="roundRect">
-            <a:avLst>
-              <a:gd name="adj" fmla="val 3265"/>
-            </a:avLst>
-          </a:prstGeom>
-          <a:solidFill>
-            <a:srgbClr val="FFFFFF"/>
-          </a:solidFill>
-          <a:ln w="9525">
-            <a:solidFill>
-              <a:srgbClr val="E2E8F0"/>
-            </a:solidFill>
-            <a:prstDash val="solid"/>
-          </a:ln>
-          <a:effectLst>
-            <a:outerShdw sx="100000" sy="100000" kx="0" ky="0" algn="bl" rotWithShape="0" blurRad="101600" dist="25400" dir="5400000">
-              <a:srgbClr val="000000">
-                <a:alpha val="14000"/>
-              </a:srgbClr>
-            </a:outerShdw>
-          </a:effectLst>
-        </p:spPr>
-      </p:sp>
-      <p:sp>
-        <p:nvSpPr>
-          <p:cNvPr id="17" name="Text 15"/>
-          <p:cNvSpPr txBox="1"/>
-          <p:nvPr/>
-        </p:nvSpPr>
-        <p:spPr>
-          <a:xfrm>
-            <a:off x="4572000" y="4389120"/>
-            <a:ext cx="3017520" cy="914400"/>
-          </a:xfrm>
-          <a:prstGeom prst="rect">
-            <a:avLst/>
-          </a:prstGeom>
-          <a:noFill/>
-          <a:ln/>
-        </p:spPr>
-        <p:txBody>
-          <a:bodyPr wrap="square" lIns="0" tIns="0" rIns="0" bIns="0" rtlCol="0" anchor="t"/>
-          <a:lstStyle/>
-          <a:p>
-            <a:pPr indent="0" marL="0">
-              <a:buNone/>
-            </a:pPr>
-            <a:r>
-              <a:rPr lang="en-US" sz="4400" b="1" dirty="0">
-                <a:solidFill>
-                  <a:srgbClr val="0F5C54"/>
-                </a:solidFill>
-                <a:latin typeface="Cambria" pitchFamily="34" charset="0"/>
-                <a:ea typeface="Cambria" pitchFamily="34" charset="-122"/>
-                <a:cs typeface="Cambria" pitchFamily="34" charset="-120"/>
-              </a:rPr>
-              <a:t>38 / 38</a:t>
-            </a:r>
-            <a:endParaRPr lang="en-US" sz="4400" dirty="0"/>
-          </a:p>
-        </p:txBody>
-      </p:sp>
-      <p:sp>
-        <p:nvSpPr>
-          <p:cNvPr id="18" name="Text 16"/>
-          <p:cNvSpPr txBox="1"/>
-          <p:nvPr/>
-        </p:nvSpPr>
-        <p:spPr>
-          <a:xfrm>
-            <a:off x="4572000" y="5394960"/>
-            <a:ext cx="3017520" cy="731520"/>
-          </a:xfrm>
-          <a:prstGeom prst="rect">
-            <a:avLst/>
-          </a:prstGeom>
-          <a:noFill/>
-          <a:ln/>
-        </p:spPr>
-        <p:txBody>
-          <a:bodyPr wrap="square" lIns="0" tIns="0" rIns="0" bIns="0" rtlCol="0" anchor="t"/>
-          <a:lstStyle/>
-          <a:p>
-            <a:pPr indent="0" marL="0">
-              <a:buNone/>
-            </a:pPr>
-            <a:r>
-              <a:rPr lang="en-US" sz="1400" dirty="0">
-                <a:solidFill>
-                  <a:srgbClr val="64748B"/>
-                </a:solidFill>
-                <a:latin typeface="Calibri" pitchFamily="34" charset="0"/>
-                <a:ea typeface="Calibri" pitchFamily="34" charset="-122"/>
-                <a:cs typeface="Calibri" pitchFamily="34" charset="-120"/>
-              </a:rPr>
-              <a:t>automated tests passing</a:t>
-            </a:r>
-            <a:endParaRPr lang="en-US" sz="1400" dirty="0"/>
-          </a:p>
-        </p:txBody>
-      </p:sp>
-      <p:sp>
-        <p:nvSpPr>
-          <p:cNvPr id="19" name="Shape 17"/>
-          <p:cNvSpPr/>
-          <p:nvPr/>
-        </p:nvSpPr>
-        <p:spPr>
-          <a:xfrm>
-            <a:off x="8046720" y="4069080"/>
-            <a:ext cx="3520440" cy="2240280"/>
-          </a:xfrm>
-          <a:prstGeom prst="roundRect">
-            <a:avLst>
-              <a:gd name="adj" fmla="val 3265"/>
-            </a:avLst>
-          </a:prstGeom>
-          <a:solidFill>
-            <a:srgbClr val="FFFFFF"/>
-          </a:solidFill>
-          <a:ln w="9525">
-            <a:solidFill>
-              <a:srgbClr val="E2E8F0"/>
-            </a:solidFill>
-            <a:prstDash val="solid"/>
-          </a:ln>
-          <a:effectLst>
-            <a:outerShdw sx="100000" sy="100000" kx="0" ky="0" algn="bl" rotWithShape="0" blurRad="101600" dist="25400" dir="5400000">
-              <a:srgbClr val="000000">
-                <a:alpha val="14000"/>
-              </a:srgbClr>
-            </a:outerShdw>
-          </a:effectLst>
-        </p:spPr>
-      </p:sp>
-      <p:sp>
-        <p:nvSpPr>
-          <p:cNvPr id="20" name="Text 18"/>
-          <p:cNvSpPr txBox="1"/>
-          <p:nvPr/>
-        </p:nvSpPr>
-        <p:spPr>
-          <a:xfrm>
-            <a:off x="8321040" y="4389120"/>
-            <a:ext cx="3017520" cy="914400"/>
-          </a:xfrm>
-          <a:prstGeom prst="rect">
-            <a:avLst/>
-          </a:prstGeom>
-          <a:noFill/>
-          <a:ln/>
-        </p:spPr>
-        <p:txBody>
-          <a:bodyPr wrap="square" lIns="0" tIns="0" rIns="0" bIns="0" rtlCol="0" anchor="t"/>
-          <a:lstStyle/>
-          <a:p>
-            <a:pPr indent="0" marL="0">
-              <a:buNone/>
-            </a:pPr>
-            <a:r>
-              <a:rPr lang="en-US" sz="4400" b="1" dirty="0">
-                <a:solidFill>
-                  <a:srgbClr val="0F5C54"/>
-                </a:solidFill>
-                <a:latin typeface="Cambria" pitchFamily="34" charset="0"/>
-                <a:ea typeface="Cambria" pitchFamily="34" charset="-122"/>
-                <a:cs typeface="Cambria" pitchFamily="34" charset="-120"/>
-              </a:rPr>
-              <a:t>~3 s</a:t>
-            </a:r>
-            <a:endParaRPr lang="en-US" sz="4400" dirty="0"/>
-          </a:p>
-        </p:txBody>
-      </p:sp>
-      <p:sp>
-        <p:nvSpPr>
-          <p:cNvPr id="21" name="Text 19"/>
-          <p:cNvSpPr txBox="1"/>
-          <p:nvPr/>
-        </p:nvSpPr>
-        <p:spPr>
-          <a:xfrm>
-            <a:off x="8321040" y="5394960"/>
-            <a:ext cx="3017520" cy="731520"/>
-          </a:xfrm>
-          <a:prstGeom prst="rect">
-            <a:avLst/>
-          </a:prstGeom>
-          <a:noFill/>
-          <a:ln/>
-        </p:spPr>
-        <p:txBody>
-          <a:bodyPr wrap="square" lIns="0" tIns="0" rIns="0" bIns="0" rtlCol="0" anchor="t"/>
-          <a:lstStyle/>
-          <a:p>
-            <a:pPr indent="0" marL="0">
-              <a:buNone/>
-            </a:pPr>
-            <a:r>
-              <a:rPr lang="en-US" sz="1400" dirty="0">
-                <a:solidFill>
-                  <a:srgbClr val="64748B"/>
-                </a:solidFill>
-                <a:latin typeface="Calibri" pitchFamily="34" charset="0"/>
-                <a:ea typeface="Calibri" pitchFamily="34" charset="-122"/>
-                <a:cs typeface="Calibri" pitchFamily="34" charset="-120"/>
-              </a:rPr>
-              <a:t>full multi-agent orchestration (with live pacing)</a:t>
-            </a:r>
-            <a:endParaRPr lang="en-US" sz="1400" dirty="0"/>
-          </a:p>
-        </p:txBody>
-      </p:sp>
-      <p:sp>
-        <p:nvSpPr>
-          <p:cNvPr id="22" name="Text 20"/>
+              <a:rPr lang="en-US" sz="1500" b="1" dirty="0">
+                <a:solidFill>
+                  <a:srgbClr val="0F172A"/>
+                </a:solidFill>
+                <a:latin typeface="Calibri" pitchFamily="34" charset="0"/>
+                <a:ea typeface="Calibri" pitchFamily="34" charset="-122"/>
+                <a:cs typeface="Calibri" pitchFamily="34" charset="-120"/>
+              </a:rPr>
+              <a:t>Defer elective admissions (−56% pressure)</a:t>
+            </a:r>
+            <a:endParaRPr lang="en-US" sz="1500" dirty="0"/>
+          </a:p>
+        </p:txBody>
+      </p:sp>
+      <p:sp>
+        <p:nvSpPr>
+          <p:cNvPr id="19" name="Text 16"/>
+          <p:cNvSpPr txBox="1"/>
+          <p:nvPr/>
+        </p:nvSpPr>
+        <p:spPr>
+          <a:xfrm>
+            <a:off x="7635240" y="6263640"/>
+            <a:ext cx="4114800" cy="548640"/>
+          </a:xfrm>
+          <a:prstGeom prst="rect">
+            <a:avLst/>
+          </a:prstGeom>
+          <a:noFill/>
+          <a:ln/>
+        </p:spPr>
+        <p:txBody>
+          <a:bodyPr wrap="square" lIns="0" tIns="0" rIns="0" bIns="0" rtlCol="0" anchor="t"/>
+          <a:lstStyle/>
+          <a:p>
+            <a:pPr marL="228600" indent="-228600">
+              <a:spcAft>
+                <a:spcPts val="600"/>
+              </a:spcAft>
+              <a:buSzPct val="100000"/>
+              <a:buChar char="•"/>
+            </a:pPr>
+            <a:r>
+              <a:rPr lang="en-US" sz="1150" dirty="0">
+                <a:solidFill>
+                  <a:srgbClr val="0F172A"/>
+                </a:solidFill>
+                <a:latin typeface="Calibri" pitchFamily="34" charset="0"/>
+                <a:ea typeface="Calibri" pitchFamily="34" charset="-122"/>
+                <a:cs typeface="Calibri" pitchFamily="34" charset="-120"/>
+              </a:rPr>
+              <a:t>Same random streams for both runs → the difference is the scenario, not noise</a:t>
+            </a:r>
+            <a:endParaRPr lang="en-US" sz="1150" dirty="0"/>
+          </a:p>
+          <a:p>
+            <a:pPr marL="228600" indent="-228600">
+              <a:spcAft>
+                <a:spcPts val="600"/>
+              </a:spcAft>
+              <a:buSzPct val="100000"/>
+              <a:buChar char="•"/>
+            </a:pPr>
+            <a:r>
+              <a:rPr lang="en-US" sz="1150" dirty="0">
+                <a:solidFill>
+                  <a:srgbClr val="0F172A"/>
+                </a:solidFill>
+                <a:latin typeface="Calibri" pitchFamily="34" charset="0"/>
+                <a:ea typeface="Calibri" pitchFamily="34" charset="-122"/>
+                <a:cs typeface="Calibri" pitchFamily="34" charset="-120"/>
+              </a:rPr>
+              <a:t>20 replications in 0.5 s — interactive</a:t>
+            </a:r>
+            <a:endParaRPr lang="en-US" sz="1150" dirty="0"/>
+          </a:p>
+        </p:txBody>
+      </p:sp>
+      <p:sp>
+        <p:nvSpPr>
+          <p:cNvPr id="20" name="Text 17"/>
           <p:cNvSpPr txBox="1"/>
           <p:nvPr/>
         </p:nvSpPr>
@@ -4383,7 +5682,7 @@
                 <a:ea typeface="Calibri" pitchFamily="34" charset="-122"/>
                 <a:cs typeface="Calibri" pitchFamily="34" charset="-120"/>
               </a:rPr>
-              <a:t>11</a:t>
+              <a:t>12</a:t>
             </a:r>
             <a:endParaRPr lang="en-US" sz="1000" dirty="0"/>
           </a:p>
@@ -4397,9 +5696,9 @@
 </p:sld>
 </file>
 
-<file path=ppt/slides/slide12.xml><?xml version="1.0" encoding="utf-8"?>
+<file path=ppt/slides/slide13.xml><?xml version="1.0" encoding="utf-8"?>
 <p:sld xmlns:a="http://schemas.openxmlformats.org/drawingml/2006/main" xmlns:r="http://schemas.openxmlformats.org/officeDocument/2006/relationships" xmlns:p="http://schemas.openxmlformats.org/presentationml/2006/main">
-  <p:cSld name="Slide 12">
+  <p:cSld name="Slide 13">
     <p:bg>
       <p:bgPr>
         <a:solidFill>
@@ -4454,7 +5753,7 @@
                 <a:ea typeface="Cambria" pitchFamily="34" charset="-122"/>
                 <a:cs typeface="Cambria" pitchFamily="34" charset="-120"/>
               </a:rPr>
-              <a:t>Forecasting accuracy</a:t>
+              <a:t>Closing the financial loop</a:t>
             </a:r>
             <a:endParaRPr lang="en-US" sz="3200" dirty="0"/>
           </a:p>
@@ -4493,7 +5792,7 @@
                 <a:ea typeface="Calibri" pitchFamily="34" charset="-122"/>
                 <a:cs typeface="Calibri" pitchFamily="34" charset="-120"/>
               </a:rPr>
-              <a:t>Holt-Winters vs. seasonal-naive baseline — 14-day hold-out MAPE (lower is better)</a:t>
+              <a:t>Charges captured from clinical activity · PM-JAY and insurer packages · claims and clearance at discharge</a:t>
             </a:r>
             <a:endParaRPr lang="en-US" sz="1500" dirty="0"/>
           </a:p>
@@ -4507,8 +5806,8 @@
         </p:nvSpPr>
         <p:spPr>
           <a:xfrm>
-            <a:off x="457200" y="1463040"/>
-            <a:ext cx="7498080" cy="5120640"/>
+            <a:off x="1176430" y="1463040"/>
+            <a:ext cx="5876739" cy="5120640"/>
           </a:xfrm>
           <a:prstGeom prst="roundRect">
             <a:avLst>
@@ -4533,131 +5832,481 @@
           </a:effectLst>
         </p:spPr>
       </p:sp>
-      <p:graphicFrame>
-        <p:nvGraphicFramePr>
-          <p:cNvPr id="5" name="Chart 0" descr=""/>
-          <p:cNvGraphicFramePr/>
-          <p:nvPr/>
-        </p:nvGraphicFramePr>
-        <p:xfrm>
-          <a:off x="640080" y="1645920"/>
-          <a:ext cx="7132320" cy="4754880"/>
-        </p:xfrm>
-        <a:graphic xmlns:a="http://schemas.openxmlformats.org/drawingml/2006/main">
-          <a:graphicData uri="http://schemas.openxmlformats.org/drawingml/2006/chart">
-            <c:chart xmlns:c="http://schemas.openxmlformats.org/drawingml/2006/chart" r:id="rId1"/>
-          </a:graphicData>
-        </a:graphic>
-      </p:graphicFrame>
-      <p:sp>
-        <p:nvSpPr>
-          <p:cNvPr id="6" name="Text 3"/>
-          <p:cNvSpPr txBox="1"/>
-          <p:nvPr/>
-        </p:nvSpPr>
-        <p:spPr>
-          <a:xfrm>
-            <a:off x="8321040" y="1737360"/>
-            <a:ext cx="3474720" cy="4572000"/>
-          </a:xfrm>
-          <a:prstGeom prst="rect">
-            <a:avLst/>
-          </a:prstGeom>
-          <a:noFill/>
-          <a:ln/>
-        </p:spPr>
-        <p:txBody>
-          <a:bodyPr wrap="square" lIns="0" tIns="0" rIns="0" bIns="0" rtlCol="0" anchor="t"/>
-          <a:lstStyle/>
-          <a:p>
-            <a:pPr marL="228600" indent="-228600">
-              <a:spcAft>
-                <a:spcPts val="600"/>
-              </a:spcAft>
-              <a:buSzPct val="100000"/>
-              <a:buChar char="•"/>
-            </a:pPr>
-            <a:r>
-              <a:rPr lang="en-US" sz="1500" dirty="0">
-                <a:solidFill>
-                  <a:srgbClr val="0F172A"/>
-                </a:solidFill>
-                <a:latin typeface="Calibri" pitchFamily="34" charset="0"/>
-                <a:ea typeface="Calibri" pitchFamily="34" charset="-122"/>
-                <a:cs typeface="Calibri" pitchFamily="34" charset="-120"/>
-              </a:rPr>
-              <a:t>Holt-Winters beats the baseline on every metric</a:t>
-            </a:r>
-            <a:endParaRPr lang="en-US" sz="1500" dirty="0"/>
-          </a:p>
-          <a:p>
-            <a:pPr marL="228600" indent="-228600">
-              <a:spcAft>
-                <a:spcPts val="600"/>
-              </a:spcAft>
-              <a:buSzPct val="100000"/>
-              <a:buChar char="•"/>
-            </a:pPr>
-            <a:r>
-              <a:rPr lang="en-US" sz="1500" dirty="0">
-                <a:solidFill>
-                  <a:srgbClr val="0F172A"/>
-                </a:solidFill>
-                <a:latin typeface="Calibri" pitchFamily="34" charset="0"/>
-                <a:ea typeface="Calibri" pitchFamily="34" charset="-122"/>
-                <a:cs typeface="Calibri" pitchFamily="34" charset="-120"/>
-              </a:rPr>
-              <a:t>Weekly pattern (Monday peak, Sunday low) captured automatically</a:t>
-            </a:r>
-            <a:endParaRPr lang="en-US" sz="1500" dirty="0"/>
-          </a:p>
-          <a:p>
-            <a:pPr marL="228600" indent="-228600">
-              <a:spcAft>
-                <a:spcPts val="600"/>
-              </a:spcAft>
-              <a:buSzPct val="100000"/>
-              <a:buChar char="•"/>
-            </a:pPr>
-            <a:r>
-              <a:rPr lang="en-US" sz="1500" dirty="0">
-                <a:solidFill>
-                  <a:srgbClr val="0F172A"/>
-                </a:solidFill>
-                <a:latin typeface="Calibri" pitchFamily="34" charset="0"/>
-                <a:ea typeface="Calibri" pitchFamily="34" charset="-122"/>
-                <a:cs typeface="Calibri" pitchFamily="34" charset="-120"/>
-              </a:rPr>
-              <a:t>Length-of-stay model: MAE 2.07 d vs 2.62 d baseline, R² 0.36</a:t>
-            </a:r>
-            <a:endParaRPr lang="en-US" sz="1500" dirty="0"/>
-          </a:p>
-          <a:p>
-            <a:pPr marL="228600" indent="-228600">
-              <a:spcAft>
-                <a:spcPts val="600"/>
-              </a:spcAft>
-              <a:buSzPct val="100000"/>
-              <a:buChar char="•"/>
-            </a:pPr>
-            <a:r>
-              <a:rPr lang="en-US" sz="1500" dirty="0">
-                <a:solidFill>
-                  <a:srgbClr val="0F172A"/>
-                </a:solidFill>
-                <a:latin typeface="Calibri" pitchFamily="34" charset="0"/>
-                <a:ea typeface="Calibri" pitchFamily="34" charset="-122"/>
-                <a:cs typeface="Calibri" pitchFamily="34" charset="-120"/>
-              </a:rPr>
-              <a:t>80% interval coverage 78% — honest uncertainty</a:t>
-            </a:r>
-            <a:endParaRPr lang="en-US" sz="1500" dirty="0"/>
-          </a:p>
-        </p:txBody>
+      <p:pic>
+        <p:nvPicPr>
+          <p:cNvPr id="5" name="Image 0" descr="C:\Users\HP\AppData\Local\Temp\claude\D--codin-idea-lab\87151ddf-948a-4e83-8159-c0449757400e\scratchpad\report\shots\billing.png">    </p:cNvPr>
+          <p:cNvPicPr>
+            <a:picLocks noChangeAspect="1"/>
+          </p:cNvPicPr>
+          <p:nvPr/>
+        </p:nvPicPr>
+        <p:blipFill>
+          <a:blip r:embed="rId1"/>
+          <a:stretch>
+            <a:fillRect/>
+          </a:stretch>
+        </p:blipFill>
+        <p:spPr>
+          <a:xfrm>
+            <a:off x="1249582" y="1536192"/>
+            <a:ext cx="5730435" cy="4974336"/>
+          </a:xfrm>
+          <a:prstGeom prst="rect">
+            <a:avLst/>
+          </a:prstGeom>
+        </p:spPr>
+      </p:pic>
+      <p:sp>
+        <p:nvSpPr>
+          <p:cNvPr id="6" name="Shape 3"/>
+          <p:cNvSpPr/>
+          <p:nvPr/>
+        </p:nvSpPr>
+        <p:spPr>
+          <a:xfrm>
+            <a:off x="8092440" y="1554480"/>
+            <a:ext cx="3611880" cy="1115568"/>
+          </a:xfrm>
+          <a:prstGeom prst="roundRect">
+            <a:avLst>
+              <a:gd name="adj" fmla="val 6557"/>
+            </a:avLst>
+          </a:prstGeom>
+          <a:solidFill>
+            <a:srgbClr val="FFFFFF"/>
+          </a:solidFill>
+          <a:ln w="9525">
+            <a:solidFill>
+              <a:srgbClr val="E2E8F0"/>
+            </a:solidFill>
+            <a:prstDash val="solid"/>
+          </a:ln>
+          <a:effectLst>
+            <a:outerShdw sx="100000" sy="100000" kx="0" ky="0" algn="bl" rotWithShape="0" blurRad="101600" dist="25400" dir="5400000">
+              <a:srgbClr val="000000">
+                <a:alpha val="14000"/>
+              </a:srgbClr>
+            </a:outerShdw>
+          </a:effectLst>
+        </p:spPr>
       </p:sp>
       <p:sp>
         <p:nvSpPr>
           <p:cNvPr id="7" name="Text 4"/>
+          <p:cNvSpPr txBox="1"/>
+          <p:nvPr/>
+        </p:nvSpPr>
+        <p:spPr>
+          <a:xfrm>
+            <a:off x="8275320" y="1664208"/>
+            <a:ext cx="3291840" cy="548640"/>
+          </a:xfrm>
+          <a:prstGeom prst="rect">
+            <a:avLst/>
+          </a:prstGeom>
+          <a:noFill/>
+          <a:ln/>
+        </p:spPr>
+        <p:txBody>
+          <a:bodyPr wrap="square" lIns="0" tIns="0" rIns="0" bIns="0" rtlCol="0" anchor="t"/>
+          <a:lstStyle/>
+          <a:p>
+            <a:pPr indent="0" marL="0">
+              <a:buNone/>
+            </a:pPr>
+            <a:r>
+              <a:rPr lang="en-US" sz="2400" b="1" dirty="0">
+                <a:solidFill>
+                  <a:srgbClr val="0F5C54"/>
+                </a:solidFill>
+                <a:latin typeface="Cambria" pitchFamily="34" charset="0"/>
+                <a:ea typeface="Cambria" pitchFamily="34" charset="-122"/>
+                <a:cs typeface="Cambria" pitchFamily="34" charset="-120"/>
+              </a:rPr>
+              <a:t>₹11,74,376</a:t>
+            </a:r>
+            <a:endParaRPr lang="en-US" sz="2400" dirty="0"/>
+          </a:p>
+        </p:txBody>
+      </p:sp>
+      <p:sp>
+        <p:nvSpPr>
+          <p:cNvPr id="8" name="Text 5"/>
+          <p:cNvSpPr txBox="1"/>
+          <p:nvPr/>
+        </p:nvSpPr>
+        <p:spPr>
+          <a:xfrm>
+            <a:off x="8275320" y="2231136"/>
+            <a:ext cx="3291840" cy="365760"/>
+          </a:xfrm>
+          <a:prstGeom prst="rect">
+            <a:avLst/>
+          </a:prstGeom>
+          <a:noFill/>
+          <a:ln/>
+        </p:spPr>
+        <p:txBody>
+          <a:bodyPr wrap="square" lIns="0" tIns="0" rIns="0" bIns="0" rtlCol="0" anchor="t"/>
+          <a:lstStyle/>
+          <a:p>
+            <a:pPr indent="0" marL="0">
+              <a:buNone/>
+            </a:pPr>
+            <a:r>
+              <a:rPr lang="en-US" sz="1200" dirty="0">
+                <a:solidFill>
+                  <a:srgbClr val="64748B"/>
+                </a:solidFill>
+                <a:latin typeface="Calibri" pitchFamily="34" charset="0"/>
+                <a:ea typeface="Calibri" pitchFamily="34" charset="-122"/>
+                <a:cs typeface="Calibri" pitchFamily="34" charset="-120"/>
+              </a:rPr>
+              <a:t>billed across 67 open episodes</a:t>
+            </a:r>
+            <a:endParaRPr lang="en-US" sz="1200" dirty="0"/>
+          </a:p>
+        </p:txBody>
+      </p:sp>
+      <p:sp>
+        <p:nvSpPr>
+          <p:cNvPr id="9" name="Shape 6"/>
+          <p:cNvSpPr/>
+          <p:nvPr/>
+        </p:nvSpPr>
+        <p:spPr>
+          <a:xfrm>
+            <a:off x="8092440" y="2834640"/>
+            <a:ext cx="3611880" cy="1115568"/>
+          </a:xfrm>
+          <a:prstGeom prst="roundRect">
+            <a:avLst>
+              <a:gd name="adj" fmla="val 6557"/>
+            </a:avLst>
+          </a:prstGeom>
+          <a:solidFill>
+            <a:srgbClr val="FFFFFF"/>
+          </a:solidFill>
+          <a:ln w="9525">
+            <a:solidFill>
+              <a:srgbClr val="E2E8F0"/>
+            </a:solidFill>
+            <a:prstDash val="solid"/>
+          </a:ln>
+          <a:effectLst>
+            <a:outerShdw sx="100000" sy="100000" kx="0" ky="0" algn="bl" rotWithShape="0" blurRad="101600" dist="25400" dir="5400000">
+              <a:srgbClr val="000000">
+                <a:alpha val="14000"/>
+              </a:srgbClr>
+            </a:outerShdw>
+          </a:effectLst>
+        </p:spPr>
+      </p:sp>
+      <p:sp>
+        <p:nvSpPr>
+          <p:cNvPr id="10" name="Text 7"/>
+          <p:cNvSpPr txBox="1"/>
+          <p:nvPr/>
+        </p:nvSpPr>
+        <p:spPr>
+          <a:xfrm>
+            <a:off x="8275320" y="2944368"/>
+            <a:ext cx="3291840" cy="548640"/>
+          </a:xfrm>
+          <a:prstGeom prst="rect">
+            <a:avLst/>
+          </a:prstGeom>
+          <a:noFill/>
+          <a:ln/>
+        </p:spPr>
+        <p:txBody>
+          <a:bodyPr wrap="square" lIns="0" tIns="0" rIns="0" bIns="0" rtlCol="0" anchor="t"/>
+          <a:lstStyle/>
+          <a:p>
+            <a:pPr indent="0" marL="0">
+              <a:buNone/>
+            </a:pPr>
+            <a:r>
+              <a:rPr lang="en-US" sz="2400" b="1" dirty="0">
+                <a:solidFill>
+                  <a:srgbClr val="0F5C54"/>
+                </a:solidFill>
+                <a:latin typeface="Cambria" pitchFamily="34" charset="0"/>
+                <a:ea typeface="Cambria" pitchFamily="34" charset="-122"/>
+                <a:cs typeface="Cambria" pitchFamily="34" charset="-120"/>
+              </a:rPr>
+              <a:t>₹3,54,433</a:t>
+            </a:r>
+            <a:endParaRPr lang="en-US" sz="2400" dirty="0"/>
+          </a:p>
+        </p:txBody>
+      </p:sp>
+      <p:sp>
+        <p:nvSpPr>
+          <p:cNvPr id="11" name="Text 8"/>
+          <p:cNvSpPr txBox="1"/>
+          <p:nvPr/>
+        </p:nvSpPr>
+        <p:spPr>
+          <a:xfrm>
+            <a:off x="8275320" y="3511296"/>
+            <a:ext cx="3291840" cy="365760"/>
+          </a:xfrm>
+          <a:prstGeom prst="rect">
+            <a:avLst/>
+          </a:prstGeom>
+          <a:noFill/>
+          <a:ln/>
+        </p:spPr>
+        <p:txBody>
+          <a:bodyPr wrap="square" lIns="0" tIns="0" rIns="0" bIns="0" rtlCol="0" anchor="t"/>
+          <a:lstStyle/>
+          <a:p>
+            <a:pPr indent="0" marL="0">
+              <a:buNone/>
+            </a:pPr>
+            <a:r>
+              <a:rPr lang="en-US" sz="1200" dirty="0">
+                <a:solidFill>
+                  <a:srgbClr val="64748B"/>
+                </a:solidFill>
+                <a:latin typeface="Calibri" pitchFamily="34" charset="0"/>
+                <a:ea typeface="Calibri" pitchFamily="34" charset="-122"/>
+                <a:cs typeface="Calibri" pitchFamily="34" charset="-120"/>
+              </a:rPr>
+              <a:t>patient share still to collect</a:t>
+            </a:r>
+            <a:endParaRPr lang="en-US" sz="1200" dirty="0"/>
+          </a:p>
+        </p:txBody>
+      </p:sp>
+      <p:sp>
+        <p:nvSpPr>
+          <p:cNvPr id="12" name="Shape 9"/>
+          <p:cNvSpPr/>
+          <p:nvPr/>
+        </p:nvSpPr>
+        <p:spPr>
+          <a:xfrm>
+            <a:off x="8092440" y="4114800"/>
+            <a:ext cx="3611880" cy="1115568"/>
+          </a:xfrm>
+          <a:prstGeom prst="roundRect">
+            <a:avLst>
+              <a:gd name="adj" fmla="val 6557"/>
+            </a:avLst>
+          </a:prstGeom>
+          <a:solidFill>
+            <a:srgbClr val="CCFBF1"/>
+          </a:solidFill>
+          <a:ln w="9525">
+            <a:solidFill>
+              <a:srgbClr val="E2E8F0"/>
+            </a:solidFill>
+            <a:prstDash val="solid"/>
+          </a:ln>
+          <a:effectLst>
+            <a:outerShdw sx="100000" sy="100000" kx="0" ky="0" algn="bl" rotWithShape="0" blurRad="101600" dist="25400" dir="5400000">
+              <a:srgbClr val="000000">
+                <a:alpha val="14000"/>
+              </a:srgbClr>
+            </a:outerShdw>
+          </a:effectLst>
+        </p:spPr>
+      </p:sp>
+      <p:sp>
+        <p:nvSpPr>
+          <p:cNvPr id="13" name="Text 10"/>
+          <p:cNvSpPr txBox="1"/>
+          <p:nvPr/>
+        </p:nvSpPr>
+        <p:spPr>
+          <a:xfrm>
+            <a:off x="8275320" y="4224528"/>
+            <a:ext cx="3291840" cy="548640"/>
+          </a:xfrm>
+          <a:prstGeom prst="rect">
+            <a:avLst/>
+          </a:prstGeom>
+          <a:noFill/>
+          <a:ln/>
+        </p:spPr>
+        <p:txBody>
+          <a:bodyPr wrap="square" lIns="0" tIns="0" rIns="0" bIns="0" rtlCol="0" anchor="t"/>
+          <a:lstStyle/>
+          <a:p>
+            <a:pPr indent="0" marL="0">
+              <a:buNone/>
+            </a:pPr>
+            <a:r>
+              <a:rPr lang="en-US" sz="2400" b="1" dirty="0">
+                <a:solidFill>
+                  <a:srgbClr val="0F5C54"/>
+                </a:solidFill>
+                <a:latin typeface="Cambria" pitchFamily="34" charset="0"/>
+                <a:ea typeface="Cambria" pitchFamily="34" charset="-122"/>
+                <a:cs typeface="Cambria" pitchFamily="34" charset="-120"/>
+              </a:rPr>
+              <a:t>₹3,56,280</a:t>
+            </a:r>
+            <a:endParaRPr lang="en-US" sz="2400" dirty="0"/>
+          </a:p>
+        </p:txBody>
+      </p:sp>
+      <p:sp>
+        <p:nvSpPr>
+          <p:cNvPr id="14" name="Text 11"/>
+          <p:cNvSpPr txBox="1"/>
+          <p:nvPr/>
+        </p:nvSpPr>
+        <p:spPr>
+          <a:xfrm>
+            <a:off x="8275320" y="4791456"/>
+            <a:ext cx="3291840" cy="365760"/>
+          </a:xfrm>
+          <a:prstGeom prst="rect">
+            <a:avLst/>
+          </a:prstGeom>
+          <a:noFill/>
+          <a:ln/>
+        </p:spPr>
+        <p:txBody>
+          <a:bodyPr wrap="square" lIns="0" tIns="0" rIns="0" bIns="0" rtlCol="0" anchor="t"/>
+          <a:lstStyle/>
+          <a:p>
+            <a:pPr indent="0" marL="0">
+              <a:buNone/>
+            </a:pPr>
+            <a:r>
+              <a:rPr lang="en-US" sz="1200" dirty="0">
+                <a:solidFill>
+                  <a:srgbClr val="64748B"/>
+                </a:solidFill>
+                <a:latin typeface="Calibri" pitchFamily="34" charset="0"/>
+                <a:ea typeface="Calibri" pitchFamily="34" charset="-122"/>
+                <a:cs typeface="Calibri" pitchFamily="34" charset="-120"/>
+              </a:rPr>
+              <a:t>PM-JAY package adjustment</a:t>
+            </a:r>
+            <a:endParaRPr lang="en-US" sz="1200" dirty="0"/>
+          </a:p>
+        </p:txBody>
+      </p:sp>
+      <p:sp>
+        <p:nvSpPr>
+          <p:cNvPr id="15" name="Shape 12"/>
+          <p:cNvSpPr/>
+          <p:nvPr/>
+        </p:nvSpPr>
+        <p:spPr>
+          <a:xfrm>
+            <a:off x="8092440" y="5394960"/>
+            <a:ext cx="3611880" cy="1115568"/>
+          </a:xfrm>
+          <a:prstGeom prst="roundRect">
+            <a:avLst>
+              <a:gd name="adj" fmla="val 6557"/>
+            </a:avLst>
+          </a:prstGeom>
+          <a:solidFill>
+            <a:srgbClr val="FFFFFF"/>
+          </a:solidFill>
+          <a:ln w="9525">
+            <a:solidFill>
+              <a:srgbClr val="E2E8F0"/>
+            </a:solidFill>
+            <a:prstDash val="solid"/>
+          </a:ln>
+          <a:effectLst>
+            <a:outerShdw sx="100000" sy="100000" kx="0" ky="0" algn="bl" rotWithShape="0" blurRad="101600" dist="25400" dir="5400000">
+              <a:srgbClr val="000000">
+                <a:alpha val="14000"/>
+              </a:srgbClr>
+            </a:outerShdw>
+          </a:effectLst>
+        </p:spPr>
+      </p:sp>
+      <p:sp>
+        <p:nvSpPr>
+          <p:cNvPr id="16" name="Text 13"/>
+          <p:cNvSpPr txBox="1"/>
+          <p:nvPr/>
+        </p:nvSpPr>
+        <p:spPr>
+          <a:xfrm>
+            <a:off x="8275320" y="5504688"/>
+            <a:ext cx="3291840" cy="548640"/>
+          </a:xfrm>
+          <a:prstGeom prst="rect">
+            <a:avLst/>
+          </a:prstGeom>
+          <a:noFill/>
+          <a:ln/>
+        </p:spPr>
+        <p:txBody>
+          <a:bodyPr wrap="square" lIns="0" tIns="0" rIns="0" bIns="0" rtlCol="0" anchor="t"/>
+          <a:lstStyle/>
+          <a:p>
+            <a:pPr indent="0" marL="0">
+              <a:buNone/>
+            </a:pPr>
+            <a:r>
+              <a:rPr lang="en-US" sz="2400" b="1" dirty="0">
+                <a:solidFill>
+                  <a:srgbClr val="0F5C54"/>
+                </a:solidFill>
+                <a:latin typeface="Cambria" pitchFamily="34" charset="0"/>
+                <a:ea typeface="Cambria" pitchFamily="34" charset="-122"/>
+                <a:cs typeface="Cambria" pitchFamily="34" charset="-120"/>
+              </a:rPr>
+              <a:t>26 / 9 / 32</a:t>
+            </a:r>
+            <a:endParaRPr lang="en-US" sz="2400" dirty="0"/>
+          </a:p>
+        </p:txBody>
+      </p:sp>
+      <p:sp>
+        <p:nvSpPr>
+          <p:cNvPr id="17" name="Text 14"/>
+          <p:cNvSpPr txBox="1"/>
+          <p:nvPr/>
+        </p:nvSpPr>
+        <p:spPr>
+          <a:xfrm>
+            <a:off x="8275320" y="6071616"/>
+            <a:ext cx="3291840" cy="365760"/>
+          </a:xfrm>
+          <a:prstGeom prst="rect">
+            <a:avLst/>
+          </a:prstGeom>
+          <a:noFill/>
+          <a:ln/>
+        </p:spPr>
+        <p:txBody>
+          <a:bodyPr wrap="square" lIns="0" tIns="0" rIns="0" bIns="0" rtlCol="0" anchor="t"/>
+          <a:lstStyle/>
+          <a:p>
+            <a:pPr indent="0" marL="0">
+              <a:buNone/>
+            </a:pPr>
+            <a:r>
+              <a:rPr lang="en-US" sz="1200" dirty="0">
+                <a:solidFill>
+                  <a:srgbClr val="64748B"/>
+                </a:solidFill>
+                <a:latin typeface="Calibri" pitchFamily="34" charset="0"/>
+                <a:ea typeface="Calibri" pitchFamily="34" charset="-122"/>
+                <a:cs typeface="Calibri" pitchFamily="34" charset="-120"/>
+              </a:rPr>
+              <a:t>PM-JAY / insured / self-pay patients</a:t>
+            </a:r>
+            <a:endParaRPr lang="en-US" sz="1200" dirty="0"/>
+          </a:p>
+        </p:txBody>
+      </p:sp>
+      <p:sp>
+        <p:nvSpPr>
+          <p:cNvPr id="18" name="Text 15"/>
           <p:cNvSpPr txBox="1"/>
           <p:nvPr/>
         </p:nvSpPr>
@@ -4688,7 +6337,7 @@
                 <a:ea typeface="Calibri" pitchFamily="34" charset="-122"/>
                 <a:cs typeface="Calibri" pitchFamily="34" charset="-120"/>
               </a:rPr>
-              <a:t>12</a:t>
+              <a:t>13</a:t>
             </a:r>
             <a:endParaRPr lang="en-US" sz="1000" dirty="0"/>
           </a:p>
@@ -4702,9 +6351,9 @@
 </p:sld>
 </file>
 
-<file path=ppt/slides/slide13.xml><?xml version="1.0" encoding="utf-8"?>
+<file path=ppt/slides/slide14.xml><?xml version="1.0" encoding="utf-8"?>
 <p:sld xmlns:a="http://schemas.openxmlformats.org/drawingml/2006/main" xmlns:r="http://schemas.openxmlformats.org/officeDocument/2006/relationships" xmlns:p="http://schemas.openxmlformats.org/presentationml/2006/main">
-  <p:cSld name="Slide 13">
+  <p:cSld name="Slide 14">
     <p:bg>
       <p:bgPr>
         <a:solidFill>
@@ -4759,7 +6408,7 @@
                 <a:ea typeface="Cambria" pitchFamily="34" charset="-122"/>
                 <a:cs typeface="Cambria" pitchFamily="34" charset="-120"/>
               </a:rPr>
-              <a:t>One platform, every role</a:t>
+              <a:t>Built for the ward, not just the dashboard</a:t>
             </a:r>
             <a:endParaRPr lang="en-US" sz="3200" dirty="0"/>
           </a:p>
@@ -4798,7 +6447,7 @@
                 <a:ea typeface="Calibri" pitchFamily="34" charset="-122"/>
                 <a:cs typeface="Calibri" pitchFamily="34" charset="-120"/>
               </a:rPr>
-              <a:t>Twenty screens — role-specific dashboards, clinical workflows, analytics and a patient app</a:t>
+              <a:t>Hinglish copilot · ICU central monitor with smart alarms · AI-drafted notes and SBAR handover</a:t>
             </a:r>
             <a:endParaRPr lang="en-US" sz="1500" dirty="0"/>
           </a:p>
@@ -4812,12 +6461,12 @@
         </p:nvSpPr>
         <p:spPr>
           <a:xfrm>
-            <a:off x="818507" y="1417320"/>
-            <a:ext cx="4855226" cy="2286000"/>
+            <a:off x="1204794" y="1417320"/>
+            <a:ext cx="4082652" cy="2743200"/>
           </a:xfrm>
           <a:prstGeom prst="roundRect">
             <a:avLst>
-              <a:gd name="adj" fmla="val 3200"/>
+              <a:gd name="adj" fmla="val 2667"/>
             </a:avLst>
           </a:prstGeom>
           <a:solidFill>
@@ -4840,7 +6489,7 @@
       </p:sp>
       <p:pic>
         <p:nvPicPr>
-          <p:cNvPr id="5" name="Image 0" descr="C:\Users\HP\AppData\Local\Temp\claude\D--codin-idea-lab\87151ddf-948a-4e83-8159-c0449757400e\scratchpad\report\shots\g_inpatients.png">    </p:cNvPr>
+          <p:cNvPr id="5" name="Image 0" descr="C:\Users\HP\AppData\Local\Temp\claude\D--codin-idea-lab\87151ddf-948a-4e83-8159-c0449757400e\scratchpad\report\shots\copilot.png">    </p:cNvPr>
           <p:cNvPicPr>
             <a:picLocks noChangeAspect="1"/>
           </p:cNvPicPr>
@@ -4854,8 +6503,8 @@
         </p:blipFill>
         <p:spPr>
           <a:xfrm>
-            <a:off x="891659" y="1490472"/>
-            <a:ext cx="4708922" cy="2139696"/>
+            <a:off x="1277946" y="1490472"/>
+            <a:ext cx="3936348" cy="2596896"/>
           </a:xfrm>
           <a:prstGeom prst="rect">
             <a:avLst/>
@@ -4864,57 +6513,18 @@
       </p:pic>
       <p:sp>
         <p:nvSpPr>
-          <p:cNvPr id="6" name="Text 3"/>
-          <p:cNvSpPr txBox="1"/>
-          <p:nvPr/>
-        </p:nvSpPr>
-        <p:spPr>
-          <a:xfrm>
-            <a:off x="548640" y="3721608"/>
-            <a:ext cx="5394960" cy="292608"/>
-          </a:xfrm>
-          <a:prstGeom prst="rect">
-            <a:avLst/>
-          </a:prstGeom>
-          <a:noFill/>
-          <a:ln/>
-        </p:spPr>
-        <p:txBody>
-          <a:bodyPr wrap="square" lIns="0" tIns="0" rIns="0" bIns="0" rtlCol="0" anchor="t"/>
-          <a:lstStyle/>
-          <a:p>
-            <a:pPr algn="ctr" indent="0" marL="0">
-              <a:buNone/>
-            </a:pPr>
-            <a:r>
-              <a:rPr lang="en-US" sz="1300" b="1" dirty="0">
-                <a:solidFill>
-                  <a:srgbClr val="0F5C54"/>
-                </a:solidFill>
-                <a:latin typeface="Calibri" pitchFamily="34" charset="0"/>
-                <a:ea typeface="Calibri" pitchFamily="34" charset="-122"/>
-                <a:cs typeface="Calibri" pitchFamily="34" charset="-120"/>
-              </a:rPr>
-              <a:t>Inpatients &amp; early warning</a:t>
-            </a:r>
-            <a:endParaRPr lang="en-US" sz="1300" dirty="0"/>
-          </a:p>
-        </p:txBody>
-      </p:sp>
-      <p:sp>
-        <p:nvSpPr>
-          <p:cNvPr id="7" name="Shape 4"/>
+          <p:cNvPr id="6" name="Shape 3"/>
           <p:cNvSpPr/>
           <p:nvPr/>
         </p:nvSpPr>
         <p:spPr>
           <a:xfrm>
-            <a:off x="6487787" y="1417320"/>
-            <a:ext cx="4855226" cy="2286000"/>
+            <a:off x="7018203" y="1417320"/>
+            <a:ext cx="3885834" cy="2743200"/>
           </a:xfrm>
           <a:prstGeom prst="roundRect">
             <a:avLst>
-              <a:gd name="adj" fmla="val 3200"/>
+              <a:gd name="adj" fmla="val 2667"/>
             </a:avLst>
           </a:prstGeom>
           <a:solidFill>
@@ -4937,7 +6547,7 @@
       </p:sp>
       <p:pic>
         <p:nvPicPr>
-          <p:cNvPr id="8" name="Image 1" descr="C:\Users\HP\AppData\Local\Temp\claude\D--codin-idea-lab\87151ddf-948a-4e83-8159-c0449757400e\scratchpad\report\shots\g_patient.png">    </p:cNvPr>
+          <p:cNvPr id="7" name="Image 1" descr="C:\Users\HP\AppData\Local\Temp\claude\D--codin-idea-lab\87151ddf-948a-4e83-8159-c0449757400e\scratchpad\report\shots\monitor.png">    </p:cNvPr>
           <p:cNvPicPr>
             <a:picLocks noChangeAspect="1"/>
           </p:cNvPicPr>
@@ -4951,8 +6561,8 @@
         </p:blipFill>
         <p:spPr>
           <a:xfrm>
-            <a:off x="6560939" y="1490472"/>
-            <a:ext cx="4708922" cy="2139696"/>
+            <a:off x="7091355" y="1490472"/>
+            <a:ext cx="3739530" cy="2596896"/>
           </a:xfrm>
           <a:prstGeom prst="rect">
             <a:avLst/>
@@ -4961,57 +6571,18 @@
       </p:pic>
       <p:sp>
         <p:nvSpPr>
-          <p:cNvPr id="9" name="Text 5"/>
-          <p:cNvSpPr txBox="1"/>
-          <p:nvPr/>
-        </p:nvSpPr>
-        <p:spPr>
-          <a:xfrm>
-            <a:off x="6217920" y="3721608"/>
-            <a:ext cx="5394960" cy="292608"/>
-          </a:xfrm>
-          <a:prstGeom prst="rect">
-            <a:avLst/>
-          </a:prstGeom>
-          <a:noFill/>
-          <a:ln/>
-        </p:spPr>
-        <p:txBody>
-          <a:bodyPr wrap="square" lIns="0" tIns="0" rIns="0" bIns="0" rtlCol="0" anchor="t"/>
-          <a:lstStyle/>
-          <a:p>
-            <a:pPr algn="ctr" indent="0" marL="0">
-              <a:buNone/>
-            </a:pPr>
-            <a:r>
-              <a:rPr lang="en-US" sz="1300" b="1" dirty="0">
-                <a:solidFill>
-                  <a:srgbClr val="0F5C54"/>
-                </a:solidFill>
-                <a:latin typeface="Calibri" pitchFamily="34" charset="0"/>
-                <a:ea typeface="Calibri" pitchFamily="34" charset="-122"/>
-                <a:cs typeface="Calibri" pitchFamily="34" charset="-120"/>
-              </a:rPr>
-              <a:t>Patient record &amp; NEWS2 trend</a:t>
-            </a:r>
-            <a:endParaRPr lang="en-US" sz="1300" dirty="0"/>
-          </a:p>
-        </p:txBody>
-      </p:sp>
-      <p:sp>
-        <p:nvSpPr>
-          <p:cNvPr id="10" name="Shape 6"/>
+          <p:cNvPr id="8" name="Shape 4"/>
           <p:cNvSpPr/>
           <p:nvPr/>
         </p:nvSpPr>
         <p:spPr>
           <a:xfrm>
-            <a:off x="818507" y="4069080"/>
-            <a:ext cx="4855226" cy="2286000"/>
+            <a:off x="457200" y="4389120"/>
+            <a:ext cx="3611880" cy="2148840"/>
           </a:xfrm>
           <a:prstGeom prst="roundRect">
             <a:avLst>
-              <a:gd name="adj" fmla="val 3200"/>
+              <a:gd name="adj" fmla="val 3404"/>
             </a:avLst>
           </a:prstGeom>
           <a:solidFill>
@@ -5032,83 +6603,162 @@
           </a:effectLst>
         </p:spPr>
       </p:sp>
-      <p:pic>
-        <p:nvPicPr>
-          <p:cNvPr id="11" name="Image 2" descr="C:\Users\HP\AppData\Local\Temp\claude\D--codin-idea-lab\87151ddf-948a-4e83-8159-c0449757400e\scratchpad\report\shots\g_analytics.png">    </p:cNvPr>
-          <p:cNvPicPr>
-            <a:picLocks noChangeAspect="1"/>
-          </p:cNvPicPr>
-          <p:nvPr/>
-        </p:nvPicPr>
-        <p:blipFill>
-          <a:blip r:embed="rId3"/>
-          <a:stretch>
-            <a:fillRect/>
-          </a:stretch>
-        </p:blipFill>
-        <p:spPr>
-          <a:xfrm>
-            <a:off x="891659" y="4142232"/>
-            <a:ext cx="4708922" cy="2139696"/>
-          </a:xfrm>
-          <a:prstGeom prst="rect">
-            <a:avLst/>
-          </a:prstGeom>
-        </p:spPr>
-      </p:pic>
-      <p:sp>
-        <p:nvSpPr>
-          <p:cNvPr id="12" name="Text 7"/>
-          <p:cNvSpPr txBox="1"/>
-          <p:nvPr/>
-        </p:nvSpPr>
-        <p:spPr>
-          <a:xfrm>
-            <a:off x="548640" y="6373368"/>
-            <a:ext cx="5394960" cy="292608"/>
-          </a:xfrm>
-          <a:prstGeom prst="rect">
-            <a:avLst/>
-          </a:prstGeom>
-          <a:noFill/>
-          <a:ln/>
-        </p:spPr>
-        <p:txBody>
-          <a:bodyPr wrap="square" lIns="0" tIns="0" rIns="0" bIns="0" rtlCol="0" anchor="t"/>
+      <p:sp>
+        <p:nvSpPr>
+          <p:cNvPr id="9" name="Shape 5"/>
+          <p:cNvSpPr/>
+          <p:nvPr/>
+        </p:nvSpPr>
+        <p:spPr>
+          <a:xfrm>
+            <a:off x="685800" y="4590288"/>
+            <a:ext cx="457200" cy="457200"/>
+          </a:xfrm>
+          <a:prstGeom prst="ellipse">
+            <a:avLst/>
+          </a:prstGeom>
+          <a:solidFill>
+            <a:srgbClr val="0F5C54"/>
+          </a:solidFill>
+          <a:ln w="12700">
+            <a:solidFill>
+              <a:srgbClr val="0F5C54"/>
+            </a:solidFill>
+            <a:prstDash val="solid"/>
+          </a:ln>
+        </p:spPr>
+      </p:sp>
+      <p:sp>
+        <p:nvSpPr>
+          <p:cNvPr id="10" name="Text 6"/>
+          <p:cNvSpPr txBox="1"/>
+          <p:nvPr/>
+        </p:nvSpPr>
+        <p:spPr>
+          <a:xfrm>
+            <a:off x="685800" y="4590288"/>
+            <a:ext cx="457200" cy="457200"/>
+          </a:xfrm>
+          <a:prstGeom prst="rect">
+            <a:avLst/>
+          </a:prstGeom>
+          <a:noFill/>
+          <a:ln/>
+        </p:spPr>
+        <p:txBody>
+          <a:bodyPr wrap="square" lIns="0" tIns="0" rIns="0" bIns="0" rtlCol="0" anchor="ctr"/>
           <a:lstStyle/>
           <a:p>
             <a:pPr algn="ctr" indent="0" marL="0">
               <a:buNone/>
             </a:pPr>
             <a:r>
-              <a:rPr lang="en-US" sz="1300" b="1" dirty="0">
-                <a:solidFill>
-                  <a:srgbClr val="0F5C54"/>
-                </a:solidFill>
-                <a:latin typeface="Calibri" pitchFamily="34" charset="0"/>
-                <a:ea typeface="Calibri" pitchFamily="34" charset="-122"/>
-                <a:cs typeface="Calibri" pitchFamily="34" charset="-120"/>
-              </a:rPr>
-              <a:t>Forecasts &amp; ML model</a:t>
-            </a:r>
-            <a:endParaRPr lang="en-US" sz="1300" dirty="0"/>
-          </a:p>
-        </p:txBody>
-      </p:sp>
-      <p:sp>
-        <p:nvSpPr>
-          <p:cNvPr id="13" name="Shape 8"/>
+              <a:rPr lang="en-US" sz="1600" b="1" dirty="0">
+                <a:solidFill>
+                  <a:srgbClr val="FFFFFF"/>
+                </a:solidFill>
+                <a:latin typeface="Calibri" pitchFamily="34" charset="0"/>
+                <a:ea typeface="Calibri" pitchFamily="34" charset="-122"/>
+                <a:cs typeface="Calibri" pitchFamily="34" charset="-120"/>
+              </a:rPr>
+              <a:t>1</a:t>
+            </a:r>
+            <a:endParaRPr lang="en-US" sz="1600" dirty="0"/>
+          </a:p>
+        </p:txBody>
+      </p:sp>
+      <p:sp>
+        <p:nvSpPr>
+          <p:cNvPr id="11" name="Text 7"/>
+          <p:cNvSpPr txBox="1"/>
+          <p:nvPr/>
+        </p:nvSpPr>
+        <p:spPr>
+          <a:xfrm>
+            <a:off x="1325880" y="4617720"/>
+            <a:ext cx="2560320" cy="365760"/>
+          </a:xfrm>
+          <a:prstGeom prst="rect">
+            <a:avLst/>
+          </a:prstGeom>
+          <a:noFill/>
+          <a:ln/>
+        </p:spPr>
+        <p:txBody>
+          <a:bodyPr wrap="square" lIns="0" tIns="0" rIns="0" bIns="0" rtlCol="0" anchor="t"/>
+          <a:lstStyle/>
+          <a:p>
+            <a:pPr indent="0" marL="0">
+              <a:buNone/>
+            </a:pPr>
+            <a:r>
+              <a:rPr lang="en-US" sz="1700" b="1" dirty="0">
+                <a:solidFill>
+                  <a:srgbClr val="0F172A"/>
+                </a:solidFill>
+                <a:latin typeface="Calibri" pitchFamily="34" charset="0"/>
+                <a:ea typeface="Calibri" pitchFamily="34" charset="-122"/>
+                <a:cs typeface="Calibri" pitchFamily="34" charset="-120"/>
+              </a:rPr>
+              <a:t>Copilot</a:t>
+            </a:r>
+            <a:endParaRPr lang="en-US" sz="1700" dirty="0"/>
+          </a:p>
+        </p:txBody>
+      </p:sp>
+      <p:sp>
+        <p:nvSpPr>
+          <p:cNvPr id="12" name="Text 8"/>
+          <p:cNvSpPr txBox="1"/>
+          <p:nvPr/>
+        </p:nvSpPr>
+        <p:spPr>
+          <a:xfrm>
+            <a:off x="685800" y="5193792"/>
+            <a:ext cx="3200400" cy="1234440"/>
+          </a:xfrm>
+          <a:prstGeom prst="rect">
+            <a:avLst/>
+          </a:prstGeom>
+          <a:noFill/>
+          <a:ln/>
+        </p:spPr>
+        <p:txBody>
+          <a:bodyPr wrap="square" lIns="0" tIns="0" rIns="0" bIns="0" rtlCol="0" anchor="t"/>
+          <a:lstStyle/>
+          <a:p>
+            <a:pPr indent="0" marL="0">
+              <a:buNone/>
+            </a:pPr>
+            <a:r>
+              <a:rPr lang="en-US" sz="1250" dirty="0">
+                <a:solidFill>
+                  <a:srgbClr val="64748B"/>
+                </a:solidFill>
+                <a:latin typeface="Calibri" pitchFamily="34" charset="0"/>
+                <a:ea typeface="Calibri" pitchFamily="34" charset="-122"/>
+                <a:cs typeface="Calibri" pitchFamily="34" charset="-120"/>
+              </a:rPr>
+              <a:t>“ICU mein kitne bed khali hain?” — Hinglish understood, the patient under discussion remembered, and it asks *which patient* when unsure</a:t>
+            </a:r>
+            <a:endParaRPr lang="en-US" sz="1250" dirty="0"/>
+          </a:p>
+        </p:txBody>
+      </p:sp>
+      <p:sp>
+        <p:nvSpPr>
+          <p:cNvPr id="13" name="Shape 9"/>
           <p:cNvSpPr/>
           <p:nvPr/>
         </p:nvSpPr>
         <p:spPr>
           <a:xfrm>
-            <a:off x="6487787" y="4069080"/>
-            <a:ext cx="4855226" cy="2286000"/>
+            <a:off x="4261104" y="4389120"/>
+            <a:ext cx="3611880" cy="2148840"/>
           </a:xfrm>
           <a:prstGeom prst="roundRect">
             <a:avLst>
-              <a:gd name="adj" fmla="val 3200"/>
+              <a:gd name="adj" fmla="val 3404"/>
             </a:avLst>
           </a:prstGeom>
           <a:solidFill>
@@ -5129,72 +6779,327 @@
           </a:effectLst>
         </p:spPr>
       </p:sp>
-      <p:pic>
-        <p:nvPicPr>
-          <p:cNvPr id="14" name="Image 3" descr="C:\Users\HP\AppData\Local\Temp\claude\D--codin-idea-lab\87151ddf-948a-4e83-8159-c0449757400e\scratchpad\report\shots\g_portal.png">    </p:cNvPr>
-          <p:cNvPicPr>
-            <a:picLocks noChangeAspect="1"/>
-          </p:cNvPicPr>
-          <p:nvPr/>
-        </p:nvPicPr>
-        <p:blipFill>
-          <a:blip r:embed="rId4"/>
-          <a:stretch>
-            <a:fillRect/>
-          </a:stretch>
-        </p:blipFill>
-        <p:spPr>
-          <a:xfrm>
-            <a:off x="6560939" y="4142232"/>
-            <a:ext cx="4708922" cy="2139696"/>
-          </a:xfrm>
-          <a:prstGeom prst="rect">
-            <a:avLst/>
-          </a:prstGeom>
-        </p:spPr>
-      </p:pic>
-      <p:sp>
-        <p:nvSpPr>
-          <p:cNvPr id="15" name="Text 9"/>
-          <p:cNvSpPr txBox="1"/>
-          <p:nvPr/>
-        </p:nvSpPr>
-        <p:spPr>
-          <a:xfrm>
-            <a:off x="6217920" y="6373368"/>
-            <a:ext cx="5394960" cy="292608"/>
-          </a:xfrm>
-          <a:prstGeom prst="rect">
-            <a:avLst/>
-          </a:prstGeom>
-          <a:noFill/>
-          <a:ln/>
-        </p:spPr>
-        <p:txBody>
-          <a:bodyPr wrap="square" lIns="0" tIns="0" rIns="0" bIns="0" rtlCol="0" anchor="t"/>
+      <p:sp>
+        <p:nvSpPr>
+          <p:cNvPr id="14" name="Shape 10"/>
+          <p:cNvSpPr/>
+          <p:nvPr/>
+        </p:nvSpPr>
+        <p:spPr>
+          <a:xfrm>
+            <a:off x="4489704" y="4590288"/>
+            <a:ext cx="457200" cy="457200"/>
+          </a:xfrm>
+          <a:prstGeom prst="ellipse">
+            <a:avLst/>
+          </a:prstGeom>
+          <a:solidFill>
+            <a:srgbClr val="0F5C54"/>
+          </a:solidFill>
+          <a:ln w="12700">
+            <a:solidFill>
+              <a:srgbClr val="0F5C54"/>
+            </a:solidFill>
+            <a:prstDash val="solid"/>
+          </a:ln>
+        </p:spPr>
+      </p:sp>
+      <p:sp>
+        <p:nvSpPr>
+          <p:cNvPr id="15" name="Text 11"/>
+          <p:cNvSpPr txBox="1"/>
+          <p:nvPr/>
+        </p:nvSpPr>
+        <p:spPr>
+          <a:xfrm>
+            <a:off x="4489704" y="4590288"/>
+            <a:ext cx="457200" cy="457200"/>
+          </a:xfrm>
+          <a:prstGeom prst="rect">
+            <a:avLst/>
+          </a:prstGeom>
+          <a:noFill/>
+          <a:ln/>
+        </p:spPr>
+        <p:txBody>
+          <a:bodyPr wrap="square" lIns="0" tIns="0" rIns="0" bIns="0" rtlCol="0" anchor="ctr"/>
           <a:lstStyle/>
           <a:p>
             <a:pPr algn="ctr" indent="0" marL="0">
               <a:buNone/>
             </a:pPr>
             <a:r>
-              <a:rPr lang="en-US" sz="1300" b="1" dirty="0">
-                <a:solidFill>
-                  <a:srgbClr val="0F5C54"/>
-                </a:solidFill>
-                <a:latin typeface="Calibri" pitchFamily="34" charset="0"/>
-                <a:ea typeface="Calibri" pitchFamily="34" charset="-122"/>
-                <a:cs typeface="Calibri" pitchFamily="34" charset="-120"/>
-              </a:rPr>
-              <a:t>Patient portal (PWA)</a:t>
-            </a:r>
-            <a:endParaRPr lang="en-US" sz="1300" dirty="0"/>
-          </a:p>
-        </p:txBody>
-      </p:sp>
-      <p:sp>
-        <p:nvSpPr>
-          <p:cNvPr id="16" name="Text 10"/>
+              <a:rPr lang="en-US" sz="1600" b="1" dirty="0">
+                <a:solidFill>
+                  <a:srgbClr val="FFFFFF"/>
+                </a:solidFill>
+                <a:latin typeface="Calibri" pitchFamily="34" charset="0"/>
+                <a:ea typeface="Calibri" pitchFamily="34" charset="-122"/>
+                <a:cs typeface="Calibri" pitchFamily="34" charset="-120"/>
+              </a:rPr>
+              <a:t>2</a:t>
+            </a:r>
+            <a:endParaRPr lang="en-US" sz="1600" dirty="0"/>
+          </a:p>
+        </p:txBody>
+      </p:sp>
+      <p:sp>
+        <p:nvSpPr>
+          <p:cNvPr id="16" name="Text 12"/>
+          <p:cNvSpPr txBox="1"/>
+          <p:nvPr/>
+        </p:nvSpPr>
+        <p:spPr>
+          <a:xfrm>
+            <a:off x="5129784" y="4617720"/>
+            <a:ext cx="2560320" cy="365760"/>
+          </a:xfrm>
+          <a:prstGeom prst="rect">
+            <a:avLst/>
+          </a:prstGeom>
+          <a:noFill/>
+          <a:ln/>
+        </p:spPr>
+        <p:txBody>
+          <a:bodyPr wrap="square" lIns="0" tIns="0" rIns="0" bIns="0" rtlCol="0" anchor="t"/>
+          <a:lstStyle/>
+          <a:p>
+            <a:pPr indent="0" marL="0">
+              <a:buNone/>
+            </a:pPr>
+            <a:r>
+              <a:rPr lang="en-US" sz="1700" b="1" dirty="0">
+                <a:solidFill>
+                  <a:srgbClr val="0F172A"/>
+                </a:solidFill>
+                <a:latin typeface="Calibri" pitchFamily="34" charset="0"/>
+                <a:ea typeface="Calibri" pitchFamily="34" charset="-122"/>
+                <a:cs typeface="Calibri" pitchFamily="34" charset="-120"/>
+              </a:rPr>
+              <a:t>Smart alarms</a:t>
+            </a:r>
+            <a:endParaRPr lang="en-US" sz="1700" dirty="0"/>
+          </a:p>
+        </p:txBody>
+      </p:sp>
+      <p:sp>
+        <p:nvSpPr>
+          <p:cNvPr id="17" name="Text 13"/>
+          <p:cNvSpPr txBox="1"/>
+          <p:nvPr/>
+        </p:nvSpPr>
+        <p:spPr>
+          <a:xfrm>
+            <a:off x="4489704" y="5193792"/>
+            <a:ext cx="3200400" cy="1234440"/>
+          </a:xfrm>
+          <a:prstGeom prst="rect">
+            <a:avLst/>
+          </a:prstGeom>
+          <a:noFill/>
+          <a:ln/>
+        </p:spPr>
+        <p:txBody>
+          <a:bodyPr wrap="square" lIns="0" tIns="0" rIns="0" bIns="0" rtlCol="0" anchor="t"/>
+          <a:lstStyle/>
+          <a:p>
+            <a:pPr indent="0" marL="0">
+              <a:buNone/>
+            </a:pPr>
+            <a:r>
+              <a:rPr lang="en-US" sz="1250" dirty="0">
+                <a:solidFill>
+                  <a:srgbClr val="64748B"/>
+                </a:solidFill>
+                <a:latin typeface="Calibri" pitchFamily="34" charset="0"/>
+                <a:ea typeface="Calibri" pitchFamily="34" charset="-122"/>
+                <a:cs typeface="Calibri" pitchFamily="34" charset="-120"/>
+              </a:rPr>
+              <a:t>A breach must persist for 3 readings before it alarms — transient artefacts are suppressed and counted</a:t>
+            </a:r>
+            <a:endParaRPr lang="en-US" sz="1250" dirty="0"/>
+          </a:p>
+        </p:txBody>
+      </p:sp>
+      <p:sp>
+        <p:nvSpPr>
+          <p:cNvPr id="18" name="Shape 14"/>
+          <p:cNvSpPr/>
+          <p:nvPr/>
+        </p:nvSpPr>
+        <p:spPr>
+          <a:xfrm>
+            <a:off x="8065008" y="4389120"/>
+            <a:ext cx="3611880" cy="2148840"/>
+          </a:xfrm>
+          <a:prstGeom prst="roundRect">
+            <a:avLst>
+              <a:gd name="adj" fmla="val 3404"/>
+            </a:avLst>
+          </a:prstGeom>
+          <a:solidFill>
+            <a:srgbClr val="FFFFFF"/>
+          </a:solidFill>
+          <a:ln w="9525">
+            <a:solidFill>
+              <a:srgbClr val="E2E8F0"/>
+            </a:solidFill>
+            <a:prstDash val="solid"/>
+          </a:ln>
+          <a:effectLst>
+            <a:outerShdw sx="100000" sy="100000" kx="0" ky="0" algn="bl" rotWithShape="0" blurRad="101600" dist="25400" dir="5400000">
+              <a:srgbClr val="000000">
+                <a:alpha val="14000"/>
+              </a:srgbClr>
+            </a:outerShdw>
+          </a:effectLst>
+        </p:spPr>
+      </p:sp>
+      <p:sp>
+        <p:nvSpPr>
+          <p:cNvPr id="19" name="Shape 15"/>
+          <p:cNvSpPr/>
+          <p:nvPr/>
+        </p:nvSpPr>
+        <p:spPr>
+          <a:xfrm>
+            <a:off x="8293608" y="4590288"/>
+            <a:ext cx="457200" cy="457200"/>
+          </a:xfrm>
+          <a:prstGeom prst="ellipse">
+            <a:avLst/>
+          </a:prstGeom>
+          <a:solidFill>
+            <a:srgbClr val="0F5C54"/>
+          </a:solidFill>
+          <a:ln w="12700">
+            <a:solidFill>
+              <a:srgbClr val="0F5C54"/>
+            </a:solidFill>
+            <a:prstDash val="solid"/>
+          </a:ln>
+        </p:spPr>
+      </p:sp>
+      <p:sp>
+        <p:nvSpPr>
+          <p:cNvPr id="20" name="Text 16"/>
+          <p:cNvSpPr txBox="1"/>
+          <p:nvPr/>
+        </p:nvSpPr>
+        <p:spPr>
+          <a:xfrm>
+            <a:off x="8293608" y="4590288"/>
+            <a:ext cx="457200" cy="457200"/>
+          </a:xfrm>
+          <a:prstGeom prst="rect">
+            <a:avLst/>
+          </a:prstGeom>
+          <a:noFill/>
+          <a:ln/>
+        </p:spPr>
+        <p:txBody>
+          <a:bodyPr wrap="square" lIns="0" tIns="0" rIns="0" bIns="0" rtlCol="0" anchor="ctr"/>
+          <a:lstStyle/>
+          <a:p>
+            <a:pPr algn="ctr" indent="0" marL="0">
+              <a:buNone/>
+            </a:pPr>
+            <a:r>
+              <a:rPr lang="en-US" sz="1600" b="1" dirty="0">
+                <a:solidFill>
+                  <a:srgbClr val="FFFFFF"/>
+                </a:solidFill>
+                <a:latin typeface="Calibri" pitchFamily="34" charset="0"/>
+                <a:ea typeface="Calibri" pitchFamily="34" charset="-122"/>
+                <a:cs typeface="Calibri" pitchFamily="34" charset="-120"/>
+              </a:rPr>
+              <a:t>3</a:t>
+            </a:r>
+            <a:endParaRPr lang="en-US" sz="1600" dirty="0"/>
+          </a:p>
+        </p:txBody>
+      </p:sp>
+      <p:sp>
+        <p:nvSpPr>
+          <p:cNvPr id="21" name="Text 17"/>
+          <p:cNvSpPr txBox="1"/>
+          <p:nvPr/>
+        </p:nvSpPr>
+        <p:spPr>
+          <a:xfrm>
+            <a:off x="8933688" y="4617720"/>
+            <a:ext cx="2560320" cy="365760"/>
+          </a:xfrm>
+          <a:prstGeom prst="rect">
+            <a:avLst/>
+          </a:prstGeom>
+          <a:noFill/>
+          <a:ln/>
+        </p:spPr>
+        <p:txBody>
+          <a:bodyPr wrap="square" lIns="0" tIns="0" rIns="0" bIns="0" rtlCol="0" anchor="t"/>
+          <a:lstStyle/>
+          <a:p>
+            <a:pPr indent="0" marL="0">
+              <a:buNone/>
+            </a:pPr>
+            <a:r>
+              <a:rPr lang="en-US" sz="1700" b="1" dirty="0">
+                <a:solidFill>
+                  <a:srgbClr val="0F172A"/>
+                </a:solidFill>
+                <a:latin typeface="Calibri" pitchFamily="34" charset="0"/>
+                <a:ea typeface="Calibri" pitchFamily="34" charset="-122"/>
+                <a:cs typeface="Calibri" pitchFamily="34" charset="-120"/>
+              </a:rPr>
+              <a:t>Documentation</a:t>
+            </a:r>
+            <a:endParaRPr lang="en-US" sz="1700" dirty="0"/>
+          </a:p>
+        </p:txBody>
+      </p:sp>
+      <p:sp>
+        <p:nvSpPr>
+          <p:cNvPr id="22" name="Text 18"/>
+          <p:cNvSpPr txBox="1"/>
+          <p:nvPr/>
+        </p:nvSpPr>
+        <p:spPr>
+          <a:xfrm>
+            <a:off x="8293608" y="5193792"/>
+            <a:ext cx="3200400" cy="1234440"/>
+          </a:xfrm>
+          <a:prstGeom prst="rect">
+            <a:avLst/>
+          </a:prstGeom>
+          <a:noFill/>
+          <a:ln/>
+        </p:spPr>
+        <p:txBody>
+          <a:bodyPr wrap="square" lIns="0" tIns="0" rIns="0" bIns="0" rtlCol="0" anchor="t"/>
+          <a:lstStyle/>
+          <a:p>
+            <a:pPr indent="0" marL="0">
+              <a:buNone/>
+            </a:pPr>
+            <a:r>
+              <a:rPr lang="en-US" sz="1250" dirty="0">
+                <a:solidFill>
+                  <a:srgbClr val="64748B"/>
+                </a:solidFill>
+                <a:latin typeface="Calibri" pitchFamily="34" charset="0"/>
+                <a:ea typeface="Calibri" pitchFamily="34" charset="-122"/>
+                <a:cs typeface="Calibri" pitchFamily="34" charset="-120"/>
+              </a:rPr>
+              <a:t>SOAP note drafted from the chart (clinician edits and signs) and SBAR handover for every bed in the ward</a:t>
+            </a:r>
+            <a:endParaRPr lang="en-US" sz="1250" dirty="0"/>
+          </a:p>
+        </p:txBody>
+      </p:sp>
+      <p:sp>
+        <p:nvSpPr>
+          <p:cNvPr id="23" name="Text 19"/>
           <p:cNvSpPr txBox="1"/>
           <p:nvPr/>
         </p:nvSpPr>
@@ -5225,7 +7130,7 @@
                 <a:ea typeface="Calibri" pitchFamily="34" charset="-122"/>
                 <a:cs typeface="Calibri" pitchFamily="34" charset="-120"/>
               </a:rPr>
-              <a:t>13</a:t>
+              <a:t>14</a:t>
             </a:r>
             <a:endParaRPr lang="en-US" sz="1000" dirty="0"/>
           </a:p>
@@ -5239,9 +7144,9 @@
 </p:sld>
 </file>
 
-<file path=ppt/slides/slide14.xml><?xml version="1.0" encoding="utf-8"?>
+<file path=ppt/slides/slide15.xml><?xml version="1.0" encoding="utf-8"?>
 <p:sld xmlns:a="http://schemas.openxmlformats.org/drawingml/2006/main" xmlns:r="http://schemas.openxmlformats.org/officeDocument/2006/relationships" xmlns:p="http://schemas.openxmlformats.org/presentationml/2006/main">
-  <p:cSld name="Slide 14">
+  <p:cSld name="Slide 15">
     <p:bg>
       <p:bgPr>
         <a:solidFill>
@@ -5296,7 +7201,7 @@
                 <a:ea typeface="Cambria" pitchFamily="34" charset="-122"/>
                 <a:cs typeface="Cambria" pitchFamily="34" charset="-120"/>
               </a:rPr>
-              <a:t>Technology and quality</a:t>
+              <a:t>Governance: how do we know the AI is supervised?</a:t>
             </a:r>
             <a:endParaRPr lang="en-US" sz="3200" dirty="0"/>
           </a:p>
@@ -5335,7 +7240,7 @@
                 <a:ea typeface="Calibri" pitchFamily="34" charset="-122"/>
                 <a:cs typeface="Calibri" pitchFamily="34" charset="-120"/>
               </a:rPr>
-              <a:t>Open-source stack, reproducible deployment, automated tests</a:t>
+              <a:t>Oversight metrics and honest model cards, visible inside the product</a:t>
             </a:r>
             <a:endParaRPr lang="en-US" sz="1500" dirty="0"/>
           </a:p>
@@ -5349,12 +7254,12 @@
         </p:nvSpPr>
         <p:spPr>
           <a:xfrm>
-            <a:off x="548640" y="1554480"/>
-            <a:ext cx="6035040" cy="676656"/>
+            <a:off x="1733869" y="1463040"/>
+            <a:ext cx="4487543" cy="5120640"/>
           </a:xfrm>
           <a:prstGeom prst="roundRect">
             <a:avLst>
-              <a:gd name="adj" fmla="val 10811"/>
+              <a:gd name="adj" fmla="val 1630"/>
             </a:avLst>
           </a:prstGeom>
           <a:solidFill>
@@ -5375,98 +7280,44 @@
           </a:effectLst>
         </p:spPr>
       </p:sp>
-      <p:sp>
-        <p:nvSpPr>
-          <p:cNvPr id="5" name="Text 3"/>
-          <p:cNvSpPr txBox="1"/>
-          <p:nvPr/>
-        </p:nvSpPr>
-        <p:spPr>
-          <a:xfrm>
-            <a:off x="777240" y="1737360"/>
-            <a:ext cx="1737360" cy="320040"/>
-          </a:xfrm>
-          <a:prstGeom prst="rect">
-            <a:avLst/>
-          </a:prstGeom>
-          <a:noFill/>
-          <a:ln/>
-        </p:spPr>
-        <p:txBody>
-          <a:bodyPr wrap="square" lIns="0" tIns="0" rIns="0" bIns="0" rtlCol="0" anchor="t"/>
-          <a:lstStyle/>
-          <a:p>
-            <a:pPr indent="0" marL="0">
-              <a:buNone/>
-            </a:pPr>
-            <a:r>
-              <a:rPr lang="en-US" sz="1400" b="1" dirty="0">
-                <a:solidFill>
-                  <a:srgbClr val="0F5C54"/>
-                </a:solidFill>
-                <a:latin typeface="Calibri" pitchFamily="34" charset="0"/>
-                <a:ea typeface="Calibri" pitchFamily="34" charset="-122"/>
-                <a:cs typeface="Calibri" pitchFamily="34" charset="-120"/>
-              </a:rPr>
-              <a:t>Frontend</a:t>
-            </a:r>
-            <a:endParaRPr lang="en-US" sz="1400" dirty="0"/>
-          </a:p>
-        </p:txBody>
-      </p:sp>
-      <p:sp>
-        <p:nvSpPr>
-          <p:cNvPr id="6" name="Text 4"/>
-          <p:cNvSpPr txBox="1"/>
-          <p:nvPr/>
-        </p:nvSpPr>
-        <p:spPr>
-          <a:xfrm>
-            <a:off x="2560320" y="1737360"/>
-            <a:ext cx="3931920" cy="320040"/>
-          </a:xfrm>
-          <a:prstGeom prst="rect">
-            <a:avLst/>
-          </a:prstGeom>
-          <a:noFill/>
-          <a:ln/>
-        </p:spPr>
-        <p:txBody>
-          <a:bodyPr wrap="square" lIns="0" tIns="0" rIns="0" bIns="0" rtlCol="0" anchor="t"/>
-          <a:lstStyle/>
-          <a:p>
-            <a:pPr indent="0" marL="0">
-              <a:buNone/>
-            </a:pPr>
-            <a:r>
-              <a:rPr lang="en-US" sz="1300" dirty="0">
-                <a:solidFill>
-                  <a:srgbClr val="0F172A"/>
-                </a:solidFill>
-                <a:latin typeface="Calibri" pitchFamily="34" charset="0"/>
-                <a:ea typeface="Calibri" pitchFamily="34" charset="-122"/>
-                <a:cs typeface="Calibri" pitchFamily="34" charset="-120"/>
-              </a:rPr>
-              <a:t>React 19 · TypeScript · Vite · Tailwind · Recharts · PWA</a:t>
-            </a:r>
-            <a:endParaRPr lang="en-US" sz="1300" dirty="0"/>
-          </a:p>
-        </p:txBody>
-      </p:sp>
-      <p:sp>
-        <p:nvSpPr>
-          <p:cNvPr id="7" name="Shape 5"/>
+      <p:pic>
+        <p:nvPicPr>
+          <p:cNvPr id="5" name="Image 0" descr="C:\Users\HP\AppData\Local\Temp\claude\D--codin-idea-lab\87151ddf-948a-4e83-8159-c0449757400e\scratchpad\report\shots\governance.png">    </p:cNvPr>
+          <p:cNvPicPr>
+            <a:picLocks noChangeAspect="1"/>
+          </p:cNvPicPr>
+          <p:nvPr/>
+        </p:nvPicPr>
+        <p:blipFill>
+          <a:blip r:embed="rId1"/>
+          <a:stretch>
+            <a:fillRect/>
+          </a:stretch>
+        </p:blipFill>
+        <p:spPr>
+          <a:xfrm>
+            <a:off x="1807021" y="1536192"/>
+            <a:ext cx="4341239" cy="4974336"/>
+          </a:xfrm>
+          <a:prstGeom prst="rect">
+            <a:avLst/>
+          </a:prstGeom>
+        </p:spPr>
+      </p:pic>
+      <p:sp>
+        <p:nvSpPr>
+          <p:cNvPr id="6" name="Shape 3"/>
           <p:cNvSpPr/>
           <p:nvPr/>
         </p:nvSpPr>
         <p:spPr>
           <a:xfrm>
-            <a:off x="548640" y="2359152"/>
-            <a:ext cx="6035040" cy="676656"/>
+            <a:off x="7726680" y="1554480"/>
+            <a:ext cx="3977640" cy="1508760"/>
           </a:xfrm>
           <a:prstGeom prst="roundRect">
             <a:avLst>
-              <a:gd name="adj" fmla="val 10811"/>
+              <a:gd name="adj" fmla="val 4848"/>
             </a:avLst>
           </a:prstGeom>
           <a:solidFill>
@@ -5489,14 +7340,14 @@
       </p:sp>
       <p:sp>
         <p:nvSpPr>
-          <p:cNvPr id="8" name="Text 6"/>
-          <p:cNvSpPr txBox="1"/>
-          <p:nvPr/>
-        </p:nvSpPr>
-        <p:spPr>
-          <a:xfrm>
-            <a:off x="777240" y="2542032"/>
-            <a:ext cx="1737360" cy="320040"/>
+          <p:cNvPr id="7" name="Text 4"/>
+          <p:cNvSpPr txBox="1"/>
+          <p:nvPr/>
+        </p:nvSpPr>
+        <p:spPr>
+          <a:xfrm>
+            <a:off x="7909560" y="1664208"/>
+            <a:ext cx="3657600" cy="320040"/>
           </a:xfrm>
           <a:prstGeom prst="rect">
             <a:avLst/>
@@ -5512,7 +7363,7 @@
               <a:buNone/>
             </a:pPr>
             <a:r>
-              <a:rPr lang="en-US" sz="1400" b="1" dirty="0">
+              <a:rPr lang="en-US" sz="1500" b="1" dirty="0">
                 <a:solidFill>
                   <a:srgbClr val="0F5C54"/>
                 </a:solidFill>
@@ -5520,22 +7371,22 @@
                 <a:ea typeface="Calibri" pitchFamily="34" charset="-122"/>
                 <a:cs typeface="Calibri" pitchFamily="34" charset="-120"/>
               </a:rPr>
-              <a:t>Backend</a:t>
-            </a:r>
-            <a:endParaRPr lang="en-US" sz="1400" dirty="0"/>
-          </a:p>
-        </p:txBody>
-      </p:sp>
-      <p:sp>
-        <p:nvSpPr>
-          <p:cNvPr id="9" name="Text 7"/>
-          <p:cNvSpPr txBox="1"/>
-          <p:nvPr/>
-        </p:nvSpPr>
-        <p:spPr>
-          <a:xfrm>
-            <a:off x="2560320" y="2542032"/>
-            <a:ext cx="3931920" cy="320040"/>
+              <a:t>Human oversight</a:t>
+            </a:r>
+            <a:endParaRPr lang="en-US" sz="1500" dirty="0"/>
+          </a:p>
+        </p:txBody>
+      </p:sp>
+      <p:sp>
+        <p:nvSpPr>
+          <p:cNvPr id="8" name="Text 5"/>
+          <p:cNvSpPr txBox="1"/>
+          <p:nvPr/>
+        </p:nvSpPr>
+        <p:spPr>
+          <a:xfrm>
+            <a:off x="7909560" y="2011680"/>
+            <a:ext cx="3657600" cy="960120"/>
           </a:xfrm>
           <a:prstGeom prst="rect">
             <a:avLst/>
@@ -5551,7 +7402,7 @@
               <a:buNone/>
             </a:pPr>
             <a:r>
-              <a:rPr lang="en-US" sz="1300" dirty="0">
+              <a:rPr lang="en-US" sz="1150" dirty="0">
                 <a:solidFill>
                   <a:srgbClr val="0F172A"/>
                 </a:solidFill>
@@ -5559,26 +7410,138 @@
                 <a:ea typeface="Calibri" pitchFamily="34" charset="-122"/>
                 <a:cs typeface="Calibri" pitchFamily="34" charset="-120"/>
               </a:rPr>
-              <a:t>Python 3.11 · FastAPI · Pydantic · WebSockets</a:t>
-            </a:r>
-            <a:endParaRPr lang="en-US" sz="1300" dirty="0"/>
-          </a:p>
-        </p:txBody>
-      </p:sp>
-      <p:sp>
-        <p:nvSpPr>
-          <p:cNvPr id="10" name="Shape 8"/>
+              <a:t>Approval, modification and rejection rates, median decision time, autonomy ratio, and which fields humans changed</a:t>
+            </a:r>
+            <a:endParaRPr lang="en-US" sz="1150" dirty="0"/>
+          </a:p>
+        </p:txBody>
+      </p:sp>
+      <p:sp>
+        <p:nvSpPr>
+          <p:cNvPr id="9" name="Shape 6"/>
           <p:cNvSpPr/>
           <p:nvPr/>
         </p:nvSpPr>
         <p:spPr>
           <a:xfrm>
-            <a:off x="548640" y="3163824"/>
-            <a:ext cx="6035040" cy="676656"/>
+            <a:off x="7726680" y="3246120"/>
+            <a:ext cx="3977640" cy="1508760"/>
           </a:xfrm>
           <a:prstGeom prst="roundRect">
             <a:avLst>
-              <a:gd name="adj" fmla="val 10811"/>
+              <a:gd name="adj" fmla="val 4848"/>
+            </a:avLst>
+          </a:prstGeom>
+          <a:solidFill>
+            <a:srgbClr val="CCFBF1"/>
+          </a:solidFill>
+          <a:ln w="9525">
+            <a:solidFill>
+              <a:srgbClr val="E2E8F0"/>
+            </a:solidFill>
+            <a:prstDash val="solid"/>
+          </a:ln>
+          <a:effectLst>
+            <a:outerShdw sx="100000" sy="100000" kx="0" ky="0" algn="bl" rotWithShape="0" blurRad="101600" dist="25400" dir="5400000">
+              <a:srgbClr val="000000">
+                <a:alpha val="14000"/>
+              </a:srgbClr>
+            </a:outerShdw>
+          </a:effectLst>
+        </p:spPr>
+      </p:sp>
+      <p:sp>
+        <p:nvSpPr>
+          <p:cNvPr id="10" name="Text 7"/>
+          <p:cNvSpPr txBox="1"/>
+          <p:nvPr/>
+        </p:nvSpPr>
+        <p:spPr>
+          <a:xfrm>
+            <a:off x="7909560" y="3355848"/>
+            <a:ext cx="3657600" cy="320040"/>
+          </a:xfrm>
+          <a:prstGeom prst="rect">
+            <a:avLst/>
+          </a:prstGeom>
+          <a:noFill/>
+          <a:ln/>
+        </p:spPr>
+        <p:txBody>
+          <a:bodyPr wrap="square" lIns="0" tIns="0" rIns="0" bIns="0" rtlCol="0" anchor="t"/>
+          <a:lstStyle/>
+          <a:p>
+            <a:pPr indent="0" marL="0">
+              <a:buNone/>
+            </a:pPr>
+            <a:r>
+              <a:rPr lang="en-US" sz="1500" b="1" dirty="0">
+                <a:solidFill>
+                  <a:srgbClr val="0F5C54"/>
+                </a:solidFill>
+                <a:latin typeface="Calibri" pitchFamily="34" charset="0"/>
+                <a:ea typeface="Calibri" pitchFamily="34" charset="-122"/>
+                <a:cs typeface="Calibri" pitchFamily="34" charset="-120"/>
+              </a:rPr>
+              <a:t>Model cards</a:t>
+            </a:r>
+            <a:endParaRPr lang="en-US" sz="1500" dirty="0"/>
+          </a:p>
+        </p:txBody>
+      </p:sp>
+      <p:sp>
+        <p:nvSpPr>
+          <p:cNvPr id="11" name="Text 8"/>
+          <p:cNvSpPr txBox="1"/>
+          <p:nvPr/>
+        </p:nvSpPr>
+        <p:spPr>
+          <a:xfrm>
+            <a:off x="7909560" y="3703320"/>
+            <a:ext cx="3657600" cy="960120"/>
+          </a:xfrm>
+          <a:prstGeom prst="rect">
+            <a:avLst/>
+          </a:prstGeom>
+          <a:noFill/>
+          <a:ln/>
+        </p:spPr>
+        <p:txBody>
+          <a:bodyPr wrap="square" lIns="0" tIns="0" rIns="0" bIns="0" rtlCol="0" anchor="t"/>
+          <a:lstStyle/>
+          <a:p>
+            <a:pPr indent="0" marL="0">
+              <a:buNone/>
+            </a:pPr>
+            <a:r>
+              <a:rPr lang="en-US" sz="1150" dirty="0">
+                <a:solidFill>
+                  <a:srgbClr val="0F172A"/>
+                </a:solidFill>
+                <a:latin typeface="Calibri" pitchFamily="34" charset="0"/>
+                <a:ea typeface="Calibri" pitchFamily="34" charset="-122"/>
+                <a:cs typeface="Calibri" pitchFamily="34" charset="-120"/>
+              </a:rPr>
+              <a:t>Intent classifier 74% leakage-free cross-validation and 96% held-out (incl. Hinglish); LOS MAE 2.07 d vs 2.62 d naïve; readmission AUC 0.721 with a fairness check</a:t>
+            </a:r>
+            <a:endParaRPr lang="en-US" sz="1150" dirty="0"/>
+          </a:p>
+        </p:txBody>
+      </p:sp>
+      <p:sp>
+        <p:nvSpPr>
+          <p:cNvPr id="12" name="Shape 9"/>
+          <p:cNvSpPr/>
+          <p:nvPr/>
+        </p:nvSpPr>
+        <p:spPr>
+          <a:xfrm>
+            <a:off x="7726680" y="4937760"/>
+            <a:ext cx="3977640" cy="1508760"/>
+          </a:xfrm>
+          <a:prstGeom prst="roundRect">
+            <a:avLst>
+              <a:gd name="adj" fmla="val 4848"/>
             </a:avLst>
           </a:prstGeom>
           <a:solidFill>
@@ -5601,14 +7564,14 @@
       </p:sp>
       <p:sp>
         <p:nvSpPr>
-          <p:cNvPr id="11" name="Text 9"/>
-          <p:cNvSpPr txBox="1"/>
-          <p:nvPr/>
-        </p:nvSpPr>
-        <p:spPr>
-          <a:xfrm>
-            <a:off x="777240" y="3346704"/>
-            <a:ext cx="1737360" cy="320040"/>
+          <p:cNvPr id="13" name="Text 10"/>
+          <p:cNvSpPr txBox="1"/>
+          <p:nvPr/>
+        </p:nvSpPr>
+        <p:spPr>
+          <a:xfrm>
+            <a:off x="7909560" y="5047488"/>
+            <a:ext cx="3657600" cy="320040"/>
           </a:xfrm>
           <a:prstGeom prst="rect">
             <a:avLst/>
@@ -5624,7 +7587,7 @@
               <a:buNone/>
             </a:pPr>
             <a:r>
-              <a:rPr lang="en-US" sz="1400" b="1" dirty="0">
+              <a:rPr lang="en-US" sz="1500" b="1" dirty="0">
                 <a:solidFill>
                   <a:srgbClr val="0F5C54"/>
                 </a:solidFill>
@@ -5632,22 +7595,22 @@
                 <a:ea typeface="Calibri" pitchFamily="34" charset="-122"/>
                 <a:cs typeface="Calibri" pitchFamily="34" charset="-120"/>
               </a:rPr>
-              <a:t>AI / optimisation</a:t>
-            </a:r>
-            <a:endParaRPr lang="en-US" sz="1400" dirty="0"/>
-          </a:p>
-        </p:txBody>
-      </p:sp>
-      <p:sp>
-        <p:nvSpPr>
-          <p:cNvPr id="12" name="Text 10"/>
-          <p:cNvSpPr txBox="1"/>
-          <p:nvPr/>
-        </p:nvSpPr>
-        <p:spPr>
-          <a:xfrm>
-            <a:off x="2560320" y="3346704"/>
-            <a:ext cx="3931920" cy="320040"/>
+              <a:t>Safety &amp; privacy</a:t>
+            </a:r>
+            <a:endParaRPr lang="en-US" sz="1500" dirty="0"/>
+          </a:p>
+        </p:txBody>
+      </p:sp>
+      <p:sp>
+        <p:nvSpPr>
+          <p:cNvPr id="14" name="Text 11"/>
+          <p:cNvSpPr txBox="1"/>
+          <p:nvPr/>
+        </p:nvSpPr>
+        <p:spPr>
+          <a:xfrm>
+            <a:off x="7909560" y="5394960"/>
+            <a:ext cx="3657600" cy="960120"/>
           </a:xfrm>
           <a:prstGeom prst="rect">
             <a:avLst/>
@@ -5663,7 +7626,7 @@
               <a:buNone/>
             </a:pPr>
             <a:r>
-              <a:rPr lang="en-US" sz="1300" dirty="0">
+              <a:rPr lang="en-US" sz="1150" dirty="0">
                 <a:solidFill>
                   <a:srgbClr val="0F172A"/>
                 </a:solidFill>
@@ -5671,569 +7634,15 @@
                 <a:ea typeface="Calibri" pitchFamily="34" charset="-122"/>
                 <a:cs typeface="Calibri" pitchFamily="34" charset="-120"/>
               </a:rPr>
-              <a:t>scikit-learn · OR-Tools CP-SAT · NumPy · optional Claude</a:t>
-            </a:r>
-            <a:endParaRPr lang="en-US" sz="1300" dirty="0"/>
-          </a:p>
-        </p:txBody>
-      </p:sp>
-      <p:sp>
-        <p:nvSpPr>
-          <p:cNvPr id="13" name="Shape 11"/>
-          <p:cNvSpPr/>
-          <p:nvPr/>
-        </p:nvSpPr>
-        <p:spPr>
-          <a:xfrm>
-            <a:off x="548640" y="3968496"/>
-            <a:ext cx="6035040" cy="676656"/>
-          </a:xfrm>
-          <a:prstGeom prst="roundRect">
-            <a:avLst>
-              <a:gd name="adj" fmla="val 10811"/>
-            </a:avLst>
-          </a:prstGeom>
-          <a:solidFill>
-            <a:srgbClr val="FFFFFF"/>
-          </a:solidFill>
-          <a:ln w="9525">
-            <a:solidFill>
-              <a:srgbClr val="E2E8F0"/>
-            </a:solidFill>
-            <a:prstDash val="solid"/>
-          </a:ln>
-          <a:effectLst>
-            <a:outerShdw sx="100000" sy="100000" kx="0" ky="0" algn="bl" rotWithShape="0" blurRad="101600" dist="25400" dir="5400000">
-              <a:srgbClr val="000000">
-                <a:alpha val="14000"/>
-              </a:srgbClr>
-            </a:outerShdw>
-          </a:effectLst>
-        </p:spPr>
-      </p:sp>
-      <p:sp>
-        <p:nvSpPr>
-          <p:cNvPr id="14" name="Text 12"/>
-          <p:cNvSpPr txBox="1"/>
-          <p:nvPr/>
-        </p:nvSpPr>
-        <p:spPr>
-          <a:xfrm>
-            <a:off x="777240" y="4151376"/>
-            <a:ext cx="1737360" cy="320040"/>
-          </a:xfrm>
-          <a:prstGeom prst="rect">
-            <a:avLst/>
-          </a:prstGeom>
-          <a:noFill/>
-          <a:ln/>
-        </p:spPr>
-        <p:txBody>
-          <a:bodyPr wrap="square" lIns="0" tIns="0" rIns="0" bIns="0" rtlCol="0" anchor="t"/>
-          <a:lstStyle/>
-          <a:p>
-            <a:pPr indent="0" marL="0">
-              <a:buNone/>
-            </a:pPr>
-            <a:r>
-              <a:rPr lang="en-US" sz="1400" b="1" dirty="0">
-                <a:solidFill>
-                  <a:srgbClr val="0F5C54"/>
-                </a:solidFill>
-                <a:latin typeface="Calibri" pitchFamily="34" charset="0"/>
-                <a:ea typeface="Calibri" pitchFamily="34" charset="-122"/>
-                <a:cs typeface="Calibri" pitchFamily="34" charset="-120"/>
-              </a:rPr>
-              <a:t>Data</a:t>
-            </a:r>
-            <a:endParaRPr lang="en-US" sz="1400" dirty="0"/>
-          </a:p>
-        </p:txBody>
-      </p:sp>
-      <p:sp>
-        <p:nvSpPr>
-          <p:cNvPr id="15" name="Text 13"/>
-          <p:cNvSpPr txBox="1"/>
-          <p:nvPr/>
-        </p:nvSpPr>
-        <p:spPr>
-          <a:xfrm>
-            <a:off x="2560320" y="4151376"/>
-            <a:ext cx="3931920" cy="320040"/>
-          </a:xfrm>
-          <a:prstGeom prst="rect">
-            <a:avLst/>
-          </a:prstGeom>
-          <a:noFill/>
-          <a:ln/>
-        </p:spPr>
-        <p:txBody>
-          <a:bodyPr wrap="square" lIns="0" tIns="0" rIns="0" bIns="0" rtlCol="0" anchor="t"/>
-          <a:lstStyle/>
-          <a:p>
-            <a:pPr indent="0" marL="0">
-              <a:buNone/>
-            </a:pPr>
-            <a:r>
-              <a:rPr lang="en-US" sz="1300" dirty="0">
-                <a:solidFill>
-                  <a:srgbClr val="0F172A"/>
-                </a:solidFill>
-                <a:latin typeface="Calibri" pitchFamily="34" charset="0"/>
-                <a:ea typeface="Calibri" pitchFamily="34" charset="-122"/>
-                <a:cs typeface="Calibri" pitchFamily="34" charset="-120"/>
-              </a:rPr>
-              <a:t>SQLAlchemy · SQLite · PostgreSQL</a:t>
-            </a:r>
-            <a:endParaRPr lang="en-US" sz="1300" dirty="0"/>
-          </a:p>
-        </p:txBody>
-      </p:sp>
-      <p:sp>
-        <p:nvSpPr>
-          <p:cNvPr id="16" name="Shape 14"/>
-          <p:cNvSpPr/>
-          <p:nvPr/>
-        </p:nvSpPr>
-        <p:spPr>
-          <a:xfrm>
-            <a:off x="548640" y="4773168"/>
-            <a:ext cx="6035040" cy="676656"/>
-          </a:xfrm>
-          <a:prstGeom prst="roundRect">
-            <a:avLst>
-              <a:gd name="adj" fmla="val 10811"/>
-            </a:avLst>
-          </a:prstGeom>
-          <a:solidFill>
-            <a:srgbClr val="FFFFFF"/>
-          </a:solidFill>
-          <a:ln w="9525">
-            <a:solidFill>
-              <a:srgbClr val="E2E8F0"/>
-            </a:solidFill>
-            <a:prstDash val="solid"/>
-          </a:ln>
-          <a:effectLst>
-            <a:outerShdw sx="100000" sy="100000" kx="0" ky="0" algn="bl" rotWithShape="0" blurRad="101600" dist="25400" dir="5400000">
-              <a:srgbClr val="000000">
-                <a:alpha val="14000"/>
-              </a:srgbClr>
-            </a:outerShdw>
-          </a:effectLst>
-        </p:spPr>
-      </p:sp>
-      <p:sp>
-        <p:nvSpPr>
-          <p:cNvPr id="17" name="Text 15"/>
-          <p:cNvSpPr txBox="1"/>
-          <p:nvPr/>
-        </p:nvSpPr>
-        <p:spPr>
-          <a:xfrm>
-            <a:off x="777240" y="4956048"/>
-            <a:ext cx="1737360" cy="320040"/>
-          </a:xfrm>
-          <a:prstGeom prst="rect">
-            <a:avLst/>
-          </a:prstGeom>
-          <a:noFill/>
-          <a:ln/>
-        </p:spPr>
-        <p:txBody>
-          <a:bodyPr wrap="square" lIns="0" tIns="0" rIns="0" bIns="0" rtlCol="0" anchor="t"/>
-          <a:lstStyle/>
-          <a:p>
-            <a:pPr indent="0" marL="0">
-              <a:buNone/>
-            </a:pPr>
-            <a:r>
-              <a:rPr lang="en-US" sz="1400" b="1" dirty="0">
-                <a:solidFill>
-                  <a:srgbClr val="0F5C54"/>
-                </a:solidFill>
-                <a:latin typeface="Calibri" pitchFamily="34" charset="0"/>
-                <a:ea typeface="Calibri" pitchFamily="34" charset="-122"/>
-                <a:cs typeface="Calibri" pitchFamily="34" charset="-120"/>
-              </a:rPr>
-              <a:t>Security</a:t>
-            </a:r>
-            <a:endParaRPr lang="en-US" sz="1400" dirty="0"/>
-          </a:p>
-        </p:txBody>
-      </p:sp>
-      <p:sp>
-        <p:nvSpPr>
-          <p:cNvPr id="18" name="Text 16"/>
-          <p:cNvSpPr txBox="1"/>
-          <p:nvPr/>
-        </p:nvSpPr>
-        <p:spPr>
-          <a:xfrm>
-            <a:off x="2560320" y="4956048"/>
-            <a:ext cx="3931920" cy="320040"/>
-          </a:xfrm>
-          <a:prstGeom prst="rect">
-            <a:avLst/>
-          </a:prstGeom>
-          <a:noFill/>
-          <a:ln/>
-        </p:spPr>
-        <p:txBody>
-          <a:bodyPr wrap="square" lIns="0" tIns="0" rIns="0" bIns="0" rtlCol="0" anchor="t"/>
-          <a:lstStyle/>
-          <a:p>
-            <a:pPr indent="0" marL="0">
-              <a:buNone/>
-            </a:pPr>
-            <a:r>
-              <a:rPr lang="en-US" sz="1300" dirty="0">
-                <a:solidFill>
-                  <a:srgbClr val="0F172A"/>
-                </a:solidFill>
-                <a:latin typeface="Calibri" pitchFamily="34" charset="0"/>
-                <a:ea typeface="Calibri" pitchFamily="34" charset="-122"/>
-                <a:cs typeface="Calibri" pitchFamily="34" charset="-120"/>
-              </a:rPr>
-              <a:t>JWT · PBKDF2 · RBAC · audit log</a:t>
-            </a:r>
-            <a:endParaRPr lang="en-US" sz="1300" dirty="0"/>
-          </a:p>
-        </p:txBody>
-      </p:sp>
-      <p:sp>
-        <p:nvSpPr>
-          <p:cNvPr id="19" name="Shape 17"/>
-          <p:cNvSpPr/>
-          <p:nvPr/>
-        </p:nvSpPr>
-        <p:spPr>
-          <a:xfrm>
-            <a:off x="548640" y="5577840"/>
-            <a:ext cx="6035040" cy="676656"/>
-          </a:xfrm>
-          <a:prstGeom prst="roundRect">
-            <a:avLst>
-              <a:gd name="adj" fmla="val 10811"/>
-            </a:avLst>
-          </a:prstGeom>
-          <a:solidFill>
-            <a:srgbClr val="FFFFFF"/>
-          </a:solidFill>
-          <a:ln w="9525">
-            <a:solidFill>
-              <a:srgbClr val="E2E8F0"/>
-            </a:solidFill>
-            <a:prstDash val="solid"/>
-          </a:ln>
-          <a:effectLst>
-            <a:outerShdw sx="100000" sy="100000" kx="0" ky="0" algn="bl" rotWithShape="0" blurRad="101600" dist="25400" dir="5400000">
-              <a:srgbClr val="000000">
-                <a:alpha val="14000"/>
-              </a:srgbClr>
-            </a:outerShdw>
-          </a:effectLst>
-        </p:spPr>
-      </p:sp>
-      <p:sp>
-        <p:nvSpPr>
-          <p:cNvPr id="20" name="Text 18"/>
-          <p:cNvSpPr txBox="1"/>
-          <p:nvPr/>
-        </p:nvSpPr>
-        <p:spPr>
-          <a:xfrm>
-            <a:off x="777240" y="5760720"/>
-            <a:ext cx="1737360" cy="320040"/>
-          </a:xfrm>
-          <a:prstGeom prst="rect">
-            <a:avLst/>
-          </a:prstGeom>
-          <a:noFill/>
-          <a:ln/>
-        </p:spPr>
-        <p:txBody>
-          <a:bodyPr wrap="square" lIns="0" tIns="0" rIns="0" bIns="0" rtlCol="0" anchor="t"/>
-          <a:lstStyle/>
-          <a:p>
-            <a:pPr indent="0" marL="0">
-              <a:buNone/>
-            </a:pPr>
-            <a:r>
-              <a:rPr lang="en-US" sz="1400" b="1" dirty="0">
-                <a:solidFill>
-                  <a:srgbClr val="0F5C54"/>
-                </a:solidFill>
-                <a:latin typeface="Calibri" pitchFamily="34" charset="0"/>
-                <a:ea typeface="Calibri" pitchFamily="34" charset="-122"/>
-                <a:cs typeface="Calibri" pitchFamily="34" charset="-120"/>
-              </a:rPr>
-              <a:t>Deployment</a:t>
-            </a:r>
-            <a:endParaRPr lang="en-US" sz="1400" dirty="0"/>
-          </a:p>
-        </p:txBody>
-      </p:sp>
-      <p:sp>
-        <p:nvSpPr>
-          <p:cNvPr id="21" name="Text 19"/>
-          <p:cNvSpPr txBox="1"/>
-          <p:nvPr/>
-        </p:nvSpPr>
-        <p:spPr>
-          <a:xfrm>
-            <a:off x="2560320" y="5760720"/>
-            <a:ext cx="3931920" cy="320040"/>
-          </a:xfrm>
-          <a:prstGeom prst="rect">
-            <a:avLst/>
-          </a:prstGeom>
-          <a:noFill/>
-          <a:ln/>
-        </p:spPr>
-        <p:txBody>
-          <a:bodyPr wrap="square" lIns="0" tIns="0" rIns="0" bIns="0" rtlCol="0" anchor="t"/>
-          <a:lstStyle/>
-          <a:p>
-            <a:pPr indent="0" marL="0">
-              <a:buNone/>
-            </a:pPr>
-            <a:r>
-              <a:rPr lang="en-US" sz="1300" dirty="0">
-                <a:solidFill>
-                  <a:srgbClr val="0F172A"/>
-                </a:solidFill>
-                <a:latin typeface="Calibri" pitchFamily="34" charset="0"/>
-                <a:ea typeface="Calibri" pitchFamily="34" charset="-122"/>
-                <a:cs typeface="Calibri" pitchFamily="34" charset="-120"/>
-              </a:rPr>
-              <a:t>Docker Compose · Nginx · one-click start.bat</a:t>
-            </a:r>
-            <a:endParaRPr lang="en-US" sz="1300" dirty="0"/>
-          </a:p>
-        </p:txBody>
-      </p:sp>
-      <p:sp>
-        <p:nvSpPr>
-          <p:cNvPr id="22" name="Shape 20"/>
-          <p:cNvSpPr/>
-          <p:nvPr/>
-        </p:nvSpPr>
-        <p:spPr>
-          <a:xfrm>
-            <a:off x="6949440" y="1554480"/>
-            <a:ext cx="4754880" cy="4754880"/>
-          </a:xfrm>
-          <a:prstGeom prst="roundRect">
-            <a:avLst>
-              <a:gd name="adj" fmla="val 1538"/>
-            </a:avLst>
-          </a:prstGeom>
-          <a:solidFill>
-            <a:srgbClr val="FFFFFF"/>
-          </a:solidFill>
-          <a:ln w="9525">
-            <a:solidFill>
-              <a:srgbClr val="E2E8F0"/>
-            </a:solidFill>
-            <a:prstDash val="solid"/>
-          </a:ln>
-          <a:effectLst>
-            <a:outerShdw sx="100000" sy="100000" kx="0" ky="0" algn="bl" rotWithShape="0" blurRad="101600" dist="25400" dir="5400000">
-              <a:srgbClr val="000000">
-                <a:alpha val="14000"/>
-              </a:srgbClr>
-            </a:outerShdw>
-          </a:effectLst>
-        </p:spPr>
-      </p:sp>
-      <p:sp>
-        <p:nvSpPr>
-          <p:cNvPr id="23" name="Text 21"/>
-          <p:cNvSpPr txBox="1"/>
-          <p:nvPr/>
-        </p:nvSpPr>
-        <p:spPr>
-          <a:xfrm>
-            <a:off x="7223760" y="1783080"/>
-            <a:ext cx="4206240" cy="914400"/>
-          </a:xfrm>
-          <a:prstGeom prst="rect">
-            <a:avLst/>
-          </a:prstGeom>
-          <a:noFill/>
-          <a:ln/>
-        </p:spPr>
-        <p:txBody>
-          <a:bodyPr wrap="square" lIns="0" tIns="0" rIns="0" bIns="0" rtlCol="0" anchor="t"/>
-          <a:lstStyle/>
-          <a:p>
-            <a:pPr indent="0" marL="0">
-              <a:buNone/>
-            </a:pPr>
-            <a:r>
-              <a:rPr lang="en-US" sz="4800" b="1" dirty="0">
-                <a:solidFill>
-                  <a:srgbClr val="0F5C54"/>
-                </a:solidFill>
-                <a:latin typeface="Cambria" pitchFamily="34" charset="0"/>
-                <a:ea typeface="Cambria" pitchFamily="34" charset="-122"/>
-                <a:cs typeface="Cambria" pitchFamily="34" charset="-120"/>
-              </a:rPr>
-              <a:t>38 / 38</a:t>
-            </a:r>
-            <a:endParaRPr lang="en-US" sz="4800" dirty="0"/>
-          </a:p>
-        </p:txBody>
-      </p:sp>
-      <p:sp>
-        <p:nvSpPr>
-          <p:cNvPr id="24" name="Text 22"/>
-          <p:cNvSpPr txBox="1"/>
-          <p:nvPr/>
-        </p:nvSpPr>
-        <p:spPr>
-          <a:xfrm>
-            <a:off x="7223760" y="2697480"/>
-            <a:ext cx="4206240" cy="365760"/>
-          </a:xfrm>
-          <a:prstGeom prst="rect">
-            <a:avLst/>
-          </a:prstGeom>
-          <a:noFill/>
-          <a:ln/>
-        </p:spPr>
-        <p:txBody>
-          <a:bodyPr wrap="square" lIns="0" tIns="0" rIns="0" bIns="0" rtlCol="0" anchor="t"/>
-          <a:lstStyle/>
-          <a:p>
-            <a:pPr indent="0" marL="0">
-              <a:buNone/>
-            </a:pPr>
-            <a:r>
-              <a:rPr lang="en-US" sz="1500" dirty="0">
-                <a:solidFill>
-                  <a:srgbClr val="64748B"/>
-                </a:solidFill>
-                <a:latin typeface="Calibri" pitchFamily="34" charset="0"/>
-                <a:ea typeface="Calibri" pitchFamily="34" charset="-122"/>
-                <a:cs typeface="Calibri" pitchFamily="34" charset="-120"/>
-              </a:rPr>
-              <a:t>automated tests passing</a:t>
-            </a:r>
-            <a:endParaRPr lang="en-US" sz="1500" dirty="0"/>
-          </a:p>
-        </p:txBody>
-      </p:sp>
-      <p:sp>
-        <p:nvSpPr>
-          <p:cNvPr id="25" name="Text 23"/>
-          <p:cNvSpPr txBox="1"/>
-          <p:nvPr/>
-        </p:nvSpPr>
-        <p:spPr>
-          <a:xfrm>
-            <a:off x="7223760" y="3291840"/>
-            <a:ext cx="4297680" cy="2926080"/>
-          </a:xfrm>
-          <a:prstGeom prst="rect">
-            <a:avLst/>
-          </a:prstGeom>
-          <a:noFill/>
-          <a:ln/>
-        </p:spPr>
-        <p:txBody>
-          <a:bodyPr wrap="square" lIns="0" tIns="0" rIns="0" bIns="0" rtlCol="0" anchor="t"/>
-          <a:lstStyle/>
-          <a:p>
-            <a:pPr marL="228600" indent="-228600">
-              <a:spcAft>
-                <a:spcPts val="600"/>
-              </a:spcAft>
-              <a:buSzPct val="100000"/>
-              <a:buChar char="•"/>
-            </a:pPr>
-            <a:r>
-              <a:rPr lang="en-US" sz="1350" dirty="0">
-                <a:solidFill>
-                  <a:srgbClr val="0F172A"/>
-                </a:solidFill>
-                <a:latin typeface="Calibri" pitchFamily="34" charset="0"/>
-                <a:ea typeface="Calibri" pitchFamily="34" charset="-122"/>
-                <a:cs typeface="Calibri" pitchFamily="34" charset="-120"/>
-              </a:rPr>
-              <a:t>19 unit tests: NEWS2, triage, NLP, optimisers, queueing, forecasting</a:t>
-            </a:r>
-            <a:endParaRPr lang="en-US" sz="1350" dirty="0"/>
-          </a:p>
-          <a:p>
-            <a:pPr marL="228600" indent="-228600">
-              <a:spcAft>
-                <a:spcPts val="600"/>
-              </a:spcAft>
-              <a:buSzPct val="100000"/>
-              <a:buChar char="•"/>
-            </a:pPr>
-            <a:r>
-              <a:rPr lang="en-US" sz="1350" dirty="0">
-                <a:solidFill>
-                  <a:srgbClr val="0F172A"/>
-                </a:solidFill>
-                <a:latin typeface="Calibri" pitchFamily="34" charset="0"/>
-                <a:ea typeface="Calibri" pitchFamily="34" charset="-122"/>
-                <a:cs typeface="Calibri" pitchFamily="34" charset="-120"/>
-              </a:rPr>
-              <a:t>19 integration tests: full agent workflows, approvals and rollbacks, escalation, theatres, autonomy policy, RBAC</a:t>
-            </a:r>
-            <a:endParaRPr lang="en-US" sz="1350" dirty="0"/>
-          </a:p>
-          <a:p>
-            <a:pPr marL="228600" indent="-228600">
-              <a:spcAft>
-                <a:spcPts val="600"/>
-              </a:spcAft>
-              <a:buSzPct val="100000"/>
-              <a:buChar char="•"/>
-            </a:pPr>
-            <a:r>
-              <a:rPr lang="en-US" sz="1350" dirty="0">
-                <a:solidFill>
-                  <a:srgbClr val="0F172A"/>
-                </a:solidFill>
-                <a:latin typeface="Calibri" pitchFamily="34" charset="0"/>
-                <a:ea typeface="Calibri" pitchFamily="34" charset="-122"/>
-                <a:cs typeface="Calibri" pitchFamily="34" charset="-120"/>
-              </a:rPr>
-              <a:t>TypeScript type-check and production build</a:t>
-            </a:r>
-            <a:endParaRPr lang="en-US" sz="1350" dirty="0"/>
-          </a:p>
-          <a:p>
-            <a:pPr marL="228600" indent="-228600">
-              <a:spcAft>
-                <a:spcPts val="600"/>
-              </a:spcAft>
-              <a:buSzPct val="100000"/>
-              <a:buChar char="•"/>
-            </a:pPr>
-            <a:r>
-              <a:rPr lang="en-US" sz="1350" dirty="0">
-                <a:solidFill>
-                  <a:srgbClr val="0F172A"/>
-                </a:solidFill>
-                <a:latin typeface="Calibri" pitchFamily="34" charset="0"/>
-                <a:ea typeface="Calibri" pitchFamily="34" charset="-122"/>
-                <a:cs typeface="Calibri" pitchFamily="34" charset="-120"/>
-              </a:rPr>
-              <a:t>End-to-end scenarios verified in the browser</a:t>
-            </a:r>
-            <a:endParaRPr lang="en-US" sz="1350" dirty="0"/>
-          </a:p>
-        </p:txBody>
-      </p:sp>
-      <p:sp>
-        <p:nvSpPr>
-          <p:cNvPr id="26" name="Text 24"/>
+              <a:t>Contraindicated prescriptions blocked; record-access log visible to patients; login lock-out and security headers</a:t>
+            </a:r>
+            <a:endParaRPr lang="en-US" sz="1150" dirty="0"/>
+          </a:p>
+        </p:txBody>
+      </p:sp>
+      <p:sp>
+        <p:nvSpPr>
+          <p:cNvPr id="15" name="Text 12"/>
           <p:cNvSpPr txBox="1"/>
           <p:nvPr/>
         </p:nvSpPr>
@@ -6264,7 +7673,7 @@
                 <a:ea typeface="Calibri" pitchFamily="34" charset="-122"/>
                 <a:cs typeface="Calibri" pitchFamily="34" charset="-120"/>
               </a:rPr>
-              <a:t>14</a:t>
+              <a:t>15</a:t>
             </a:r>
             <a:endParaRPr lang="en-US" sz="1000" dirty="0"/>
           </a:p>
@@ -6278,9 +7687,9 @@
 </p:sld>
 </file>
 
-<file path=ppt/slides/slide15.xml><?xml version="1.0" encoding="utf-8"?>
+<file path=ppt/slides/slide16.xml><?xml version="1.0" encoding="utf-8"?>
 <p:sld xmlns:a="http://schemas.openxmlformats.org/drawingml/2006/main" xmlns:r="http://schemas.openxmlformats.org/officeDocument/2006/relationships" xmlns:p="http://schemas.openxmlformats.org/presentationml/2006/main">
-  <p:cSld name="Slide 15">
+  <p:cSld name="Slide 16">
     <p:bg>
       <p:bgPr>
         <a:solidFill>
@@ -6335,7 +7744,7 @@
                 <a:ea typeface="Cambria" pitchFamily="34" charset="-122"/>
                 <a:cs typeface="Cambria" pitchFamily="34" charset="-120"/>
               </a:rPr>
-              <a:t>Conclusion and future scope</a:t>
+              <a:t>Results</a:t>
             </a:r>
             <a:endParaRPr lang="en-US" sz="3200" dirty="0"/>
           </a:p>
@@ -6343,18 +7752,57 @@
       </p:sp>
       <p:sp>
         <p:nvSpPr>
-          <p:cNvPr id="3" name="Shape 1"/>
+          <p:cNvPr id="3" name="Text 1"/>
+          <p:cNvSpPr txBox="1"/>
+          <p:nvPr/>
+        </p:nvSpPr>
+        <p:spPr>
+          <a:xfrm>
+            <a:off x="548640" y="1005840"/>
+            <a:ext cx="11064240" cy="365760"/>
+          </a:xfrm>
+          <a:prstGeom prst="rect">
+            <a:avLst/>
+          </a:prstGeom>
+          <a:noFill/>
+          <a:ln/>
+        </p:spPr>
+        <p:txBody>
+          <a:bodyPr wrap="square" lIns="0" tIns="0" rIns="0" bIns="0" rtlCol="0" anchor="t"/>
+          <a:lstStyle/>
+          <a:p>
+            <a:pPr indent="0" marL="0">
+              <a:buNone/>
+            </a:pPr>
+            <a:r>
+              <a:rPr lang="en-US" sz="1500" i="1" dirty="0">
+                <a:solidFill>
+                  <a:srgbClr val="64748B"/>
+                </a:solidFill>
+                <a:latin typeface="Calibri" pitchFamily="34" charset="0"/>
+                <a:ea typeface="Calibri" pitchFamily="34" charset="-122"/>
+                <a:cs typeface="Calibri" pitchFamily="34" charset="-120"/>
+              </a:rPr>
+              <a:t>Measured on the synthetic 108-bed hospital</a:t>
+            </a:r>
+            <a:endParaRPr lang="en-US" sz="1500" dirty="0"/>
+          </a:p>
+        </p:txBody>
+      </p:sp>
+      <p:sp>
+        <p:nvSpPr>
+          <p:cNvPr id="4" name="Shape 2"/>
           <p:cNvSpPr/>
           <p:nvPr/>
         </p:nvSpPr>
         <p:spPr>
           <a:xfrm>
-            <a:off x="548640" y="1280160"/>
-            <a:ext cx="5486400" cy="3749040"/>
+            <a:off x="548640" y="1600200"/>
+            <a:ext cx="3520440" cy="2240280"/>
           </a:xfrm>
           <a:prstGeom prst="roundRect">
             <a:avLst>
-              <a:gd name="adj" fmla="val 1951"/>
+              <a:gd name="adj" fmla="val 3265"/>
             </a:avLst>
           </a:prstGeom>
           <a:solidFill>
@@ -6377,14 +7825,14 @@
       </p:sp>
       <p:sp>
         <p:nvSpPr>
-          <p:cNvPr id="4" name="Text 2"/>
-          <p:cNvSpPr txBox="1"/>
-          <p:nvPr/>
-        </p:nvSpPr>
-        <p:spPr>
-          <a:xfrm>
-            <a:off x="822960" y="1463040"/>
-            <a:ext cx="4937760" cy="411480"/>
+          <p:cNvPr id="5" name="Text 3"/>
+          <p:cNvSpPr txBox="1"/>
+          <p:nvPr/>
+        </p:nvSpPr>
+        <p:spPr>
+          <a:xfrm>
+            <a:off x="822960" y="1920240"/>
+            <a:ext cx="3017520" cy="914400"/>
           </a:xfrm>
           <a:prstGeom prst="rect">
             <a:avLst/>
@@ -6400,161 +7848,73 @@
               <a:buNone/>
             </a:pPr>
             <a:r>
-              <a:rPr lang="en-US" sz="1900" b="1" dirty="0">
+              <a:rPr lang="en-US" sz="4400" b="1" dirty="0">
                 <a:solidFill>
                   <a:srgbClr val="0F5C54"/>
                 </a:solidFill>
-                <a:latin typeface="Calibri" pitchFamily="34" charset="0"/>
-                <a:ea typeface="Calibri" pitchFamily="34" charset="-122"/>
-                <a:cs typeface="Calibri" pitchFamily="34" charset="-120"/>
-              </a:rPr>
-              <a:t>What we achieved</a:t>
-            </a:r>
-            <a:endParaRPr lang="en-US" sz="1900" dirty="0"/>
-          </a:p>
-        </p:txBody>
-      </p:sp>
-      <p:sp>
-        <p:nvSpPr>
-          <p:cNvPr id="5" name="Text 3"/>
-          <p:cNvSpPr txBox="1"/>
-          <p:nvPr/>
-        </p:nvSpPr>
-        <p:spPr>
-          <a:xfrm>
-            <a:off x="822960" y="2011680"/>
-            <a:ext cx="5029200" cy="2926080"/>
-          </a:xfrm>
-          <a:prstGeom prst="rect">
-            <a:avLst/>
-          </a:prstGeom>
-          <a:noFill/>
-          <a:ln/>
-        </p:spPr>
-        <p:txBody>
-          <a:bodyPr wrap="square" lIns="0" tIns="0" rIns="0" bIns="0" rtlCol="0" anchor="t"/>
-          <a:lstStyle/>
-          <a:p>
-            <a:pPr marL="228600" indent="-228600">
-              <a:spcAft>
-                <a:spcPts val="600"/>
-              </a:spcAft>
-              <a:buSzPct val="100000"/>
-              <a:buChar char="•"/>
-            </a:pPr>
-            <a:r>
-              <a:rPr lang="en-US" sz="1500" dirty="0">
-                <a:solidFill>
-                  <a:srgbClr val="0F172A"/>
-                </a:solidFill>
-                <a:latin typeface="Calibri" pitchFamily="34" charset="0"/>
-                <a:ea typeface="Calibri" pitchFamily="34" charset="-122"/>
-                <a:cs typeface="Calibri" pitchFamily="34" charset="-120"/>
-              </a:rPr>
-              <a:t>All 12 synopsis modules working end-to-end</a:t>
-            </a:r>
-            <a:endParaRPr lang="en-US" sz="1500" dirty="0"/>
-          </a:p>
-          <a:p>
-            <a:pPr marL="228600" indent="-228600">
-              <a:spcAft>
-                <a:spcPts val="600"/>
-              </a:spcAft>
-              <a:buSzPct val="100000"/>
-              <a:buChar char="•"/>
-            </a:pPr>
-            <a:r>
-              <a:rPr lang="en-US" sz="1500" dirty="0">
-                <a:solidFill>
-                  <a:srgbClr val="0F172A"/>
-                </a:solidFill>
-                <a:latin typeface="Calibri" pitchFamily="34" charset="0"/>
-                <a:ea typeface="Calibri" pitchFamily="34" charset="-122"/>
-                <a:cs typeface="Calibri" pitchFamily="34" charset="-120"/>
-              </a:rPr>
-              <a:t>Nine cooperating agents with explainable recommendations</a:t>
-            </a:r>
-            <a:endParaRPr lang="en-US" sz="1500" dirty="0"/>
-          </a:p>
-          <a:p>
-            <a:pPr marL="228600" indent="-228600">
-              <a:spcAft>
-                <a:spcPts val="600"/>
-              </a:spcAft>
-              <a:buSzPct val="100000"/>
-              <a:buChar char="•"/>
-            </a:pPr>
-            <a:r>
-              <a:rPr lang="en-US" sz="1500" dirty="0">
-                <a:solidFill>
-                  <a:srgbClr val="0F172A"/>
-                </a:solidFill>
-                <a:latin typeface="Calibri" pitchFamily="34" charset="0"/>
-                <a:ea typeface="Calibri" pitchFamily="34" charset="-122"/>
-                <a:cs typeface="Calibri" pitchFamily="34" charset="-120"/>
-              </a:rPr>
-              <a:t>Safe by design: risk-tiered human approval, full audit</a:t>
-            </a:r>
-            <a:endParaRPr lang="en-US" sz="1500" dirty="0"/>
-          </a:p>
-          <a:p>
-            <a:pPr marL="228600" indent="-228600">
-              <a:spcAft>
-                <a:spcPts val="600"/>
-              </a:spcAft>
-              <a:buSzPct val="100000"/>
-              <a:buChar char="•"/>
-            </a:pPr>
-            <a:r>
-              <a:rPr lang="en-US" sz="1500" dirty="0">
-                <a:solidFill>
-                  <a:srgbClr val="0F172A"/>
-                </a:solidFill>
-                <a:latin typeface="Calibri" pitchFamily="34" charset="0"/>
-                <a:ea typeface="Calibri" pitchFamily="34" charset="-122"/>
-                <a:cs typeface="Calibri" pitchFamily="34" charset="-120"/>
-              </a:rPr>
-              <a:t>Extended with early warning, theatre scheduling, ML length-of-stay and predictive maintenance</a:t>
-            </a:r>
-            <a:endParaRPr lang="en-US" sz="1500" dirty="0"/>
-          </a:p>
-          <a:p>
-            <a:pPr marL="228600" indent="-228600">
-              <a:spcAft>
-                <a:spcPts val="600"/>
-              </a:spcAft>
-              <a:buSzPct val="100000"/>
-              <a:buChar char="•"/>
-            </a:pPr>
-            <a:r>
-              <a:rPr lang="en-US" sz="1500" dirty="0">
-                <a:solidFill>
-                  <a:srgbClr val="0F172A"/>
-                </a:solidFill>
-                <a:latin typeface="Calibri" pitchFamily="34" charset="0"/>
-                <a:ea typeface="Calibri" pitchFamily="34" charset="-122"/>
-                <a:cs typeface="Calibri" pitchFamily="34" charset="-120"/>
-              </a:rPr>
-              <a:t>Runs offline; one-click start; Docker-ready</a:t>
-            </a:r>
-            <a:endParaRPr lang="en-US" sz="1500" dirty="0"/>
-          </a:p>
-        </p:txBody>
-      </p:sp>
-      <p:sp>
-        <p:nvSpPr>
-          <p:cNvPr id="6" name="Shape 4"/>
+                <a:latin typeface="Cambria" pitchFamily="34" charset="0"/>
+                <a:ea typeface="Cambria" pitchFamily="34" charset="-122"/>
+                <a:cs typeface="Cambria" pitchFamily="34" charset="-120"/>
+              </a:rPr>
+              <a:t>95.8%</a:t>
+            </a:r>
+            <a:endParaRPr lang="en-US" sz="4400" dirty="0"/>
+          </a:p>
+        </p:txBody>
+      </p:sp>
+      <p:sp>
+        <p:nvSpPr>
+          <p:cNvPr id="6" name="Text 4"/>
+          <p:cNvSpPr txBox="1"/>
+          <p:nvPr/>
+        </p:nvSpPr>
+        <p:spPr>
+          <a:xfrm>
+            <a:off x="822960" y="2926080"/>
+            <a:ext cx="3017520" cy="731520"/>
+          </a:xfrm>
+          <a:prstGeom prst="rect">
+            <a:avLst/>
+          </a:prstGeom>
+          <a:noFill/>
+          <a:ln/>
+        </p:spPr>
+        <p:txBody>
+          <a:bodyPr wrap="square" lIns="0" tIns="0" rIns="0" bIns="0" rtlCol="0" anchor="t"/>
+          <a:lstStyle/>
+          <a:p>
+            <a:pPr indent="0" marL="0">
+              <a:buNone/>
+            </a:pPr>
+            <a:r>
+              <a:rPr lang="en-US" sz="1400" dirty="0">
+                <a:solidFill>
+                  <a:srgbClr val="64748B"/>
+                </a:solidFill>
+                <a:latin typeface="Calibri" pitchFamily="34" charset="0"/>
+                <a:ea typeface="Calibri" pitchFamily="34" charset="-122"/>
+                <a:cs typeface="Calibri" pitchFamily="34" charset="-120"/>
+              </a:rPr>
+              <a:t>intent accuracy on held-out requests (74% cross-validated)</a:t>
+            </a:r>
+            <a:endParaRPr lang="en-US" sz="1400" dirty="0"/>
+          </a:p>
+        </p:txBody>
+      </p:sp>
+      <p:sp>
+        <p:nvSpPr>
+          <p:cNvPr id="7" name="Shape 5"/>
           <p:cNvSpPr/>
           <p:nvPr/>
         </p:nvSpPr>
         <p:spPr>
           <a:xfrm>
-            <a:off x="6309360" y="1280160"/>
-            <a:ext cx="5394960" cy="3749040"/>
+            <a:off x="4297680" y="1600200"/>
+            <a:ext cx="3520440" cy="2240280"/>
           </a:xfrm>
           <a:prstGeom prst="roundRect">
             <a:avLst>
-              <a:gd name="adj" fmla="val 1951"/>
+              <a:gd name="adj" fmla="val 3265"/>
             </a:avLst>
           </a:prstGeom>
           <a:solidFill>
@@ -6577,14 +7937,14 @@
       </p:sp>
       <p:sp>
         <p:nvSpPr>
-          <p:cNvPr id="7" name="Text 5"/>
-          <p:cNvSpPr txBox="1"/>
-          <p:nvPr/>
-        </p:nvSpPr>
-        <p:spPr>
-          <a:xfrm>
-            <a:off x="6583680" y="1463040"/>
-            <a:ext cx="4846320" cy="411480"/>
+          <p:cNvPr id="8" name="Text 6"/>
+          <p:cNvSpPr txBox="1"/>
+          <p:nvPr/>
+        </p:nvSpPr>
+        <p:spPr>
+          <a:xfrm>
+            <a:off x="4572000" y="1920240"/>
+            <a:ext cx="3017520" cy="914400"/>
           </a:xfrm>
           <a:prstGeom prst="rect">
             <a:avLst/>
@@ -6600,216 +7960,510 @@
               <a:buNone/>
             </a:pPr>
             <a:r>
-              <a:rPr lang="en-US" sz="1900" b="1" dirty="0">
+              <a:rPr lang="en-US" sz="4400" b="1" dirty="0">
                 <a:solidFill>
                   <a:srgbClr val="0F5C54"/>
                 </a:solidFill>
-                <a:latin typeface="Calibri" pitchFamily="34" charset="0"/>
-                <a:ea typeface="Calibri" pitchFamily="34" charset="-122"/>
-                <a:cs typeface="Calibri" pitchFamily="34" charset="-120"/>
-              </a:rPr>
-              <a:t>Next steps</a:t>
-            </a:r>
-            <a:endParaRPr lang="en-US" sz="1900" dirty="0"/>
-          </a:p>
-        </p:txBody>
-      </p:sp>
-      <p:sp>
-        <p:nvSpPr>
-          <p:cNvPr id="8" name="Text 6"/>
-          <p:cNvSpPr txBox="1"/>
-          <p:nvPr/>
-        </p:nvSpPr>
-        <p:spPr>
-          <a:xfrm>
-            <a:off x="6583680" y="2011680"/>
-            <a:ext cx="4937760" cy="2926080"/>
-          </a:xfrm>
-          <a:prstGeom prst="rect">
-            <a:avLst/>
-          </a:prstGeom>
-          <a:noFill/>
-          <a:ln/>
-        </p:spPr>
-        <p:txBody>
-          <a:bodyPr wrap="square" lIns="0" tIns="0" rIns="0" bIns="0" rtlCol="0" anchor="t"/>
-          <a:lstStyle/>
-          <a:p>
-            <a:pPr marL="228600" indent="-228600">
-              <a:spcAft>
-                <a:spcPts val="600"/>
-              </a:spcAft>
-              <a:buSzPct val="100000"/>
-              <a:buChar char="•"/>
-            </a:pPr>
-            <a:r>
-              <a:rPr lang="en-US" sz="1500" dirty="0">
-                <a:solidFill>
-                  <a:srgbClr val="0F172A"/>
-                </a:solidFill>
-                <a:latin typeface="Calibri" pitchFamily="34" charset="0"/>
-                <a:ea typeface="Calibri" pitchFamily="34" charset="-122"/>
-                <a:cs typeface="Calibri" pitchFamily="34" charset="-120"/>
-              </a:rPr>
-              <a:t>HL7 FHIR integration with hospital systems</a:t>
-            </a:r>
-            <a:endParaRPr lang="en-US" sz="1500" dirty="0"/>
-          </a:p>
-          <a:p>
-            <a:pPr marL="228600" indent="-228600">
-              <a:spcAft>
-                <a:spcPts val="600"/>
-              </a:spcAft>
-              <a:buSzPct val="100000"/>
-              <a:buChar char="•"/>
-            </a:pPr>
-            <a:r>
-              <a:rPr lang="en-US" sz="1500" dirty="0">
-                <a:solidFill>
-                  <a:srgbClr val="0F172A"/>
-                </a:solidFill>
-                <a:latin typeface="Calibri" pitchFamily="34" charset="0"/>
-                <a:ea typeface="Calibri" pitchFamily="34" charset="-122"/>
-                <a:cs typeface="Calibri" pitchFamily="34" charset="-120"/>
-              </a:rPr>
-              <a:t>IoT smart beds and monitors feeding early warning</a:t>
-            </a:r>
-            <a:endParaRPr lang="en-US" sz="1500" dirty="0"/>
-          </a:p>
-          <a:p>
-            <a:pPr marL="228600" indent="-228600">
-              <a:spcAft>
-                <a:spcPts val="600"/>
-              </a:spcAft>
-              <a:buSzPct val="100000"/>
-              <a:buChar char="•"/>
-            </a:pPr>
-            <a:r>
-              <a:rPr lang="en-US" sz="1500" dirty="0">
-                <a:solidFill>
-                  <a:srgbClr val="0F172A"/>
-                </a:solidFill>
-                <a:latin typeface="Calibri" pitchFamily="34" charset="0"/>
-                <a:ea typeface="Calibri" pitchFamily="34" charset="-122"/>
-                <a:cs typeface="Calibri" pitchFamily="34" charset="-120"/>
-              </a:rPr>
-              <a:t>Retrain models on real hospital data; readmission risk</a:t>
-            </a:r>
-            <a:endParaRPr lang="en-US" sz="1500" dirty="0"/>
-          </a:p>
-          <a:p>
-            <a:pPr marL="228600" indent="-228600">
-              <a:spcAft>
-                <a:spcPts val="600"/>
-              </a:spcAft>
-              <a:buSzPct val="100000"/>
-              <a:buChar char="•"/>
-            </a:pPr>
-            <a:r>
-              <a:rPr lang="en-US" sz="1500" dirty="0">
-                <a:solidFill>
-                  <a:srgbClr val="0F172A"/>
-                </a:solidFill>
-                <a:latin typeface="Calibri" pitchFamily="34" charset="0"/>
-                <a:ea typeface="Calibri" pitchFamily="34" charset="-122"/>
-                <a:cs typeface="Calibri" pitchFamily="34" charset="-120"/>
-              </a:rPr>
-              <a:t>Multi-hospital referral coordination</a:t>
-            </a:r>
-            <a:endParaRPr lang="en-US" sz="1500" dirty="0"/>
-          </a:p>
-          <a:p>
-            <a:pPr marL="228600" indent="-228600">
-              <a:spcAft>
-                <a:spcPts val="600"/>
-              </a:spcAft>
-              <a:buSzPct val="100000"/>
-              <a:buChar char="•"/>
-            </a:pPr>
-            <a:r>
-              <a:rPr lang="en-US" sz="1500" dirty="0">
-                <a:solidFill>
-                  <a:srgbClr val="0F172A"/>
-                </a:solidFill>
-                <a:latin typeface="Calibri" pitchFamily="34" charset="0"/>
-                <a:ea typeface="Calibri" pitchFamily="34" charset="-122"/>
-                <a:cs typeface="Calibri" pitchFamily="34" charset="-120"/>
-              </a:rPr>
-              <a:t>Voice and regional-language interfaces</a:t>
-            </a:r>
-            <a:endParaRPr lang="en-US" sz="1500" dirty="0"/>
-          </a:p>
-        </p:txBody>
-      </p:sp>
-      <p:sp>
-        <p:nvSpPr>
-          <p:cNvPr id="9" name="Shape 7"/>
+                <a:latin typeface="Cambria" pitchFamily="34" charset="0"/>
+                <a:ea typeface="Cambria" pitchFamily="34" charset="-122"/>
+                <a:cs typeface="Cambria" pitchFamily="34" charset="-120"/>
+              </a:rPr>
+              <a:t>3.07%</a:t>
+            </a:r>
+            <a:endParaRPr lang="en-US" sz="4400" dirty="0"/>
+          </a:p>
+        </p:txBody>
+      </p:sp>
+      <p:sp>
+        <p:nvSpPr>
+          <p:cNvPr id="9" name="Text 7"/>
+          <p:cNvSpPr txBox="1"/>
+          <p:nvPr/>
+        </p:nvSpPr>
+        <p:spPr>
+          <a:xfrm>
+            <a:off x="4572000" y="2926080"/>
+            <a:ext cx="3017520" cy="731520"/>
+          </a:xfrm>
+          <a:prstGeom prst="rect">
+            <a:avLst/>
+          </a:prstGeom>
+          <a:noFill/>
+          <a:ln/>
+        </p:spPr>
+        <p:txBody>
+          <a:bodyPr wrap="square" lIns="0" tIns="0" rIns="0" bIns="0" rtlCol="0" anchor="t"/>
+          <a:lstStyle/>
+          <a:p>
+            <a:pPr indent="0" marL="0">
+              <a:buNone/>
+            </a:pPr>
+            <a:r>
+              <a:rPr lang="en-US" sz="1400" dirty="0">
+                <a:solidFill>
+                  <a:srgbClr val="64748B"/>
+                </a:solidFill>
+                <a:latin typeface="Calibri" pitchFamily="34" charset="0"/>
+                <a:ea typeface="Calibri" pitchFamily="34" charset="-122"/>
+                <a:cs typeface="Calibri" pitchFamily="34" charset="-120"/>
+              </a:rPr>
+              <a:t>bed-occupancy forecast MAPE (naive: 4.14%)</a:t>
+            </a:r>
+            <a:endParaRPr lang="en-US" sz="1400" dirty="0"/>
+          </a:p>
+        </p:txBody>
+      </p:sp>
+      <p:sp>
+        <p:nvSpPr>
+          <p:cNvPr id="10" name="Shape 8"/>
           <p:cNvSpPr/>
           <p:nvPr/>
         </p:nvSpPr>
         <p:spPr>
           <a:xfrm>
-            <a:off x="548640" y="5349240"/>
-            <a:ext cx="11155680" cy="914400"/>
+            <a:off x="8046720" y="1600200"/>
+            <a:ext cx="3520440" cy="2240280"/>
           </a:xfrm>
           <a:prstGeom prst="roundRect">
             <a:avLst>
-              <a:gd name="adj" fmla="val 8000"/>
+              <a:gd name="adj" fmla="val 3265"/>
             </a:avLst>
           </a:prstGeom>
           <a:solidFill>
-            <a:srgbClr val="0B1F24"/>
+            <a:srgbClr val="FFFFFF"/>
           </a:solidFill>
-          <a:ln w="12700">
+          <a:ln w="9525">
             <a:solidFill>
-              <a:srgbClr val="0B1F24"/>
+              <a:srgbClr val="E2E8F0"/>
             </a:solidFill>
             <a:prstDash val="solid"/>
           </a:ln>
-        </p:spPr>
-      </p:sp>
-      <p:sp>
-        <p:nvSpPr>
-          <p:cNvPr id="10" name="Text 8"/>
-          <p:cNvSpPr txBox="1"/>
-          <p:nvPr/>
-        </p:nvSpPr>
-        <p:spPr>
-          <a:xfrm>
-            <a:off x="822960" y="5349240"/>
-            <a:ext cx="10607040" cy="914400"/>
-          </a:xfrm>
-          <a:prstGeom prst="rect">
-            <a:avLst/>
-          </a:prstGeom>
-          <a:noFill/>
-          <a:ln/>
-        </p:spPr>
-        <p:txBody>
-          <a:bodyPr wrap="square" lIns="0" tIns="0" rIns="0" bIns="0" rtlCol="0" anchor="ctr"/>
-          <a:lstStyle/>
-          <a:p>
-            <a:pPr algn="ctr" indent="0" marL="0">
-              <a:buNone/>
-            </a:pPr>
-            <a:r>
-              <a:rPr lang="en-US" sz="2200" i="1" dirty="0">
-                <a:solidFill>
-                  <a:srgbClr val="FFFFFF"/>
+          <a:effectLst>
+            <a:outerShdw sx="100000" sy="100000" kx="0" ky="0" algn="bl" rotWithShape="0" blurRad="101600" dist="25400" dir="5400000">
+              <a:srgbClr val="000000">
+                <a:alpha val="14000"/>
+              </a:srgbClr>
+            </a:outerShdw>
+          </a:effectLst>
+        </p:spPr>
+      </p:sp>
+      <p:sp>
+        <p:nvSpPr>
+          <p:cNvPr id="11" name="Text 9"/>
+          <p:cNvSpPr txBox="1"/>
+          <p:nvPr/>
+        </p:nvSpPr>
+        <p:spPr>
+          <a:xfrm>
+            <a:off x="8321040" y="1920240"/>
+            <a:ext cx="3017520" cy="914400"/>
+          </a:xfrm>
+          <a:prstGeom prst="rect">
+            <a:avLst/>
+          </a:prstGeom>
+          <a:noFill/>
+          <a:ln/>
+        </p:spPr>
+        <p:txBody>
+          <a:bodyPr wrap="square" lIns="0" tIns="0" rIns="0" bIns="0" rtlCol="0" anchor="t"/>
+          <a:lstStyle/>
+          <a:p>
+            <a:pPr indent="0" marL="0">
+              <a:buNone/>
+            </a:pPr>
+            <a:r>
+              <a:rPr lang="en-US" sz="4400" b="1" dirty="0">
+                <a:solidFill>
+                  <a:srgbClr val="F97360"/>
                 </a:solidFill>
                 <a:latin typeface="Cambria" pitchFamily="34" charset="0"/>
                 <a:ea typeface="Cambria" pitchFamily="34" charset="-122"/>
                 <a:cs typeface="Cambria" pitchFamily="34" charset="-120"/>
               </a:rPr>
-              <a:t>AI coordinates, optimises and explains — qualified clinicians make the decisions.</a:t>
-            </a:r>
-            <a:endParaRPr lang="en-US" sz="2200" dirty="0"/>
-          </a:p>
-        </p:txBody>
-      </p:sp>
-      <p:sp>
-        <p:nvSpPr>
-          <p:cNvPr id="11" name="Text 9"/>
+              <a:t>−21%</a:t>
+            </a:r>
+            <a:endParaRPr lang="en-US" sz="4400" dirty="0"/>
+          </a:p>
+        </p:txBody>
+      </p:sp>
+      <p:sp>
+        <p:nvSpPr>
+          <p:cNvPr id="12" name="Text 10"/>
+          <p:cNvSpPr txBox="1"/>
+          <p:nvPr/>
+        </p:nvSpPr>
+        <p:spPr>
+          <a:xfrm>
+            <a:off x="8321040" y="2926080"/>
+            <a:ext cx="3017520" cy="731520"/>
+          </a:xfrm>
+          <a:prstGeom prst="rect">
+            <a:avLst/>
+          </a:prstGeom>
+          <a:noFill/>
+          <a:ln/>
+        </p:spPr>
+        <p:txBody>
+          <a:bodyPr wrap="square" lIns="0" tIns="0" rIns="0" bIns="0" rtlCol="0" anchor="t"/>
+          <a:lstStyle/>
+          <a:p>
+            <a:pPr indent="0" marL="0">
+              <a:buNone/>
+            </a:pPr>
+            <a:r>
+              <a:rPr lang="en-US" sz="1400" dirty="0">
+                <a:solidFill>
+                  <a:srgbClr val="64748B"/>
+                </a:solidFill>
+                <a:latin typeface="Calibri" pitchFamily="34" charset="0"/>
+                <a:ea typeface="Calibri" pitchFamily="34" charset="-122"/>
+                <a:cs typeface="Calibri" pitchFamily="34" charset="-120"/>
+              </a:rPr>
+              <a:t>length-of-stay error vs baseline (MAE 2.07 d)</a:t>
+            </a:r>
+            <a:endParaRPr lang="en-US" sz="1400" dirty="0"/>
+          </a:p>
+        </p:txBody>
+      </p:sp>
+      <p:sp>
+        <p:nvSpPr>
+          <p:cNvPr id="13" name="Shape 11"/>
+          <p:cNvSpPr/>
+          <p:nvPr/>
+        </p:nvSpPr>
+        <p:spPr>
+          <a:xfrm>
+            <a:off x="548640" y="4069080"/>
+            <a:ext cx="3520440" cy="2240280"/>
+          </a:xfrm>
+          <a:prstGeom prst="roundRect">
+            <a:avLst>
+              <a:gd name="adj" fmla="val 3265"/>
+            </a:avLst>
+          </a:prstGeom>
+          <a:solidFill>
+            <a:srgbClr val="FFFFFF"/>
+          </a:solidFill>
+          <a:ln w="9525">
+            <a:solidFill>
+              <a:srgbClr val="E2E8F0"/>
+            </a:solidFill>
+            <a:prstDash val="solid"/>
+          </a:ln>
+          <a:effectLst>
+            <a:outerShdw sx="100000" sy="100000" kx="0" ky="0" algn="bl" rotWithShape="0" blurRad="101600" dist="25400" dir="5400000">
+              <a:srgbClr val="000000">
+                <a:alpha val="14000"/>
+              </a:srgbClr>
+            </a:outerShdw>
+          </a:effectLst>
+        </p:spPr>
+      </p:sp>
+      <p:sp>
+        <p:nvSpPr>
+          <p:cNvPr id="14" name="Text 12"/>
+          <p:cNvSpPr txBox="1"/>
+          <p:nvPr/>
+        </p:nvSpPr>
+        <p:spPr>
+          <a:xfrm>
+            <a:off x="822960" y="4389120"/>
+            <a:ext cx="3017520" cy="914400"/>
+          </a:xfrm>
+          <a:prstGeom prst="rect">
+            <a:avLst/>
+          </a:prstGeom>
+          <a:noFill/>
+          <a:ln/>
+        </p:spPr>
+        <p:txBody>
+          <a:bodyPr wrap="square" lIns="0" tIns="0" rIns="0" bIns="0" rtlCol="0" anchor="t"/>
+          <a:lstStyle/>
+          <a:p>
+            <a:pPr indent="0" marL="0">
+              <a:buNone/>
+            </a:pPr>
+            <a:r>
+              <a:rPr lang="en-US" sz="4400" b="1" dirty="0">
+                <a:solidFill>
+                  <a:srgbClr val="0F5C54"/>
+                </a:solidFill>
+                <a:latin typeface="Cambria" pitchFamily="34" charset="0"/>
+                <a:ea typeface="Cambria" pitchFamily="34" charset="-122"/>
+                <a:cs typeface="Cambria" pitchFamily="34" charset="-120"/>
+              </a:rPr>
+              <a:t>1.1 s</a:t>
+            </a:r>
+            <a:endParaRPr lang="en-US" sz="4400" dirty="0"/>
+          </a:p>
+        </p:txBody>
+      </p:sp>
+      <p:sp>
+        <p:nvSpPr>
+          <p:cNvPr id="15" name="Text 13"/>
+          <p:cNvSpPr txBox="1"/>
+          <p:nvPr/>
+        </p:nvSpPr>
+        <p:spPr>
+          <a:xfrm>
+            <a:off x="822960" y="5394960"/>
+            <a:ext cx="3017520" cy="731520"/>
+          </a:xfrm>
+          <a:prstGeom prst="rect">
+            <a:avLst/>
+          </a:prstGeom>
+          <a:noFill/>
+          <a:ln/>
+        </p:spPr>
+        <p:txBody>
+          <a:bodyPr wrap="square" lIns="0" tIns="0" rIns="0" bIns="0" rtlCol="0" anchor="t"/>
+          <a:lstStyle/>
+          <a:p>
+            <a:pPr indent="0" marL="0">
+              <a:buNone/>
+            </a:pPr>
+            <a:r>
+              <a:rPr lang="en-US" sz="1400" dirty="0">
+                <a:solidFill>
+                  <a:srgbClr val="64748B"/>
+                </a:solidFill>
+                <a:latin typeface="Calibri" pitchFamily="34" charset="0"/>
+                <a:ea typeface="Calibri" pitchFamily="34" charset="-122"/>
+                <a:cs typeface="Calibri" pitchFamily="34" charset="-120"/>
+              </a:rPr>
+              <a:t>optimal 7-day roster for 77 staff</a:t>
+            </a:r>
+            <a:endParaRPr lang="en-US" sz="1400" dirty="0"/>
+          </a:p>
+        </p:txBody>
+      </p:sp>
+      <p:sp>
+        <p:nvSpPr>
+          <p:cNvPr id="16" name="Shape 14"/>
+          <p:cNvSpPr/>
+          <p:nvPr/>
+        </p:nvSpPr>
+        <p:spPr>
+          <a:xfrm>
+            <a:off x="4297680" y="4069080"/>
+            <a:ext cx="3520440" cy="2240280"/>
+          </a:xfrm>
+          <a:prstGeom prst="roundRect">
+            <a:avLst>
+              <a:gd name="adj" fmla="val 3265"/>
+            </a:avLst>
+          </a:prstGeom>
+          <a:solidFill>
+            <a:srgbClr val="FFFFFF"/>
+          </a:solidFill>
+          <a:ln w="9525">
+            <a:solidFill>
+              <a:srgbClr val="E2E8F0"/>
+            </a:solidFill>
+            <a:prstDash val="solid"/>
+          </a:ln>
+          <a:effectLst>
+            <a:outerShdw sx="100000" sy="100000" kx="0" ky="0" algn="bl" rotWithShape="0" blurRad="101600" dist="25400" dir="5400000">
+              <a:srgbClr val="000000">
+                <a:alpha val="14000"/>
+              </a:srgbClr>
+            </a:outerShdw>
+          </a:effectLst>
+        </p:spPr>
+      </p:sp>
+      <p:sp>
+        <p:nvSpPr>
+          <p:cNvPr id="17" name="Text 15"/>
+          <p:cNvSpPr txBox="1"/>
+          <p:nvPr/>
+        </p:nvSpPr>
+        <p:spPr>
+          <a:xfrm>
+            <a:off x="4572000" y="4389120"/>
+            <a:ext cx="3017520" cy="914400"/>
+          </a:xfrm>
+          <a:prstGeom prst="rect">
+            <a:avLst/>
+          </a:prstGeom>
+          <a:noFill/>
+          <a:ln/>
+        </p:spPr>
+        <p:txBody>
+          <a:bodyPr wrap="square" lIns="0" tIns="0" rIns="0" bIns="0" rtlCol="0" anchor="t"/>
+          <a:lstStyle/>
+          <a:p>
+            <a:pPr indent="0" marL="0">
+              <a:buNone/>
+            </a:pPr>
+            <a:r>
+              <a:rPr lang="en-US" sz="4400" b="1" dirty="0">
+                <a:solidFill>
+                  <a:srgbClr val="0F5C54"/>
+                </a:solidFill>
+                <a:latin typeface="Cambria" pitchFamily="34" charset="0"/>
+                <a:ea typeface="Cambria" pitchFamily="34" charset="-122"/>
+                <a:cs typeface="Cambria" pitchFamily="34" charset="-120"/>
+              </a:rPr>
+              <a:t>55 / 55</a:t>
+            </a:r>
+            <a:endParaRPr lang="en-US" sz="4400" dirty="0"/>
+          </a:p>
+        </p:txBody>
+      </p:sp>
+      <p:sp>
+        <p:nvSpPr>
+          <p:cNvPr id="18" name="Text 16"/>
+          <p:cNvSpPr txBox="1"/>
+          <p:nvPr/>
+        </p:nvSpPr>
+        <p:spPr>
+          <a:xfrm>
+            <a:off x="4572000" y="5394960"/>
+            <a:ext cx="3017520" cy="731520"/>
+          </a:xfrm>
+          <a:prstGeom prst="rect">
+            <a:avLst/>
+          </a:prstGeom>
+          <a:noFill/>
+          <a:ln/>
+        </p:spPr>
+        <p:txBody>
+          <a:bodyPr wrap="square" lIns="0" tIns="0" rIns="0" bIns="0" rtlCol="0" anchor="t"/>
+          <a:lstStyle/>
+          <a:p>
+            <a:pPr indent="0" marL="0">
+              <a:buNone/>
+            </a:pPr>
+            <a:r>
+              <a:rPr lang="en-US" sz="1400" dirty="0">
+                <a:solidFill>
+                  <a:srgbClr val="64748B"/>
+                </a:solidFill>
+                <a:latin typeface="Calibri" pitchFamily="34" charset="0"/>
+                <a:ea typeface="Calibri" pitchFamily="34" charset="-122"/>
+                <a:cs typeface="Calibri" pitchFamily="34" charset="-120"/>
+              </a:rPr>
+              <a:t>automated tests passing</a:t>
+            </a:r>
+            <a:endParaRPr lang="en-US" sz="1400" dirty="0"/>
+          </a:p>
+        </p:txBody>
+      </p:sp>
+      <p:sp>
+        <p:nvSpPr>
+          <p:cNvPr id="19" name="Shape 17"/>
+          <p:cNvSpPr/>
+          <p:nvPr/>
+        </p:nvSpPr>
+        <p:spPr>
+          <a:xfrm>
+            <a:off x="8046720" y="4069080"/>
+            <a:ext cx="3520440" cy="2240280"/>
+          </a:xfrm>
+          <a:prstGeom prst="roundRect">
+            <a:avLst>
+              <a:gd name="adj" fmla="val 3265"/>
+            </a:avLst>
+          </a:prstGeom>
+          <a:solidFill>
+            <a:srgbClr val="FFFFFF"/>
+          </a:solidFill>
+          <a:ln w="9525">
+            <a:solidFill>
+              <a:srgbClr val="E2E8F0"/>
+            </a:solidFill>
+            <a:prstDash val="solid"/>
+          </a:ln>
+          <a:effectLst>
+            <a:outerShdw sx="100000" sy="100000" kx="0" ky="0" algn="bl" rotWithShape="0" blurRad="101600" dist="25400" dir="5400000">
+              <a:srgbClr val="000000">
+                <a:alpha val="14000"/>
+              </a:srgbClr>
+            </a:outerShdw>
+          </a:effectLst>
+        </p:spPr>
+      </p:sp>
+      <p:sp>
+        <p:nvSpPr>
+          <p:cNvPr id="20" name="Text 18"/>
+          <p:cNvSpPr txBox="1"/>
+          <p:nvPr/>
+        </p:nvSpPr>
+        <p:spPr>
+          <a:xfrm>
+            <a:off x="8321040" y="4389120"/>
+            <a:ext cx="3017520" cy="914400"/>
+          </a:xfrm>
+          <a:prstGeom prst="rect">
+            <a:avLst/>
+          </a:prstGeom>
+          <a:noFill/>
+          <a:ln/>
+        </p:spPr>
+        <p:txBody>
+          <a:bodyPr wrap="square" lIns="0" tIns="0" rIns="0" bIns="0" rtlCol="0" anchor="t"/>
+          <a:lstStyle/>
+          <a:p>
+            <a:pPr indent="0" marL="0">
+              <a:buNone/>
+            </a:pPr>
+            <a:r>
+              <a:rPr lang="en-US" sz="4400" b="1" dirty="0">
+                <a:solidFill>
+                  <a:srgbClr val="0F5C54"/>
+                </a:solidFill>
+                <a:latin typeface="Cambria" pitchFamily="34" charset="0"/>
+                <a:ea typeface="Cambria" pitchFamily="34" charset="-122"/>
+                <a:cs typeface="Cambria" pitchFamily="34" charset="-120"/>
+              </a:rPr>
+              <a:t>0.5 s</a:t>
+            </a:r>
+            <a:endParaRPr lang="en-US" sz="4400" dirty="0"/>
+          </a:p>
+        </p:txBody>
+      </p:sp>
+      <p:sp>
+        <p:nvSpPr>
+          <p:cNvPr id="21" name="Text 19"/>
+          <p:cNvSpPr txBox="1"/>
+          <p:nvPr/>
+        </p:nvSpPr>
+        <p:spPr>
+          <a:xfrm>
+            <a:off x="8321040" y="5394960"/>
+            <a:ext cx="3017520" cy="731520"/>
+          </a:xfrm>
+          <a:prstGeom prst="rect">
+            <a:avLst/>
+          </a:prstGeom>
+          <a:noFill/>
+          <a:ln/>
+        </p:spPr>
+        <p:txBody>
+          <a:bodyPr wrap="square" lIns="0" tIns="0" rIns="0" bIns="0" rtlCol="0" anchor="t"/>
+          <a:lstStyle/>
+          <a:p>
+            <a:pPr indent="0" marL="0">
+              <a:buNone/>
+            </a:pPr>
+            <a:r>
+              <a:rPr lang="en-US" sz="1400" dirty="0">
+                <a:solidFill>
+                  <a:srgbClr val="64748B"/>
+                </a:solidFill>
+                <a:latin typeface="Calibri" pitchFamily="34" charset="0"/>
+                <a:ea typeface="Calibri" pitchFamily="34" charset="-122"/>
+                <a:cs typeface="Calibri" pitchFamily="34" charset="-120"/>
+              </a:rPr>
+              <a:t>digital twin: 20 replications × 2 scenarios</a:t>
+            </a:r>
+            <a:endParaRPr lang="en-US" sz="1400" dirty="0"/>
+          </a:p>
+        </p:txBody>
+      </p:sp>
+      <p:sp>
+        <p:nvSpPr>
+          <p:cNvPr id="22" name="Text 20"/>
           <p:cNvSpPr txBox="1"/>
           <p:nvPr/>
         </p:nvSpPr>
@@ -6840,7 +8494,7 @@
                 <a:ea typeface="Calibri" pitchFamily="34" charset="-122"/>
                 <a:cs typeface="Calibri" pitchFamily="34" charset="-120"/>
               </a:rPr>
-              <a:t>15</a:t>
+              <a:t>16</a:t>
             </a:r>
             <a:endParaRPr lang="en-US" sz="1000" dirty="0"/>
           </a:p>
@@ -6854,13 +8508,13 @@
 </p:sld>
 </file>
 
-<file path=ppt/slides/slide16.xml><?xml version="1.0" encoding="utf-8"?>
+<file path=ppt/slides/slide17.xml><?xml version="1.0" encoding="utf-8"?>
 <p:sld xmlns:a="http://schemas.openxmlformats.org/drawingml/2006/main" xmlns:r="http://schemas.openxmlformats.org/officeDocument/2006/relationships" xmlns:p="http://schemas.openxmlformats.org/presentationml/2006/main">
-  <p:cSld name="Slide 16">
+  <p:cSld name="Slide 17">
     <p:bg>
       <p:bgPr>
         <a:solidFill>
-          <a:srgbClr val="0B1F24"/>
+          <a:srgbClr val="F6FAF9"/>
         </a:solidFill>
       </p:bgPr>
     </p:bg>
@@ -6878,9 +8532,426 @@
           <a:chExt cx="0" cy="0"/>
         </a:xfrm>
       </p:grpSpPr>
+      <p:sp>
+        <p:nvSpPr>
+          <p:cNvPr id="2" name="Text 0"/>
+          <p:cNvSpPr txBox="1"/>
+          <p:nvPr/>
+        </p:nvSpPr>
+        <p:spPr>
+          <a:xfrm>
+            <a:off x="548640" y="365760"/>
+            <a:ext cx="11064240" cy="640080"/>
+          </a:xfrm>
+          <a:prstGeom prst="rect">
+            <a:avLst/>
+          </a:prstGeom>
+          <a:noFill/>
+          <a:ln/>
+        </p:spPr>
+        <p:txBody>
+          <a:bodyPr wrap="square" lIns="0" tIns="0" rIns="0" bIns="0" rtlCol="0" anchor="ctr"/>
+          <a:lstStyle/>
+          <a:p>
+            <a:pPr indent="0" marL="0">
+              <a:buNone/>
+            </a:pPr>
+            <a:r>
+              <a:rPr lang="en-US" sz="3200" b="1" dirty="0">
+                <a:solidFill>
+                  <a:srgbClr val="0F5C54"/>
+                </a:solidFill>
+                <a:latin typeface="Cambria" pitchFamily="34" charset="0"/>
+                <a:ea typeface="Cambria" pitchFamily="34" charset="-122"/>
+                <a:cs typeface="Cambria" pitchFamily="34" charset="-120"/>
+              </a:rPr>
+              <a:t>Forecasting accuracy</a:t>
+            </a:r>
+            <a:endParaRPr lang="en-US" sz="3200" dirty="0"/>
+          </a:p>
+        </p:txBody>
+      </p:sp>
+      <p:sp>
+        <p:nvSpPr>
+          <p:cNvPr id="3" name="Text 1"/>
+          <p:cNvSpPr txBox="1"/>
+          <p:nvPr/>
+        </p:nvSpPr>
+        <p:spPr>
+          <a:xfrm>
+            <a:off x="548640" y="1005840"/>
+            <a:ext cx="11064240" cy="365760"/>
+          </a:xfrm>
+          <a:prstGeom prst="rect">
+            <a:avLst/>
+          </a:prstGeom>
+          <a:noFill/>
+          <a:ln/>
+        </p:spPr>
+        <p:txBody>
+          <a:bodyPr wrap="square" lIns="0" tIns="0" rIns="0" bIns="0" rtlCol="0" anchor="t"/>
+          <a:lstStyle/>
+          <a:p>
+            <a:pPr indent="0" marL="0">
+              <a:buNone/>
+            </a:pPr>
+            <a:r>
+              <a:rPr lang="en-US" sz="1500" i="1" dirty="0">
+                <a:solidFill>
+                  <a:srgbClr val="64748B"/>
+                </a:solidFill>
+                <a:latin typeface="Calibri" pitchFamily="34" charset="0"/>
+                <a:ea typeface="Calibri" pitchFamily="34" charset="-122"/>
+                <a:cs typeface="Calibri" pitchFamily="34" charset="-120"/>
+              </a:rPr>
+              <a:t>Holt-Winters vs. seasonal-naive baseline — 14-day hold-out MAPE, reported as measured (lower is better)</a:t>
+            </a:r>
+            <a:endParaRPr lang="en-US" sz="1500" dirty="0"/>
+          </a:p>
+        </p:txBody>
+      </p:sp>
+      <p:sp>
+        <p:nvSpPr>
+          <p:cNvPr id="4" name="Shape 2"/>
+          <p:cNvSpPr/>
+          <p:nvPr/>
+        </p:nvSpPr>
+        <p:spPr>
+          <a:xfrm>
+            <a:off x="457200" y="1463040"/>
+            <a:ext cx="7498080" cy="5120640"/>
+          </a:xfrm>
+          <a:prstGeom prst="roundRect">
+            <a:avLst>
+              <a:gd name="adj" fmla="val 1429"/>
+            </a:avLst>
+          </a:prstGeom>
+          <a:solidFill>
+            <a:srgbClr val="FFFFFF"/>
+          </a:solidFill>
+          <a:ln w="9525">
+            <a:solidFill>
+              <a:srgbClr val="E2E8F0"/>
+            </a:solidFill>
+            <a:prstDash val="solid"/>
+          </a:ln>
+          <a:effectLst>
+            <a:outerShdw sx="100000" sy="100000" kx="0" ky="0" algn="bl" rotWithShape="0" blurRad="101600" dist="25400" dir="5400000">
+              <a:srgbClr val="000000">
+                <a:alpha val="14000"/>
+              </a:srgbClr>
+            </a:outerShdw>
+          </a:effectLst>
+        </p:spPr>
+      </p:sp>
+      <p:graphicFrame>
+        <p:nvGraphicFramePr>
+          <p:cNvPr id="5" name="Chart 0" descr=""/>
+          <p:cNvGraphicFramePr/>
+          <p:nvPr/>
+        </p:nvGraphicFramePr>
+        <p:xfrm>
+          <a:off x="640080" y="1645920"/>
+          <a:ext cx="7132320" cy="4754880"/>
+        </p:xfrm>
+        <a:graphic xmlns:a="http://schemas.openxmlformats.org/drawingml/2006/main">
+          <a:graphicData uri="http://schemas.openxmlformats.org/drawingml/2006/chart">
+            <c:chart xmlns:c="http://schemas.openxmlformats.org/drawingml/2006/chart" r:id="rId1"/>
+          </a:graphicData>
+        </a:graphic>
+      </p:graphicFrame>
+      <p:sp>
+        <p:nvSpPr>
+          <p:cNvPr id="6" name="Text 3"/>
+          <p:cNvSpPr txBox="1"/>
+          <p:nvPr/>
+        </p:nvSpPr>
+        <p:spPr>
+          <a:xfrm>
+            <a:off x="8321040" y="1737360"/>
+            <a:ext cx="3474720" cy="4572000"/>
+          </a:xfrm>
+          <a:prstGeom prst="rect">
+            <a:avLst/>
+          </a:prstGeom>
+          <a:noFill/>
+          <a:ln/>
+        </p:spPr>
+        <p:txBody>
+          <a:bodyPr wrap="square" lIns="0" tIns="0" rIns="0" bIns="0" rtlCol="0" anchor="t"/>
+          <a:lstStyle/>
+          <a:p>
+            <a:pPr marL="228600" indent="-228600">
+              <a:spcAft>
+                <a:spcPts val="600"/>
+              </a:spcAft>
+              <a:buSzPct val="100000"/>
+              <a:buChar char="•"/>
+            </a:pPr>
+            <a:r>
+              <a:rPr lang="en-US" sz="1500" dirty="0">
+                <a:solidFill>
+                  <a:srgbClr val="0F172A"/>
+                </a:solidFill>
+                <a:latin typeface="Calibri" pitchFamily="34" charset="0"/>
+                <a:ea typeface="Calibri" pitchFamily="34" charset="-122"/>
+                <a:cs typeface="Calibri" pitchFamily="34" charset="-120"/>
+              </a:rPr>
+              <a:t>Better than the seasonal-naive baseline on 4 of 5 series (admissions, the noisiest, is the exception)</a:t>
+            </a:r>
+            <a:endParaRPr lang="en-US" sz="1500" dirty="0"/>
+          </a:p>
+          <a:p>
+            <a:pPr marL="228600" indent="-228600">
+              <a:spcAft>
+                <a:spcPts val="600"/>
+              </a:spcAft>
+              <a:buSzPct val="100000"/>
+              <a:buChar char="•"/>
+            </a:pPr>
+            <a:r>
+              <a:rPr lang="en-US" sz="1500" dirty="0">
+                <a:solidFill>
+                  <a:srgbClr val="0F172A"/>
+                </a:solidFill>
+                <a:latin typeface="Calibri" pitchFamily="34" charset="0"/>
+                <a:ea typeface="Calibri" pitchFamily="34" charset="-122"/>
+                <a:cs typeface="Calibri" pitchFamily="34" charset="-120"/>
+              </a:rPr>
+              <a:t>Weekly pattern (Monday peak, Sunday low) captured automatically</a:t>
+            </a:r>
+            <a:endParaRPr lang="en-US" sz="1500" dirty="0"/>
+          </a:p>
+          <a:p>
+            <a:pPr marL="228600" indent="-228600">
+              <a:spcAft>
+                <a:spcPts val="600"/>
+              </a:spcAft>
+              <a:buSzPct val="100000"/>
+              <a:buChar char="•"/>
+            </a:pPr>
+            <a:r>
+              <a:rPr lang="en-US" sz="1500" dirty="0">
+                <a:solidFill>
+                  <a:srgbClr val="0F172A"/>
+                </a:solidFill>
+                <a:latin typeface="Calibri" pitchFamily="34" charset="0"/>
+                <a:ea typeface="Calibri" pitchFamily="34" charset="-122"/>
+                <a:cs typeface="Calibri" pitchFamily="34" charset="-120"/>
+              </a:rPr>
+              <a:t>Length-of-stay model: MAE 2.07 d vs 2.62 d baseline, R² 0.36</a:t>
+            </a:r>
+            <a:endParaRPr lang="en-US" sz="1500" dirty="0"/>
+          </a:p>
+          <a:p>
+            <a:pPr marL="228600" indent="-228600">
+              <a:spcAft>
+                <a:spcPts val="600"/>
+              </a:spcAft>
+              <a:buSzPct val="100000"/>
+              <a:buChar char="•"/>
+            </a:pPr>
+            <a:r>
+              <a:rPr lang="en-US" sz="1500" dirty="0">
+                <a:solidFill>
+                  <a:srgbClr val="0F172A"/>
+                </a:solidFill>
+                <a:latin typeface="Calibri" pitchFamily="34" charset="0"/>
+                <a:ea typeface="Calibri" pitchFamily="34" charset="-122"/>
+                <a:cs typeface="Calibri" pitchFamily="34" charset="-120"/>
+              </a:rPr>
+              <a:t>80% interval coverage 78% — honest uncertainty</a:t>
+            </a:r>
+            <a:endParaRPr lang="en-US" sz="1500" dirty="0"/>
+          </a:p>
+        </p:txBody>
+      </p:sp>
+      <p:sp>
+        <p:nvSpPr>
+          <p:cNvPr id="7" name="Text 4"/>
+          <p:cNvSpPr txBox="1"/>
+          <p:nvPr/>
+        </p:nvSpPr>
+        <p:spPr>
+          <a:xfrm>
+            <a:off x="11384280" y="6400800"/>
+            <a:ext cx="365760" cy="274320"/>
+          </a:xfrm>
+          <a:prstGeom prst="rect">
+            <a:avLst/>
+          </a:prstGeom>
+          <a:noFill/>
+          <a:ln/>
+        </p:spPr>
+        <p:txBody>
+          <a:bodyPr wrap="square" lIns="0" tIns="0" rIns="0" bIns="0" rtlCol="0" anchor="t"/>
+          <a:lstStyle/>
+          <a:p>
+            <a:pPr algn="r" indent="0" marL="0">
+              <a:buNone/>
+            </a:pPr>
+            <a:r>
+              <a:rPr lang="en-US" sz="1000" dirty="0">
+                <a:solidFill>
+                  <a:srgbClr val="64748B"/>
+                </a:solidFill>
+                <a:latin typeface="Calibri" pitchFamily="34" charset="0"/>
+                <a:ea typeface="Calibri" pitchFamily="34" charset="-122"/>
+                <a:cs typeface="Calibri" pitchFamily="34" charset="-120"/>
+              </a:rPr>
+              <a:t>17</a:t>
+            </a:r>
+            <a:endParaRPr lang="en-US" sz="1000" dirty="0"/>
+          </a:p>
+        </p:txBody>
+      </p:sp>
+    </p:spTree>
+  </p:cSld>
+  <p:clrMapOvr>
+    <a:masterClrMapping/>
+  </p:clrMapOvr>
+</p:sld>
+</file>
+
+<file path=ppt/slides/slide18.xml><?xml version="1.0" encoding="utf-8"?>
+<p:sld xmlns:a="http://schemas.openxmlformats.org/drawingml/2006/main" xmlns:r="http://schemas.openxmlformats.org/officeDocument/2006/relationships" xmlns:p="http://schemas.openxmlformats.org/presentationml/2006/main">
+  <p:cSld name="Slide 18">
+    <p:bg>
+      <p:bgPr>
+        <a:solidFill>
+          <a:srgbClr val="FFFFFF"/>
+        </a:solidFill>
+      </p:bgPr>
+    </p:bg>
+    <p:spTree>
+      <p:nvGrpSpPr>
+        <p:cNvPr id="1" name=""/>
+        <p:cNvGrpSpPr/>
+        <p:nvPr/>
+      </p:nvGrpSpPr>
+      <p:grpSpPr>
+        <a:xfrm>
+          <a:off x="0" y="0"/>
+          <a:ext cx="0" cy="0"/>
+          <a:chOff x="0" y="0"/>
+          <a:chExt cx="0" cy="0"/>
+        </a:xfrm>
+      </p:grpSpPr>
+      <p:sp>
+        <p:nvSpPr>
+          <p:cNvPr id="2" name="Text 0"/>
+          <p:cNvSpPr txBox="1"/>
+          <p:nvPr/>
+        </p:nvSpPr>
+        <p:spPr>
+          <a:xfrm>
+            <a:off x="548640" y="365760"/>
+            <a:ext cx="11064240" cy="640080"/>
+          </a:xfrm>
+          <a:prstGeom prst="rect">
+            <a:avLst/>
+          </a:prstGeom>
+          <a:noFill/>
+          <a:ln/>
+        </p:spPr>
+        <p:txBody>
+          <a:bodyPr wrap="square" lIns="0" tIns="0" rIns="0" bIns="0" rtlCol="0" anchor="ctr"/>
+          <a:lstStyle/>
+          <a:p>
+            <a:pPr indent="0" marL="0">
+              <a:buNone/>
+            </a:pPr>
+            <a:r>
+              <a:rPr lang="en-US" sz="3200" b="1" dirty="0">
+                <a:solidFill>
+                  <a:srgbClr val="0F5C54"/>
+                </a:solidFill>
+                <a:latin typeface="Cambria" pitchFamily="34" charset="0"/>
+                <a:ea typeface="Cambria" pitchFamily="34" charset="-122"/>
+                <a:cs typeface="Cambria" pitchFamily="34" charset="-120"/>
+              </a:rPr>
+              <a:t>One platform, every role</a:t>
+            </a:r>
+            <a:endParaRPr lang="en-US" sz="3200" dirty="0"/>
+          </a:p>
+        </p:txBody>
+      </p:sp>
+      <p:sp>
+        <p:nvSpPr>
+          <p:cNvPr id="3" name="Text 1"/>
+          <p:cNvSpPr txBox="1"/>
+          <p:nvPr/>
+        </p:nvSpPr>
+        <p:spPr>
+          <a:xfrm>
+            <a:off x="548640" y="1005840"/>
+            <a:ext cx="11064240" cy="365760"/>
+          </a:xfrm>
+          <a:prstGeom prst="rect">
+            <a:avLst/>
+          </a:prstGeom>
+          <a:noFill/>
+          <a:ln/>
+        </p:spPr>
+        <p:txBody>
+          <a:bodyPr wrap="square" lIns="0" tIns="0" rIns="0" bIns="0" rtlCol="0" anchor="t"/>
+          <a:lstStyle/>
+          <a:p>
+            <a:pPr indent="0" marL="0">
+              <a:buNone/>
+            </a:pPr>
+            <a:r>
+              <a:rPr lang="en-US" sz="1500" i="1" dirty="0">
+                <a:solidFill>
+                  <a:srgbClr val="64748B"/>
+                </a:solidFill>
+                <a:latin typeface="Calibri" pitchFamily="34" charset="0"/>
+                <a:ea typeface="Calibri" pitchFamily="34" charset="-122"/>
+                <a:cs typeface="Calibri" pitchFamily="34" charset="-120"/>
+              </a:rPr>
+              <a:t>29 screens — role dashboards, clinical workflows, pre-hospital, finance, analytics, public screens and a patient app</a:t>
+            </a:r>
+            <a:endParaRPr lang="en-US" sz="1500" dirty="0"/>
+          </a:p>
+        </p:txBody>
+      </p:sp>
+      <p:sp>
+        <p:nvSpPr>
+          <p:cNvPr id="4" name="Shape 2"/>
+          <p:cNvSpPr/>
+          <p:nvPr/>
+        </p:nvSpPr>
+        <p:spPr>
+          <a:xfrm>
+            <a:off x="818507" y="1417320"/>
+            <a:ext cx="4855226" cy="2286000"/>
+          </a:xfrm>
+          <a:prstGeom prst="roundRect">
+            <a:avLst>
+              <a:gd name="adj" fmla="val 3200"/>
+            </a:avLst>
+          </a:prstGeom>
+          <a:solidFill>
+            <a:srgbClr val="FFFFFF"/>
+          </a:solidFill>
+          <a:ln w="9525">
+            <a:solidFill>
+              <a:srgbClr val="E2E8F0"/>
+            </a:solidFill>
+            <a:prstDash val="solid"/>
+          </a:ln>
+          <a:effectLst>
+            <a:outerShdw sx="100000" sy="100000" kx="0" ky="0" algn="bl" rotWithShape="0" blurRad="101600" dist="25400" dir="5400000">
+              <a:srgbClr val="000000">
+                <a:alpha val="14000"/>
+              </a:srgbClr>
+            </a:outerShdw>
+          </a:effectLst>
+        </p:spPr>
+      </p:sp>
       <p:pic>
         <p:nvPicPr>
-          <p:cNvPr id="2" name="Image 0" descr="D:\codin\idea lab\frontend\public\icon-512.png">    </p:cNvPr>
+          <p:cNvPr id="5" name="Image 0" descr="C:\Users\HP\AppData\Local\Temp\claude\D--codin-idea-lab\87151ddf-948a-4e83-8159-c0449757400e\scratchpad\report\shots\g_inpatients.png">    </p:cNvPr>
           <p:cNvPicPr>
             <a:picLocks noChangeAspect="1"/>
           </p:cNvPicPr>
@@ -6894,8 +8965,8 @@
         </p:blipFill>
         <p:spPr>
           <a:xfrm>
-            <a:off x="5641848" y="1371600"/>
-            <a:ext cx="914400" cy="914400"/>
+            <a:off x="891659" y="1490472"/>
+            <a:ext cx="4708922" cy="2139696"/>
           </a:xfrm>
           <a:prstGeom prst="rect">
             <a:avLst/>
@@ -6904,14 +8975,14 @@
       </p:pic>
       <p:sp>
         <p:nvSpPr>
-          <p:cNvPr id="3" name="Text 0"/>
-          <p:cNvSpPr txBox="1"/>
-          <p:nvPr/>
-        </p:nvSpPr>
-        <p:spPr>
-          <a:xfrm>
-            <a:off x="914400" y="2560320"/>
-            <a:ext cx="10360152" cy="914400"/>
+          <p:cNvPr id="6" name="Text 3"/>
+          <p:cNvSpPr txBox="1"/>
+          <p:nvPr/>
+        </p:nvSpPr>
+        <p:spPr>
+          <a:xfrm>
+            <a:off x="548640" y="3721608"/>
+            <a:ext cx="5394960" cy="292608"/>
           </a:xfrm>
           <a:prstGeom prst="rect">
             <a:avLst/>
@@ -6927,15 +8998,1200 @@
               <a:buNone/>
             </a:pPr>
             <a:r>
-              <a:rPr lang="en-US" sz="4800" b="1" dirty="0">
-                <a:solidFill>
-                  <a:srgbClr val="FFFFFF"/>
+              <a:rPr lang="en-US" sz="1300" b="1" dirty="0">
+                <a:solidFill>
+                  <a:srgbClr val="0F5C54"/>
+                </a:solidFill>
+                <a:latin typeface="Calibri" pitchFamily="34" charset="0"/>
+                <a:ea typeface="Calibri" pitchFamily="34" charset="-122"/>
+                <a:cs typeface="Calibri" pitchFamily="34" charset="-120"/>
+              </a:rPr>
+              <a:t>Inpatients &amp; early warning</a:t>
+            </a:r>
+            <a:endParaRPr lang="en-US" sz="1300" dirty="0"/>
+          </a:p>
+        </p:txBody>
+      </p:sp>
+      <p:sp>
+        <p:nvSpPr>
+          <p:cNvPr id="7" name="Shape 4"/>
+          <p:cNvSpPr/>
+          <p:nvPr/>
+        </p:nvSpPr>
+        <p:spPr>
+          <a:xfrm>
+            <a:off x="7441720" y="1417320"/>
+            <a:ext cx="2947361" cy="2286000"/>
+          </a:xfrm>
+          <a:prstGeom prst="roundRect">
+            <a:avLst>
+              <a:gd name="adj" fmla="val 3200"/>
+            </a:avLst>
+          </a:prstGeom>
+          <a:solidFill>
+            <a:srgbClr val="FFFFFF"/>
+          </a:solidFill>
+          <a:ln w="9525">
+            <a:solidFill>
+              <a:srgbClr val="E2E8F0"/>
+            </a:solidFill>
+            <a:prstDash val="solid"/>
+          </a:ln>
+          <a:effectLst>
+            <a:outerShdw sx="100000" sy="100000" kx="0" ky="0" algn="bl" rotWithShape="0" blurRad="101600" dist="25400" dir="5400000">
+              <a:srgbClr val="000000">
+                <a:alpha val="14000"/>
+              </a:srgbClr>
+            </a:outerShdw>
+          </a:effectLst>
+        </p:spPr>
+      </p:sp>
+      <p:pic>
+        <p:nvPicPr>
+          <p:cNvPr id="8" name="Image 1" descr="C:\Users\HP\AppData\Local\Temp\claude\D--codin-idea-lab\87151ddf-948a-4e83-8159-c0449757400e\scratchpad\report\shots\handover.png">    </p:cNvPr>
+          <p:cNvPicPr>
+            <a:picLocks noChangeAspect="1"/>
+          </p:cNvPicPr>
+          <p:nvPr/>
+        </p:nvPicPr>
+        <p:blipFill>
+          <a:blip r:embed="rId2"/>
+          <a:stretch>
+            <a:fillRect/>
+          </a:stretch>
+        </p:blipFill>
+        <p:spPr>
+          <a:xfrm>
+            <a:off x="7514872" y="1490472"/>
+            <a:ext cx="2801057" cy="2139696"/>
+          </a:xfrm>
+          <a:prstGeom prst="rect">
+            <a:avLst/>
+          </a:prstGeom>
+        </p:spPr>
+      </p:pic>
+      <p:sp>
+        <p:nvSpPr>
+          <p:cNvPr id="9" name="Text 5"/>
+          <p:cNvSpPr txBox="1"/>
+          <p:nvPr/>
+        </p:nvSpPr>
+        <p:spPr>
+          <a:xfrm>
+            <a:off x="6217920" y="3721608"/>
+            <a:ext cx="5394960" cy="292608"/>
+          </a:xfrm>
+          <a:prstGeom prst="rect">
+            <a:avLst/>
+          </a:prstGeom>
+          <a:noFill/>
+          <a:ln/>
+        </p:spPr>
+        <p:txBody>
+          <a:bodyPr wrap="square" lIns="0" tIns="0" rIns="0" bIns="0" rtlCol="0" anchor="t"/>
+          <a:lstStyle/>
+          <a:p>
+            <a:pPr algn="ctr" indent="0" marL="0">
+              <a:buNone/>
+            </a:pPr>
+            <a:r>
+              <a:rPr lang="en-US" sz="1300" b="1" dirty="0">
+                <a:solidFill>
+                  <a:srgbClr val="0F5C54"/>
+                </a:solidFill>
+                <a:latin typeface="Calibri" pitchFamily="34" charset="0"/>
+                <a:ea typeface="Calibri" pitchFamily="34" charset="-122"/>
+                <a:cs typeface="Calibri" pitchFamily="34" charset="-120"/>
+              </a:rPr>
+              <a:t>SBAR shift handover</a:t>
+            </a:r>
+            <a:endParaRPr lang="en-US" sz="1300" dirty="0"/>
+          </a:p>
+        </p:txBody>
+      </p:sp>
+      <p:sp>
+        <p:nvSpPr>
+          <p:cNvPr id="10" name="Shape 6"/>
+          <p:cNvSpPr/>
+          <p:nvPr/>
+        </p:nvSpPr>
+        <p:spPr>
+          <a:xfrm>
+            <a:off x="818507" y="4069080"/>
+            <a:ext cx="4855226" cy="2286000"/>
+          </a:xfrm>
+          <a:prstGeom prst="roundRect">
+            <a:avLst>
+              <a:gd name="adj" fmla="val 3200"/>
+            </a:avLst>
+          </a:prstGeom>
+          <a:solidFill>
+            <a:srgbClr val="FFFFFF"/>
+          </a:solidFill>
+          <a:ln w="9525">
+            <a:solidFill>
+              <a:srgbClr val="E2E8F0"/>
+            </a:solidFill>
+            <a:prstDash val="solid"/>
+          </a:ln>
+          <a:effectLst>
+            <a:outerShdw sx="100000" sy="100000" kx="0" ky="0" algn="bl" rotWithShape="0" blurRad="101600" dist="25400" dir="5400000">
+              <a:srgbClr val="000000">
+                <a:alpha val="14000"/>
+              </a:srgbClr>
+            </a:outerShdw>
+          </a:effectLst>
+        </p:spPr>
+      </p:sp>
+      <p:pic>
+        <p:nvPicPr>
+          <p:cNvPr id="11" name="Image 2" descr="C:\Users\HP\AppData\Local\Temp\claude\D--codin-idea-lab\87151ddf-948a-4e83-8159-c0449757400e\scratchpad\report\shots\g_analytics.png">    </p:cNvPr>
+          <p:cNvPicPr>
+            <a:picLocks noChangeAspect="1"/>
+          </p:cNvPicPr>
+          <p:nvPr/>
+        </p:nvPicPr>
+        <p:blipFill>
+          <a:blip r:embed="rId3"/>
+          <a:stretch>
+            <a:fillRect/>
+          </a:stretch>
+        </p:blipFill>
+        <p:spPr>
+          <a:xfrm>
+            <a:off x="891659" y="4142232"/>
+            <a:ext cx="4708922" cy="2139696"/>
+          </a:xfrm>
+          <a:prstGeom prst="rect">
+            <a:avLst/>
+          </a:prstGeom>
+        </p:spPr>
+      </p:pic>
+      <p:sp>
+        <p:nvSpPr>
+          <p:cNvPr id="12" name="Text 7"/>
+          <p:cNvSpPr txBox="1"/>
+          <p:nvPr/>
+        </p:nvSpPr>
+        <p:spPr>
+          <a:xfrm>
+            <a:off x="548640" y="6373368"/>
+            <a:ext cx="5394960" cy="292608"/>
+          </a:xfrm>
+          <a:prstGeom prst="rect">
+            <a:avLst/>
+          </a:prstGeom>
+          <a:noFill/>
+          <a:ln/>
+        </p:spPr>
+        <p:txBody>
+          <a:bodyPr wrap="square" lIns="0" tIns="0" rIns="0" bIns="0" rtlCol="0" anchor="t"/>
+          <a:lstStyle/>
+          <a:p>
+            <a:pPr algn="ctr" indent="0" marL="0">
+              <a:buNone/>
+            </a:pPr>
+            <a:r>
+              <a:rPr lang="en-US" sz="1300" b="1" dirty="0">
+                <a:solidFill>
+                  <a:srgbClr val="0F5C54"/>
+                </a:solidFill>
+                <a:latin typeface="Calibri" pitchFamily="34" charset="0"/>
+                <a:ea typeface="Calibri" pitchFamily="34" charset="-122"/>
+                <a:cs typeface="Calibri" pitchFamily="34" charset="-120"/>
+              </a:rPr>
+              <a:t>Forecasts &amp; ML model</a:t>
+            </a:r>
+            <a:endParaRPr lang="en-US" sz="1300" dirty="0"/>
+          </a:p>
+        </p:txBody>
+      </p:sp>
+      <p:sp>
+        <p:nvSpPr>
+          <p:cNvPr id="13" name="Shape 8"/>
+          <p:cNvSpPr/>
+          <p:nvPr/>
+        </p:nvSpPr>
+        <p:spPr>
+          <a:xfrm>
+            <a:off x="7779778" y="4069080"/>
+            <a:ext cx="2271243" cy="2286000"/>
+          </a:xfrm>
+          <a:prstGeom prst="roundRect">
+            <a:avLst>
+              <a:gd name="adj" fmla="val 3221"/>
+            </a:avLst>
+          </a:prstGeom>
+          <a:solidFill>
+            <a:srgbClr val="FFFFFF"/>
+          </a:solidFill>
+          <a:ln w="9525">
+            <a:solidFill>
+              <a:srgbClr val="E2E8F0"/>
+            </a:solidFill>
+            <a:prstDash val="solid"/>
+          </a:ln>
+          <a:effectLst>
+            <a:outerShdw sx="100000" sy="100000" kx="0" ky="0" algn="bl" rotWithShape="0" blurRad="101600" dist="25400" dir="5400000">
+              <a:srgbClr val="000000">
+                <a:alpha val="14000"/>
+              </a:srgbClr>
+            </a:outerShdw>
+          </a:effectLst>
+        </p:spPr>
+      </p:sp>
+      <p:pic>
+        <p:nvPicPr>
+          <p:cNvPr id="14" name="Image 3" descr="C:\Users\HP\AppData\Local\Temp\claude\D--codin-idea-lab\87151ddf-948a-4e83-8159-c0449757400e\scratchpad\report\shots\portal.png">    </p:cNvPr>
+          <p:cNvPicPr>
+            <a:picLocks noChangeAspect="1"/>
+          </p:cNvPicPr>
+          <p:nvPr/>
+        </p:nvPicPr>
+        <p:blipFill>
+          <a:blip r:embed="rId4"/>
+          <a:stretch>
+            <a:fillRect/>
+          </a:stretch>
+        </p:blipFill>
+        <p:spPr>
+          <a:xfrm>
+            <a:off x="7852930" y="4142232"/>
+            <a:ext cx="2124939" cy="2139696"/>
+          </a:xfrm>
+          <a:prstGeom prst="rect">
+            <a:avLst/>
+          </a:prstGeom>
+        </p:spPr>
+      </p:pic>
+      <p:sp>
+        <p:nvSpPr>
+          <p:cNvPr id="15" name="Text 9"/>
+          <p:cNvSpPr txBox="1"/>
+          <p:nvPr/>
+        </p:nvSpPr>
+        <p:spPr>
+          <a:xfrm>
+            <a:off x="6217920" y="6373368"/>
+            <a:ext cx="5394960" cy="292608"/>
+          </a:xfrm>
+          <a:prstGeom prst="rect">
+            <a:avLst/>
+          </a:prstGeom>
+          <a:noFill/>
+          <a:ln/>
+        </p:spPr>
+        <p:txBody>
+          <a:bodyPr wrap="square" lIns="0" tIns="0" rIns="0" bIns="0" rtlCol="0" anchor="t"/>
+          <a:lstStyle/>
+          <a:p>
+            <a:pPr algn="ctr" indent="0" marL="0">
+              <a:buNone/>
+            </a:pPr>
+            <a:r>
+              <a:rPr lang="en-US" sz="1300" b="1" dirty="0">
+                <a:solidFill>
+                  <a:srgbClr val="0F5C54"/>
+                </a:solidFill>
+                <a:latin typeface="Calibri" pitchFamily="34" charset="0"/>
+                <a:ea typeface="Calibri" pitchFamily="34" charset="-122"/>
+                <a:cs typeface="Calibri" pitchFamily="34" charset="-120"/>
+              </a:rPr>
+              <a:t>Patient portal: bill &amp; access log</a:t>
+            </a:r>
+            <a:endParaRPr lang="en-US" sz="1300" dirty="0"/>
+          </a:p>
+        </p:txBody>
+      </p:sp>
+      <p:sp>
+        <p:nvSpPr>
+          <p:cNvPr id="16" name="Text 10"/>
+          <p:cNvSpPr txBox="1"/>
+          <p:nvPr/>
+        </p:nvSpPr>
+        <p:spPr>
+          <a:xfrm>
+            <a:off x="11384280" y="6400800"/>
+            <a:ext cx="365760" cy="274320"/>
+          </a:xfrm>
+          <a:prstGeom prst="rect">
+            <a:avLst/>
+          </a:prstGeom>
+          <a:noFill/>
+          <a:ln/>
+        </p:spPr>
+        <p:txBody>
+          <a:bodyPr wrap="square" lIns="0" tIns="0" rIns="0" bIns="0" rtlCol="0" anchor="t"/>
+          <a:lstStyle/>
+          <a:p>
+            <a:pPr algn="r" indent="0" marL="0">
+              <a:buNone/>
+            </a:pPr>
+            <a:r>
+              <a:rPr lang="en-US" sz="1000" dirty="0">
+                <a:solidFill>
+                  <a:srgbClr val="64748B"/>
+                </a:solidFill>
+                <a:latin typeface="Calibri" pitchFamily="34" charset="0"/>
+                <a:ea typeface="Calibri" pitchFamily="34" charset="-122"/>
+                <a:cs typeface="Calibri" pitchFamily="34" charset="-120"/>
+              </a:rPr>
+              <a:t>18</a:t>
+            </a:r>
+            <a:endParaRPr lang="en-US" sz="1000" dirty="0"/>
+          </a:p>
+        </p:txBody>
+      </p:sp>
+    </p:spTree>
+  </p:cSld>
+  <p:clrMapOvr>
+    <a:masterClrMapping/>
+  </p:clrMapOvr>
+</p:sld>
+</file>
+
+<file path=ppt/slides/slide19.xml><?xml version="1.0" encoding="utf-8"?>
+<p:sld xmlns:a="http://schemas.openxmlformats.org/drawingml/2006/main" xmlns:r="http://schemas.openxmlformats.org/officeDocument/2006/relationships" xmlns:p="http://schemas.openxmlformats.org/presentationml/2006/main">
+  <p:cSld name="Slide 19">
+    <p:bg>
+      <p:bgPr>
+        <a:solidFill>
+          <a:srgbClr val="F6FAF9"/>
+        </a:solidFill>
+      </p:bgPr>
+    </p:bg>
+    <p:spTree>
+      <p:nvGrpSpPr>
+        <p:cNvPr id="1" name=""/>
+        <p:cNvGrpSpPr/>
+        <p:nvPr/>
+      </p:nvGrpSpPr>
+      <p:grpSpPr>
+        <a:xfrm>
+          <a:off x="0" y="0"/>
+          <a:ext cx="0" cy="0"/>
+          <a:chOff x="0" y="0"/>
+          <a:chExt cx="0" cy="0"/>
+        </a:xfrm>
+      </p:grpSpPr>
+      <p:sp>
+        <p:nvSpPr>
+          <p:cNvPr id="2" name="Text 0"/>
+          <p:cNvSpPr txBox="1"/>
+          <p:nvPr/>
+        </p:nvSpPr>
+        <p:spPr>
+          <a:xfrm>
+            <a:off x="548640" y="365760"/>
+            <a:ext cx="11064240" cy="640080"/>
+          </a:xfrm>
+          <a:prstGeom prst="rect">
+            <a:avLst/>
+          </a:prstGeom>
+          <a:noFill/>
+          <a:ln/>
+        </p:spPr>
+        <p:txBody>
+          <a:bodyPr wrap="square" lIns="0" tIns="0" rIns="0" bIns="0" rtlCol="0" anchor="ctr"/>
+          <a:lstStyle/>
+          <a:p>
+            <a:pPr indent="0" marL="0">
+              <a:buNone/>
+            </a:pPr>
+            <a:r>
+              <a:rPr lang="en-US" sz="3200" b="1" dirty="0">
+                <a:solidFill>
+                  <a:srgbClr val="0F5C54"/>
                 </a:solidFill>
                 <a:latin typeface="Cambria" pitchFamily="34" charset="0"/>
                 <a:ea typeface="Cambria" pitchFamily="34" charset="-122"/>
                 <a:cs typeface="Cambria" pitchFamily="34" charset="-120"/>
               </a:rPr>
-              <a:t>Thank you</a:t>
+              <a:t>Technology and quality</a:t>
+            </a:r>
+            <a:endParaRPr lang="en-US" sz="3200" dirty="0"/>
+          </a:p>
+        </p:txBody>
+      </p:sp>
+      <p:sp>
+        <p:nvSpPr>
+          <p:cNvPr id="3" name="Text 1"/>
+          <p:cNvSpPr txBox="1"/>
+          <p:nvPr/>
+        </p:nvSpPr>
+        <p:spPr>
+          <a:xfrm>
+            <a:off x="548640" y="1005840"/>
+            <a:ext cx="11064240" cy="365760"/>
+          </a:xfrm>
+          <a:prstGeom prst="rect">
+            <a:avLst/>
+          </a:prstGeom>
+          <a:noFill/>
+          <a:ln/>
+        </p:spPr>
+        <p:txBody>
+          <a:bodyPr wrap="square" lIns="0" tIns="0" rIns="0" bIns="0" rtlCol="0" anchor="t"/>
+          <a:lstStyle/>
+          <a:p>
+            <a:pPr indent="0" marL="0">
+              <a:buNone/>
+            </a:pPr>
+            <a:r>
+              <a:rPr lang="en-US" sz="1500" i="1" dirty="0">
+                <a:solidFill>
+                  <a:srgbClr val="64748B"/>
+                </a:solidFill>
+                <a:latin typeface="Calibri" pitchFamily="34" charset="0"/>
+                <a:ea typeface="Calibri" pitchFamily="34" charset="-122"/>
+                <a:cs typeface="Calibri" pitchFamily="34" charset="-120"/>
+              </a:rPr>
+              <a:t>Open-source stack, reproducible deployment, automated tests</a:t>
+            </a:r>
+            <a:endParaRPr lang="en-US" sz="1500" dirty="0"/>
+          </a:p>
+        </p:txBody>
+      </p:sp>
+      <p:sp>
+        <p:nvSpPr>
+          <p:cNvPr id="4" name="Shape 2"/>
+          <p:cNvSpPr/>
+          <p:nvPr/>
+        </p:nvSpPr>
+        <p:spPr>
+          <a:xfrm>
+            <a:off x="548640" y="1554480"/>
+            <a:ext cx="6035040" cy="676656"/>
+          </a:xfrm>
+          <a:prstGeom prst="roundRect">
+            <a:avLst>
+              <a:gd name="adj" fmla="val 10811"/>
+            </a:avLst>
+          </a:prstGeom>
+          <a:solidFill>
+            <a:srgbClr val="FFFFFF"/>
+          </a:solidFill>
+          <a:ln w="9525">
+            <a:solidFill>
+              <a:srgbClr val="E2E8F0"/>
+            </a:solidFill>
+            <a:prstDash val="solid"/>
+          </a:ln>
+          <a:effectLst>
+            <a:outerShdw sx="100000" sy="100000" kx="0" ky="0" algn="bl" rotWithShape="0" blurRad="101600" dist="25400" dir="5400000">
+              <a:srgbClr val="000000">
+                <a:alpha val="14000"/>
+              </a:srgbClr>
+            </a:outerShdw>
+          </a:effectLst>
+        </p:spPr>
+      </p:sp>
+      <p:sp>
+        <p:nvSpPr>
+          <p:cNvPr id="5" name="Text 3"/>
+          <p:cNvSpPr txBox="1"/>
+          <p:nvPr/>
+        </p:nvSpPr>
+        <p:spPr>
+          <a:xfrm>
+            <a:off x="777240" y="1737360"/>
+            <a:ext cx="1737360" cy="320040"/>
+          </a:xfrm>
+          <a:prstGeom prst="rect">
+            <a:avLst/>
+          </a:prstGeom>
+          <a:noFill/>
+          <a:ln/>
+        </p:spPr>
+        <p:txBody>
+          <a:bodyPr wrap="square" lIns="0" tIns="0" rIns="0" bIns="0" rtlCol="0" anchor="t"/>
+          <a:lstStyle/>
+          <a:p>
+            <a:pPr indent="0" marL="0">
+              <a:buNone/>
+            </a:pPr>
+            <a:r>
+              <a:rPr lang="en-US" sz="1400" b="1" dirty="0">
+                <a:solidFill>
+                  <a:srgbClr val="0F5C54"/>
+                </a:solidFill>
+                <a:latin typeface="Calibri" pitchFamily="34" charset="0"/>
+                <a:ea typeface="Calibri" pitchFamily="34" charset="-122"/>
+                <a:cs typeface="Calibri" pitchFamily="34" charset="-120"/>
+              </a:rPr>
+              <a:t>Frontend</a:t>
+            </a:r>
+            <a:endParaRPr lang="en-US" sz="1400" dirty="0"/>
+          </a:p>
+        </p:txBody>
+      </p:sp>
+      <p:sp>
+        <p:nvSpPr>
+          <p:cNvPr id="6" name="Text 4"/>
+          <p:cNvSpPr txBox="1"/>
+          <p:nvPr/>
+        </p:nvSpPr>
+        <p:spPr>
+          <a:xfrm>
+            <a:off x="2560320" y="1737360"/>
+            <a:ext cx="3931920" cy="320040"/>
+          </a:xfrm>
+          <a:prstGeom prst="rect">
+            <a:avLst/>
+          </a:prstGeom>
+          <a:noFill/>
+          <a:ln/>
+        </p:spPr>
+        <p:txBody>
+          <a:bodyPr wrap="square" lIns="0" tIns="0" rIns="0" bIns="0" rtlCol="0" anchor="t"/>
+          <a:lstStyle/>
+          <a:p>
+            <a:pPr indent="0" marL="0">
+              <a:buNone/>
+            </a:pPr>
+            <a:r>
+              <a:rPr lang="en-US" sz="1300" dirty="0">
+                <a:solidFill>
+                  <a:srgbClr val="0F172A"/>
+                </a:solidFill>
+                <a:latin typeface="Calibri" pitchFamily="34" charset="0"/>
+                <a:ea typeface="Calibri" pitchFamily="34" charset="-122"/>
+                <a:cs typeface="Calibri" pitchFamily="34" charset="-120"/>
+              </a:rPr>
+              <a:t>React 19 · TypeScript · Vite · Tailwind · Recharts · PWA</a:t>
+            </a:r>
+            <a:endParaRPr lang="en-US" sz="1300" dirty="0"/>
+          </a:p>
+        </p:txBody>
+      </p:sp>
+      <p:sp>
+        <p:nvSpPr>
+          <p:cNvPr id="7" name="Shape 5"/>
+          <p:cNvSpPr/>
+          <p:nvPr/>
+        </p:nvSpPr>
+        <p:spPr>
+          <a:xfrm>
+            <a:off x="548640" y="2359152"/>
+            <a:ext cx="6035040" cy="676656"/>
+          </a:xfrm>
+          <a:prstGeom prst="roundRect">
+            <a:avLst>
+              <a:gd name="adj" fmla="val 10811"/>
+            </a:avLst>
+          </a:prstGeom>
+          <a:solidFill>
+            <a:srgbClr val="FFFFFF"/>
+          </a:solidFill>
+          <a:ln w="9525">
+            <a:solidFill>
+              <a:srgbClr val="E2E8F0"/>
+            </a:solidFill>
+            <a:prstDash val="solid"/>
+          </a:ln>
+          <a:effectLst>
+            <a:outerShdw sx="100000" sy="100000" kx="0" ky="0" algn="bl" rotWithShape="0" blurRad="101600" dist="25400" dir="5400000">
+              <a:srgbClr val="000000">
+                <a:alpha val="14000"/>
+              </a:srgbClr>
+            </a:outerShdw>
+          </a:effectLst>
+        </p:spPr>
+      </p:sp>
+      <p:sp>
+        <p:nvSpPr>
+          <p:cNvPr id="8" name="Text 6"/>
+          <p:cNvSpPr txBox="1"/>
+          <p:nvPr/>
+        </p:nvSpPr>
+        <p:spPr>
+          <a:xfrm>
+            <a:off x="777240" y="2542032"/>
+            <a:ext cx="1737360" cy="320040"/>
+          </a:xfrm>
+          <a:prstGeom prst="rect">
+            <a:avLst/>
+          </a:prstGeom>
+          <a:noFill/>
+          <a:ln/>
+        </p:spPr>
+        <p:txBody>
+          <a:bodyPr wrap="square" lIns="0" tIns="0" rIns="0" bIns="0" rtlCol="0" anchor="t"/>
+          <a:lstStyle/>
+          <a:p>
+            <a:pPr indent="0" marL="0">
+              <a:buNone/>
+            </a:pPr>
+            <a:r>
+              <a:rPr lang="en-US" sz="1400" b="1" dirty="0">
+                <a:solidFill>
+                  <a:srgbClr val="0F5C54"/>
+                </a:solidFill>
+                <a:latin typeface="Calibri" pitchFamily="34" charset="0"/>
+                <a:ea typeface="Calibri" pitchFamily="34" charset="-122"/>
+                <a:cs typeface="Calibri" pitchFamily="34" charset="-120"/>
+              </a:rPr>
+              <a:t>Backend</a:t>
+            </a:r>
+            <a:endParaRPr lang="en-US" sz="1400" dirty="0"/>
+          </a:p>
+        </p:txBody>
+      </p:sp>
+      <p:sp>
+        <p:nvSpPr>
+          <p:cNvPr id="9" name="Text 7"/>
+          <p:cNvSpPr txBox="1"/>
+          <p:nvPr/>
+        </p:nvSpPr>
+        <p:spPr>
+          <a:xfrm>
+            <a:off x="2560320" y="2542032"/>
+            <a:ext cx="3931920" cy="320040"/>
+          </a:xfrm>
+          <a:prstGeom prst="rect">
+            <a:avLst/>
+          </a:prstGeom>
+          <a:noFill/>
+          <a:ln/>
+        </p:spPr>
+        <p:txBody>
+          <a:bodyPr wrap="square" lIns="0" tIns="0" rIns="0" bIns="0" rtlCol="0" anchor="t"/>
+          <a:lstStyle/>
+          <a:p>
+            <a:pPr indent="0" marL="0">
+              <a:buNone/>
+            </a:pPr>
+            <a:r>
+              <a:rPr lang="en-US" sz="1300" dirty="0">
+                <a:solidFill>
+                  <a:srgbClr val="0F172A"/>
+                </a:solidFill>
+                <a:latin typeface="Calibri" pitchFamily="34" charset="0"/>
+                <a:ea typeface="Calibri" pitchFamily="34" charset="-122"/>
+                <a:cs typeface="Calibri" pitchFamily="34" charset="-120"/>
+              </a:rPr>
+              <a:t>Python 3.11 · FastAPI · Pydantic · WebSockets</a:t>
+            </a:r>
+            <a:endParaRPr lang="en-US" sz="1300" dirty="0"/>
+          </a:p>
+        </p:txBody>
+      </p:sp>
+      <p:sp>
+        <p:nvSpPr>
+          <p:cNvPr id="10" name="Shape 8"/>
+          <p:cNvSpPr/>
+          <p:nvPr/>
+        </p:nvSpPr>
+        <p:spPr>
+          <a:xfrm>
+            <a:off x="548640" y="3163824"/>
+            <a:ext cx="6035040" cy="676656"/>
+          </a:xfrm>
+          <a:prstGeom prst="roundRect">
+            <a:avLst>
+              <a:gd name="adj" fmla="val 10811"/>
+            </a:avLst>
+          </a:prstGeom>
+          <a:solidFill>
+            <a:srgbClr val="FFFFFF"/>
+          </a:solidFill>
+          <a:ln w="9525">
+            <a:solidFill>
+              <a:srgbClr val="E2E8F0"/>
+            </a:solidFill>
+            <a:prstDash val="solid"/>
+          </a:ln>
+          <a:effectLst>
+            <a:outerShdw sx="100000" sy="100000" kx="0" ky="0" algn="bl" rotWithShape="0" blurRad="101600" dist="25400" dir="5400000">
+              <a:srgbClr val="000000">
+                <a:alpha val="14000"/>
+              </a:srgbClr>
+            </a:outerShdw>
+          </a:effectLst>
+        </p:spPr>
+      </p:sp>
+      <p:sp>
+        <p:nvSpPr>
+          <p:cNvPr id="11" name="Text 9"/>
+          <p:cNvSpPr txBox="1"/>
+          <p:nvPr/>
+        </p:nvSpPr>
+        <p:spPr>
+          <a:xfrm>
+            <a:off x="777240" y="3346704"/>
+            <a:ext cx="1737360" cy="320040"/>
+          </a:xfrm>
+          <a:prstGeom prst="rect">
+            <a:avLst/>
+          </a:prstGeom>
+          <a:noFill/>
+          <a:ln/>
+        </p:spPr>
+        <p:txBody>
+          <a:bodyPr wrap="square" lIns="0" tIns="0" rIns="0" bIns="0" rtlCol="0" anchor="t"/>
+          <a:lstStyle/>
+          <a:p>
+            <a:pPr indent="0" marL="0">
+              <a:buNone/>
+            </a:pPr>
+            <a:r>
+              <a:rPr lang="en-US" sz="1400" b="1" dirty="0">
+                <a:solidFill>
+                  <a:srgbClr val="0F5C54"/>
+                </a:solidFill>
+                <a:latin typeface="Calibri" pitchFamily="34" charset="0"/>
+                <a:ea typeface="Calibri" pitchFamily="34" charset="-122"/>
+                <a:cs typeface="Calibri" pitchFamily="34" charset="-120"/>
+              </a:rPr>
+              <a:t>AI / optimisation</a:t>
+            </a:r>
+            <a:endParaRPr lang="en-US" sz="1400" dirty="0"/>
+          </a:p>
+        </p:txBody>
+      </p:sp>
+      <p:sp>
+        <p:nvSpPr>
+          <p:cNvPr id="12" name="Text 10"/>
+          <p:cNvSpPr txBox="1"/>
+          <p:nvPr/>
+        </p:nvSpPr>
+        <p:spPr>
+          <a:xfrm>
+            <a:off x="2560320" y="3346704"/>
+            <a:ext cx="3931920" cy="320040"/>
+          </a:xfrm>
+          <a:prstGeom prst="rect">
+            <a:avLst/>
+          </a:prstGeom>
+          <a:noFill/>
+          <a:ln/>
+        </p:spPr>
+        <p:txBody>
+          <a:bodyPr wrap="square" lIns="0" tIns="0" rIns="0" bIns="0" rtlCol="0" anchor="t"/>
+          <a:lstStyle/>
+          <a:p>
+            <a:pPr indent="0" marL="0">
+              <a:buNone/>
+            </a:pPr>
+            <a:r>
+              <a:rPr lang="en-US" sz="1300" dirty="0">
+                <a:solidFill>
+                  <a:srgbClr val="0F172A"/>
+                </a:solidFill>
+                <a:latin typeface="Calibri" pitchFamily="34" charset="0"/>
+                <a:ea typeface="Calibri" pitchFamily="34" charset="-122"/>
+                <a:cs typeface="Calibri" pitchFamily="34" charset="-120"/>
+              </a:rPr>
+              <a:t>scikit-learn · OR-Tools CP-SAT · NumPy · optional Claude</a:t>
+            </a:r>
+            <a:endParaRPr lang="en-US" sz="1300" dirty="0"/>
+          </a:p>
+        </p:txBody>
+      </p:sp>
+      <p:sp>
+        <p:nvSpPr>
+          <p:cNvPr id="13" name="Shape 11"/>
+          <p:cNvSpPr/>
+          <p:nvPr/>
+        </p:nvSpPr>
+        <p:spPr>
+          <a:xfrm>
+            <a:off x="548640" y="3968496"/>
+            <a:ext cx="6035040" cy="676656"/>
+          </a:xfrm>
+          <a:prstGeom prst="roundRect">
+            <a:avLst>
+              <a:gd name="adj" fmla="val 10811"/>
+            </a:avLst>
+          </a:prstGeom>
+          <a:solidFill>
+            <a:srgbClr val="FFFFFF"/>
+          </a:solidFill>
+          <a:ln w="9525">
+            <a:solidFill>
+              <a:srgbClr val="E2E8F0"/>
+            </a:solidFill>
+            <a:prstDash val="solid"/>
+          </a:ln>
+          <a:effectLst>
+            <a:outerShdw sx="100000" sy="100000" kx="0" ky="0" algn="bl" rotWithShape="0" blurRad="101600" dist="25400" dir="5400000">
+              <a:srgbClr val="000000">
+                <a:alpha val="14000"/>
+              </a:srgbClr>
+            </a:outerShdw>
+          </a:effectLst>
+        </p:spPr>
+      </p:sp>
+      <p:sp>
+        <p:nvSpPr>
+          <p:cNvPr id="14" name="Text 12"/>
+          <p:cNvSpPr txBox="1"/>
+          <p:nvPr/>
+        </p:nvSpPr>
+        <p:spPr>
+          <a:xfrm>
+            <a:off x="777240" y="4151376"/>
+            <a:ext cx="1737360" cy="320040"/>
+          </a:xfrm>
+          <a:prstGeom prst="rect">
+            <a:avLst/>
+          </a:prstGeom>
+          <a:noFill/>
+          <a:ln/>
+        </p:spPr>
+        <p:txBody>
+          <a:bodyPr wrap="square" lIns="0" tIns="0" rIns="0" bIns="0" rtlCol="0" anchor="t"/>
+          <a:lstStyle/>
+          <a:p>
+            <a:pPr indent="0" marL="0">
+              <a:buNone/>
+            </a:pPr>
+            <a:r>
+              <a:rPr lang="en-US" sz="1400" b="1" dirty="0">
+                <a:solidFill>
+                  <a:srgbClr val="0F5C54"/>
+                </a:solidFill>
+                <a:latin typeface="Calibri" pitchFamily="34" charset="0"/>
+                <a:ea typeface="Calibri" pitchFamily="34" charset="-122"/>
+                <a:cs typeface="Calibri" pitchFamily="34" charset="-120"/>
+              </a:rPr>
+              <a:t>Data</a:t>
+            </a:r>
+            <a:endParaRPr lang="en-US" sz="1400" dirty="0"/>
+          </a:p>
+        </p:txBody>
+      </p:sp>
+      <p:sp>
+        <p:nvSpPr>
+          <p:cNvPr id="15" name="Text 13"/>
+          <p:cNvSpPr txBox="1"/>
+          <p:nvPr/>
+        </p:nvSpPr>
+        <p:spPr>
+          <a:xfrm>
+            <a:off x="2560320" y="4151376"/>
+            <a:ext cx="3931920" cy="320040"/>
+          </a:xfrm>
+          <a:prstGeom prst="rect">
+            <a:avLst/>
+          </a:prstGeom>
+          <a:noFill/>
+          <a:ln/>
+        </p:spPr>
+        <p:txBody>
+          <a:bodyPr wrap="square" lIns="0" tIns="0" rIns="0" bIns="0" rtlCol="0" anchor="t"/>
+          <a:lstStyle/>
+          <a:p>
+            <a:pPr indent="0" marL="0">
+              <a:buNone/>
+            </a:pPr>
+            <a:r>
+              <a:rPr lang="en-US" sz="1300" dirty="0">
+                <a:solidFill>
+                  <a:srgbClr val="0F172A"/>
+                </a:solidFill>
+                <a:latin typeface="Calibri" pitchFamily="34" charset="0"/>
+                <a:ea typeface="Calibri" pitchFamily="34" charset="-122"/>
+                <a:cs typeface="Calibri" pitchFamily="34" charset="-120"/>
+              </a:rPr>
+              <a:t>SQLAlchemy · SQLite · PostgreSQL</a:t>
+            </a:r>
+            <a:endParaRPr lang="en-US" sz="1300" dirty="0"/>
+          </a:p>
+        </p:txBody>
+      </p:sp>
+      <p:sp>
+        <p:nvSpPr>
+          <p:cNvPr id="16" name="Shape 14"/>
+          <p:cNvSpPr/>
+          <p:nvPr/>
+        </p:nvSpPr>
+        <p:spPr>
+          <a:xfrm>
+            <a:off x="548640" y="4773168"/>
+            <a:ext cx="6035040" cy="676656"/>
+          </a:xfrm>
+          <a:prstGeom prst="roundRect">
+            <a:avLst>
+              <a:gd name="adj" fmla="val 10811"/>
+            </a:avLst>
+          </a:prstGeom>
+          <a:solidFill>
+            <a:srgbClr val="FFFFFF"/>
+          </a:solidFill>
+          <a:ln w="9525">
+            <a:solidFill>
+              <a:srgbClr val="E2E8F0"/>
+            </a:solidFill>
+            <a:prstDash val="solid"/>
+          </a:ln>
+          <a:effectLst>
+            <a:outerShdw sx="100000" sy="100000" kx="0" ky="0" algn="bl" rotWithShape="0" blurRad="101600" dist="25400" dir="5400000">
+              <a:srgbClr val="000000">
+                <a:alpha val="14000"/>
+              </a:srgbClr>
+            </a:outerShdw>
+          </a:effectLst>
+        </p:spPr>
+      </p:sp>
+      <p:sp>
+        <p:nvSpPr>
+          <p:cNvPr id="17" name="Text 15"/>
+          <p:cNvSpPr txBox="1"/>
+          <p:nvPr/>
+        </p:nvSpPr>
+        <p:spPr>
+          <a:xfrm>
+            <a:off x="777240" y="4956048"/>
+            <a:ext cx="1737360" cy="320040"/>
+          </a:xfrm>
+          <a:prstGeom prst="rect">
+            <a:avLst/>
+          </a:prstGeom>
+          <a:noFill/>
+          <a:ln/>
+        </p:spPr>
+        <p:txBody>
+          <a:bodyPr wrap="square" lIns="0" tIns="0" rIns="0" bIns="0" rtlCol="0" anchor="t"/>
+          <a:lstStyle/>
+          <a:p>
+            <a:pPr indent="0" marL="0">
+              <a:buNone/>
+            </a:pPr>
+            <a:r>
+              <a:rPr lang="en-US" sz="1400" b="1" dirty="0">
+                <a:solidFill>
+                  <a:srgbClr val="0F5C54"/>
+                </a:solidFill>
+                <a:latin typeface="Calibri" pitchFamily="34" charset="0"/>
+                <a:ea typeface="Calibri" pitchFamily="34" charset="-122"/>
+                <a:cs typeface="Calibri" pitchFamily="34" charset="-120"/>
+              </a:rPr>
+              <a:t>Security</a:t>
+            </a:r>
+            <a:endParaRPr lang="en-US" sz="1400" dirty="0"/>
+          </a:p>
+        </p:txBody>
+      </p:sp>
+      <p:sp>
+        <p:nvSpPr>
+          <p:cNvPr id="18" name="Text 16"/>
+          <p:cNvSpPr txBox="1"/>
+          <p:nvPr/>
+        </p:nvSpPr>
+        <p:spPr>
+          <a:xfrm>
+            <a:off x="2560320" y="4956048"/>
+            <a:ext cx="3931920" cy="320040"/>
+          </a:xfrm>
+          <a:prstGeom prst="rect">
+            <a:avLst/>
+          </a:prstGeom>
+          <a:noFill/>
+          <a:ln/>
+        </p:spPr>
+        <p:txBody>
+          <a:bodyPr wrap="square" lIns="0" tIns="0" rIns="0" bIns="0" rtlCol="0" anchor="t"/>
+          <a:lstStyle/>
+          <a:p>
+            <a:pPr indent="0" marL="0">
+              <a:buNone/>
+            </a:pPr>
+            <a:r>
+              <a:rPr lang="en-US" sz="1300" dirty="0">
+                <a:solidFill>
+                  <a:srgbClr val="0F172A"/>
+                </a:solidFill>
+                <a:latin typeface="Calibri" pitchFamily="34" charset="0"/>
+                <a:ea typeface="Calibri" pitchFamily="34" charset="-122"/>
+                <a:cs typeface="Calibri" pitchFamily="34" charset="-120"/>
+              </a:rPr>
+              <a:t>JWT · PBKDF2 · RBAC · lock-out · security headers · audit log</a:t>
+            </a:r>
+            <a:endParaRPr lang="en-US" sz="1300" dirty="0"/>
+          </a:p>
+        </p:txBody>
+      </p:sp>
+      <p:sp>
+        <p:nvSpPr>
+          <p:cNvPr id="19" name="Shape 17"/>
+          <p:cNvSpPr/>
+          <p:nvPr/>
+        </p:nvSpPr>
+        <p:spPr>
+          <a:xfrm>
+            <a:off x="548640" y="5577840"/>
+            <a:ext cx="6035040" cy="676656"/>
+          </a:xfrm>
+          <a:prstGeom prst="roundRect">
+            <a:avLst>
+              <a:gd name="adj" fmla="val 10811"/>
+            </a:avLst>
+          </a:prstGeom>
+          <a:solidFill>
+            <a:srgbClr val="FFFFFF"/>
+          </a:solidFill>
+          <a:ln w="9525">
+            <a:solidFill>
+              <a:srgbClr val="E2E8F0"/>
+            </a:solidFill>
+            <a:prstDash val="solid"/>
+          </a:ln>
+          <a:effectLst>
+            <a:outerShdw sx="100000" sy="100000" kx="0" ky="0" algn="bl" rotWithShape="0" blurRad="101600" dist="25400" dir="5400000">
+              <a:srgbClr val="000000">
+                <a:alpha val="14000"/>
+              </a:srgbClr>
+            </a:outerShdw>
+          </a:effectLst>
+        </p:spPr>
+      </p:sp>
+      <p:sp>
+        <p:nvSpPr>
+          <p:cNvPr id="20" name="Text 18"/>
+          <p:cNvSpPr txBox="1"/>
+          <p:nvPr/>
+        </p:nvSpPr>
+        <p:spPr>
+          <a:xfrm>
+            <a:off x="777240" y="5760720"/>
+            <a:ext cx="1737360" cy="320040"/>
+          </a:xfrm>
+          <a:prstGeom prst="rect">
+            <a:avLst/>
+          </a:prstGeom>
+          <a:noFill/>
+          <a:ln/>
+        </p:spPr>
+        <p:txBody>
+          <a:bodyPr wrap="square" lIns="0" tIns="0" rIns="0" bIns="0" rtlCol="0" anchor="t"/>
+          <a:lstStyle/>
+          <a:p>
+            <a:pPr indent="0" marL="0">
+              <a:buNone/>
+            </a:pPr>
+            <a:r>
+              <a:rPr lang="en-US" sz="1400" b="1" dirty="0">
+                <a:solidFill>
+                  <a:srgbClr val="0F5C54"/>
+                </a:solidFill>
+                <a:latin typeface="Calibri" pitchFamily="34" charset="0"/>
+                <a:ea typeface="Calibri" pitchFamily="34" charset="-122"/>
+                <a:cs typeface="Calibri" pitchFamily="34" charset="-120"/>
+              </a:rPr>
+              <a:t>Deployment</a:t>
+            </a:r>
+            <a:endParaRPr lang="en-US" sz="1400" dirty="0"/>
+          </a:p>
+        </p:txBody>
+      </p:sp>
+      <p:sp>
+        <p:nvSpPr>
+          <p:cNvPr id="21" name="Text 19"/>
+          <p:cNvSpPr txBox="1"/>
+          <p:nvPr/>
+        </p:nvSpPr>
+        <p:spPr>
+          <a:xfrm>
+            <a:off x="2560320" y="5760720"/>
+            <a:ext cx="3931920" cy="320040"/>
+          </a:xfrm>
+          <a:prstGeom prst="rect">
+            <a:avLst/>
+          </a:prstGeom>
+          <a:noFill/>
+          <a:ln/>
+        </p:spPr>
+        <p:txBody>
+          <a:bodyPr wrap="square" lIns="0" tIns="0" rIns="0" bIns="0" rtlCol="0" anchor="t"/>
+          <a:lstStyle/>
+          <a:p>
+            <a:pPr indent="0" marL="0">
+              <a:buNone/>
+            </a:pPr>
+            <a:r>
+              <a:rPr lang="en-US" sz="1300" dirty="0">
+                <a:solidFill>
+                  <a:srgbClr val="0F172A"/>
+                </a:solidFill>
+                <a:latin typeface="Calibri" pitchFamily="34" charset="0"/>
+                <a:ea typeface="Calibri" pitchFamily="34" charset="-122"/>
+                <a:cs typeface="Calibri" pitchFamily="34" charset="-120"/>
+              </a:rPr>
+              <a:t>Docker Compose · Nginx · GitHub Actions CI · one-click start.bat</a:t>
+            </a:r>
+            <a:endParaRPr lang="en-US" sz="1300" dirty="0"/>
+          </a:p>
+        </p:txBody>
+      </p:sp>
+      <p:sp>
+        <p:nvSpPr>
+          <p:cNvPr id="22" name="Shape 20"/>
+          <p:cNvSpPr/>
+          <p:nvPr/>
+        </p:nvSpPr>
+        <p:spPr>
+          <a:xfrm>
+            <a:off x="6949440" y="1554480"/>
+            <a:ext cx="4754880" cy="4754880"/>
+          </a:xfrm>
+          <a:prstGeom prst="roundRect">
+            <a:avLst>
+              <a:gd name="adj" fmla="val 1538"/>
+            </a:avLst>
+          </a:prstGeom>
+          <a:solidFill>
+            <a:srgbClr val="FFFFFF"/>
+          </a:solidFill>
+          <a:ln w="9525">
+            <a:solidFill>
+              <a:srgbClr val="E2E8F0"/>
+            </a:solidFill>
+            <a:prstDash val="solid"/>
+          </a:ln>
+          <a:effectLst>
+            <a:outerShdw sx="100000" sy="100000" kx="0" ky="0" algn="bl" rotWithShape="0" blurRad="101600" dist="25400" dir="5400000">
+              <a:srgbClr val="000000">
+                <a:alpha val="14000"/>
+              </a:srgbClr>
+            </a:outerShdw>
+          </a:effectLst>
+        </p:spPr>
+      </p:sp>
+      <p:sp>
+        <p:nvSpPr>
+          <p:cNvPr id="23" name="Text 21"/>
+          <p:cNvSpPr txBox="1"/>
+          <p:nvPr/>
+        </p:nvSpPr>
+        <p:spPr>
+          <a:xfrm>
+            <a:off x="7223760" y="1783080"/>
+            <a:ext cx="4206240" cy="914400"/>
+          </a:xfrm>
+          <a:prstGeom prst="rect">
+            <a:avLst/>
+          </a:prstGeom>
+          <a:noFill/>
+          <a:ln/>
+        </p:spPr>
+        <p:txBody>
+          <a:bodyPr wrap="square" lIns="0" tIns="0" rIns="0" bIns="0" rtlCol="0" anchor="t"/>
+          <a:lstStyle/>
+          <a:p>
+            <a:pPr indent="0" marL="0">
+              <a:buNone/>
+            </a:pPr>
+            <a:r>
+              <a:rPr lang="en-US" sz="4800" b="1" dirty="0">
+                <a:solidFill>
+                  <a:srgbClr val="0F5C54"/>
+                </a:solidFill>
+                <a:latin typeface="Cambria" pitchFamily="34" charset="0"/>
+                <a:ea typeface="Cambria" pitchFamily="34" charset="-122"/>
+                <a:cs typeface="Cambria" pitchFamily="34" charset="-120"/>
+              </a:rPr>
+              <a:t>55 / 55</a:t>
             </a:r>
             <a:endParaRPr lang="en-US" sz="4800" dirty="0"/>
           </a:p>
@@ -6943,79 +10199,185 @@
       </p:sp>
       <p:sp>
         <p:nvSpPr>
-          <p:cNvPr id="4" name="Text 1"/>
-          <p:cNvSpPr txBox="1"/>
-          <p:nvPr/>
-        </p:nvSpPr>
-        <p:spPr>
-          <a:xfrm>
-            <a:off x="914400" y="3566160"/>
-            <a:ext cx="10360152" cy="457200"/>
-          </a:xfrm>
-          <a:prstGeom prst="rect">
-            <a:avLst/>
-          </a:prstGeom>
-          <a:noFill/>
-          <a:ln/>
-        </p:spPr>
-        <p:txBody>
-          <a:bodyPr wrap="square" lIns="0" tIns="0" rIns="0" bIns="0" rtlCol="0" anchor="t"/>
-          <a:lstStyle/>
-          <a:p>
-            <a:pPr algn="ctr" indent="0" marL="0">
-              <a:buNone/>
-            </a:pPr>
-            <a:r>
-              <a:rPr lang="en-US" sz="2000" i="1" dirty="0">
-                <a:solidFill>
-                  <a:srgbClr val="14B8A6"/>
-                </a:solidFill>
-                <a:latin typeface="Calibri" pitchFamily="34" charset="0"/>
-                <a:ea typeface="Calibri" pitchFamily="34" charset="-122"/>
-                <a:cs typeface="Calibri" pitchFamily="34" charset="-120"/>
-              </a:rPr>
-              <a:t>Questions &amp; live demo</a:t>
-            </a:r>
-            <a:endParaRPr lang="en-US" sz="2000" dirty="0"/>
-          </a:p>
-        </p:txBody>
-      </p:sp>
-      <p:sp>
-        <p:nvSpPr>
-          <p:cNvPr id="5" name="Text 2"/>
-          <p:cNvSpPr txBox="1"/>
-          <p:nvPr/>
-        </p:nvSpPr>
-        <p:spPr>
-          <a:xfrm>
-            <a:off x="914400" y="4754880"/>
-            <a:ext cx="10360152" cy="365760"/>
-          </a:xfrm>
-          <a:prstGeom prst="rect">
-            <a:avLst/>
-          </a:prstGeom>
-          <a:noFill/>
-          <a:ln/>
-        </p:spPr>
-        <p:txBody>
-          <a:bodyPr wrap="square" lIns="0" tIns="0" rIns="0" bIns="0" rtlCol="0" anchor="t"/>
-          <a:lstStyle/>
-          <a:p>
-            <a:pPr algn="ctr" indent="0" marL="0">
-              <a:buNone/>
-            </a:pPr>
-            <a:r>
-              <a:rPr lang="en-US" sz="1400" dirty="0">
-                <a:solidFill>
-                  <a:srgbClr val="C9D6D4"/>
-                </a:solidFill>
-                <a:latin typeface="Calibri" pitchFamily="34" charset="0"/>
-                <a:ea typeface="Calibri" pitchFamily="34" charset="-122"/>
-                <a:cs typeface="Calibri" pitchFamily="34" charset="-120"/>
-              </a:rPr>
-              <a:t>Demo login: admin / admin123  ·  doctor / doctor123  ·  nurse / nurse123  ·  patient / patient123</a:t>
-            </a:r>
-            <a:endParaRPr lang="en-US" sz="1400" dirty="0"/>
+          <p:cNvPr id="24" name="Text 22"/>
+          <p:cNvSpPr txBox="1"/>
+          <p:nvPr/>
+        </p:nvSpPr>
+        <p:spPr>
+          <a:xfrm>
+            <a:off x="7223760" y="2697480"/>
+            <a:ext cx="4206240" cy="365760"/>
+          </a:xfrm>
+          <a:prstGeom prst="rect">
+            <a:avLst/>
+          </a:prstGeom>
+          <a:noFill/>
+          <a:ln/>
+        </p:spPr>
+        <p:txBody>
+          <a:bodyPr wrap="square" lIns="0" tIns="0" rIns="0" bIns="0" rtlCol="0" anchor="t"/>
+          <a:lstStyle/>
+          <a:p>
+            <a:pPr indent="0" marL="0">
+              <a:buNone/>
+            </a:pPr>
+            <a:r>
+              <a:rPr lang="en-US" sz="1500" dirty="0">
+                <a:solidFill>
+                  <a:srgbClr val="64748B"/>
+                </a:solidFill>
+                <a:latin typeface="Calibri" pitchFamily="34" charset="0"/>
+                <a:ea typeface="Calibri" pitchFamily="34" charset="-122"/>
+                <a:cs typeface="Calibri" pitchFamily="34" charset="-120"/>
+              </a:rPr>
+              <a:t>automated tests passing</a:t>
+            </a:r>
+            <a:endParaRPr lang="en-US" sz="1500" dirty="0"/>
+          </a:p>
+        </p:txBody>
+      </p:sp>
+      <p:sp>
+        <p:nvSpPr>
+          <p:cNvPr id="25" name="Text 23"/>
+          <p:cNvSpPr txBox="1"/>
+          <p:nvPr/>
+        </p:nvSpPr>
+        <p:spPr>
+          <a:xfrm>
+            <a:off x="7223760" y="3291840"/>
+            <a:ext cx="4297680" cy="2926080"/>
+          </a:xfrm>
+          <a:prstGeom prst="rect">
+            <a:avLst/>
+          </a:prstGeom>
+          <a:noFill/>
+          <a:ln/>
+        </p:spPr>
+        <p:txBody>
+          <a:bodyPr wrap="square" lIns="0" tIns="0" rIns="0" bIns="0" rtlCol="0" anchor="t"/>
+          <a:lstStyle/>
+          <a:p>
+            <a:pPr marL="228600" indent="-228600">
+              <a:spcAft>
+                <a:spcPts val="600"/>
+              </a:spcAft>
+              <a:buSzPct val="100000"/>
+              <a:buChar char="•"/>
+            </a:pPr>
+            <a:r>
+              <a:rPr lang="en-US" sz="1300" dirty="0">
+                <a:solidFill>
+                  <a:srgbClr val="0F172A"/>
+                </a:solidFill>
+                <a:latin typeface="Calibri" pitchFamily="34" charset="0"/>
+                <a:ea typeface="Calibri" pitchFamily="34" charset="-122"/>
+                <a:cs typeface="Calibri" pitchFamily="34" charset="-120"/>
+              </a:rPr>
+              <a:t>Unit tests: NEWS2, triage, NLP, optimisers, queueing, forecasting, readmission, smart alarms</a:t>
+            </a:r>
+            <a:endParaRPr lang="en-US" sz="1300" dirty="0"/>
+          </a:p>
+          <a:p>
+            <a:pPr marL="228600" indent="-228600">
+              <a:spcAft>
+                <a:spcPts val="600"/>
+              </a:spcAft>
+              <a:buSzPct val="100000"/>
+              <a:buChar char="•"/>
+            </a:pPr>
+            <a:r>
+              <a:rPr lang="en-US" sz="1300" dirty="0">
+                <a:solidFill>
+                  <a:srgbClr val="0F172A"/>
+                </a:solidFill>
+                <a:latin typeface="Calibri" pitchFamily="34" charset="0"/>
+                <a:ea typeface="Calibri" pitchFamily="34" charset="-122"/>
+                <a:cs typeface="Calibri" pitchFamily="34" charset="-120"/>
+              </a:rPr>
+              <a:t>Integration tests: agent workflows, approvals and rollbacks, billing and claims, ambulance pre-arrival, digital twin, copilot, security</a:t>
+            </a:r>
+            <a:endParaRPr lang="en-US" sz="1300" dirty="0"/>
+          </a:p>
+          <a:p>
+            <a:pPr marL="228600" indent="-228600">
+              <a:spcAft>
+                <a:spcPts val="600"/>
+              </a:spcAft>
+              <a:buSzPct val="100000"/>
+              <a:buChar char="•"/>
+            </a:pPr>
+            <a:r>
+              <a:rPr lang="en-US" sz="1300" dirty="0">
+                <a:solidFill>
+                  <a:srgbClr val="0F172A"/>
+                </a:solidFill>
+                <a:latin typeface="Calibri" pitchFamily="34" charset="0"/>
+                <a:ea typeface="Calibri" pitchFamily="34" charset="-122"/>
+                <a:cs typeface="Calibri" pitchFamily="34" charset="-120"/>
+              </a:rPr>
+              <a:t>GitHub Actions CI: tests + TypeScript type-check + production build on every push</a:t>
+            </a:r>
+            <a:endParaRPr lang="en-US" sz="1300" dirty="0"/>
+          </a:p>
+          <a:p>
+            <a:pPr marL="228600" indent="-228600">
+              <a:spcAft>
+                <a:spcPts val="600"/>
+              </a:spcAft>
+              <a:buSzPct val="100000"/>
+              <a:buChar char="•"/>
+            </a:pPr>
+            <a:r>
+              <a:rPr lang="en-US" sz="1300" dirty="0">
+                <a:solidFill>
+                  <a:srgbClr val="0F172A"/>
+                </a:solidFill>
+                <a:latin typeface="Calibri" pitchFamily="34" charset="0"/>
+                <a:ea typeface="Calibri" pitchFamily="34" charset="-122"/>
+                <a:cs typeface="Calibri" pitchFamily="34" charset="-120"/>
+              </a:rPr>
+              <a:t>End-to-end scenarios verified in the browser</a:t>
+            </a:r>
+            <a:endParaRPr lang="en-US" sz="1300" dirty="0"/>
+          </a:p>
+        </p:txBody>
+      </p:sp>
+      <p:sp>
+        <p:nvSpPr>
+          <p:cNvPr id="26" name="Text 24"/>
+          <p:cNvSpPr txBox="1"/>
+          <p:nvPr/>
+        </p:nvSpPr>
+        <p:spPr>
+          <a:xfrm>
+            <a:off x="11384280" y="6400800"/>
+            <a:ext cx="365760" cy="274320"/>
+          </a:xfrm>
+          <a:prstGeom prst="rect">
+            <a:avLst/>
+          </a:prstGeom>
+          <a:noFill/>
+          <a:ln/>
+        </p:spPr>
+        <p:txBody>
+          <a:bodyPr wrap="square" lIns="0" tIns="0" rIns="0" bIns="0" rtlCol="0" anchor="t"/>
+          <a:lstStyle/>
+          <a:p>
+            <a:pPr algn="r" indent="0" marL="0">
+              <a:buNone/>
+            </a:pPr>
+            <a:r>
+              <a:rPr lang="en-US" sz="1000" dirty="0">
+                <a:solidFill>
+                  <a:srgbClr val="64748B"/>
+                </a:solidFill>
+                <a:latin typeface="Calibri" pitchFamily="34" charset="0"/>
+                <a:ea typeface="Calibri" pitchFamily="34" charset="-122"/>
+                <a:cs typeface="Calibri" pitchFamily="34" charset="-120"/>
+              </a:rPr>
+              <a:t>19</a:t>
+            </a:r>
+            <a:endParaRPr lang="en-US" sz="1000" dirty="0"/>
           </a:p>
         </p:txBody>
       </p:sp>
@@ -8584,6 +11946,755 @@
 </p:sld>
 </file>
 
+<file path=ppt/slides/slide20.xml><?xml version="1.0" encoding="utf-8"?>
+<p:sld xmlns:a="http://schemas.openxmlformats.org/drawingml/2006/main" xmlns:r="http://schemas.openxmlformats.org/officeDocument/2006/relationships" xmlns:p="http://schemas.openxmlformats.org/presentationml/2006/main">
+  <p:cSld name="Slide 20">
+    <p:bg>
+      <p:bgPr>
+        <a:solidFill>
+          <a:srgbClr val="FFFFFF"/>
+        </a:solidFill>
+      </p:bgPr>
+    </p:bg>
+    <p:spTree>
+      <p:nvGrpSpPr>
+        <p:cNvPr id="1" name=""/>
+        <p:cNvGrpSpPr/>
+        <p:nvPr/>
+      </p:nvGrpSpPr>
+      <p:grpSpPr>
+        <a:xfrm>
+          <a:off x="0" y="0"/>
+          <a:ext cx="0" cy="0"/>
+          <a:chOff x="0" y="0"/>
+          <a:chExt cx="0" cy="0"/>
+        </a:xfrm>
+      </p:grpSpPr>
+      <p:sp>
+        <p:nvSpPr>
+          <p:cNvPr id="2" name="Text 0"/>
+          <p:cNvSpPr txBox="1"/>
+          <p:nvPr/>
+        </p:nvSpPr>
+        <p:spPr>
+          <a:xfrm>
+            <a:off x="548640" y="365760"/>
+            <a:ext cx="11064240" cy="640080"/>
+          </a:xfrm>
+          <a:prstGeom prst="rect">
+            <a:avLst/>
+          </a:prstGeom>
+          <a:noFill/>
+          <a:ln/>
+        </p:spPr>
+        <p:txBody>
+          <a:bodyPr wrap="square" lIns="0" tIns="0" rIns="0" bIns="0" rtlCol="0" anchor="ctr"/>
+          <a:lstStyle/>
+          <a:p>
+            <a:pPr indent="0" marL="0">
+              <a:buNone/>
+            </a:pPr>
+            <a:r>
+              <a:rPr lang="en-US" sz="3200" b="1" dirty="0">
+                <a:solidFill>
+                  <a:srgbClr val="0F5C54"/>
+                </a:solidFill>
+                <a:latin typeface="Cambria" pitchFamily="34" charset="0"/>
+                <a:ea typeface="Cambria" pitchFamily="34" charset="-122"/>
+                <a:cs typeface="Cambria" pitchFamily="34" charset="-120"/>
+              </a:rPr>
+              <a:t>Conclusion and future scope</a:t>
+            </a:r>
+            <a:endParaRPr lang="en-US" sz="3200" dirty="0"/>
+          </a:p>
+        </p:txBody>
+      </p:sp>
+      <p:sp>
+        <p:nvSpPr>
+          <p:cNvPr id="3" name="Shape 1"/>
+          <p:cNvSpPr/>
+          <p:nvPr/>
+        </p:nvSpPr>
+        <p:spPr>
+          <a:xfrm>
+            <a:off x="548640" y="1280160"/>
+            <a:ext cx="5486400" cy="3749040"/>
+          </a:xfrm>
+          <a:prstGeom prst="roundRect">
+            <a:avLst>
+              <a:gd name="adj" fmla="val 1951"/>
+            </a:avLst>
+          </a:prstGeom>
+          <a:solidFill>
+            <a:srgbClr val="CCFBF1"/>
+          </a:solidFill>
+          <a:ln w="9525">
+            <a:solidFill>
+              <a:srgbClr val="E2E8F0"/>
+            </a:solidFill>
+            <a:prstDash val="solid"/>
+          </a:ln>
+          <a:effectLst>
+            <a:outerShdw sx="100000" sy="100000" kx="0" ky="0" algn="bl" rotWithShape="0" blurRad="101600" dist="25400" dir="5400000">
+              <a:srgbClr val="000000">
+                <a:alpha val="14000"/>
+              </a:srgbClr>
+            </a:outerShdw>
+          </a:effectLst>
+        </p:spPr>
+      </p:sp>
+      <p:sp>
+        <p:nvSpPr>
+          <p:cNvPr id="4" name="Text 2"/>
+          <p:cNvSpPr txBox="1"/>
+          <p:nvPr/>
+        </p:nvSpPr>
+        <p:spPr>
+          <a:xfrm>
+            <a:off x="822960" y="1463040"/>
+            <a:ext cx="4937760" cy="411480"/>
+          </a:xfrm>
+          <a:prstGeom prst="rect">
+            <a:avLst/>
+          </a:prstGeom>
+          <a:noFill/>
+          <a:ln/>
+        </p:spPr>
+        <p:txBody>
+          <a:bodyPr wrap="square" lIns="0" tIns="0" rIns="0" bIns="0" rtlCol="0" anchor="t"/>
+          <a:lstStyle/>
+          <a:p>
+            <a:pPr indent="0" marL="0">
+              <a:buNone/>
+            </a:pPr>
+            <a:r>
+              <a:rPr lang="en-US" sz="1900" b="1" dirty="0">
+                <a:solidFill>
+                  <a:srgbClr val="0F5C54"/>
+                </a:solidFill>
+                <a:latin typeface="Calibri" pitchFamily="34" charset="0"/>
+                <a:ea typeface="Calibri" pitchFamily="34" charset="-122"/>
+                <a:cs typeface="Calibri" pitchFamily="34" charset="-120"/>
+              </a:rPr>
+              <a:t>What we achieved</a:t>
+            </a:r>
+            <a:endParaRPr lang="en-US" sz="1900" dirty="0"/>
+          </a:p>
+        </p:txBody>
+      </p:sp>
+      <p:sp>
+        <p:nvSpPr>
+          <p:cNvPr id="5" name="Text 3"/>
+          <p:cNvSpPr txBox="1"/>
+          <p:nvPr/>
+        </p:nvSpPr>
+        <p:spPr>
+          <a:xfrm>
+            <a:off x="822960" y="2011680"/>
+            <a:ext cx="5029200" cy="2926080"/>
+          </a:xfrm>
+          <a:prstGeom prst="rect">
+            <a:avLst/>
+          </a:prstGeom>
+          <a:noFill/>
+          <a:ln/>
+        </p:spPr>
+        <p:txBody>
+          <a:bodyPr wrap="square" lIns="0" tIns="0" rIns="0" bIns="0" rtlCol="0" anchor="t"/>
+          <a:lstStyle/>
+          <a:p>
+            <a:pPr marL="228600" indent="-228600">
+              <a:spcAft>
+                <a:spcPts val="600"/>
+              </a:spcAft>
+              <a:buSzPct val="100000"/>
+              <a:buChar char="•"/>
+            </a:pPr>
+            <a:r>
+              <a:rPr lang="en-US" sz="1500" dirty="0">
+                <a:solidFill>
+                  <a:srgbClr val="0F172A"/>
+                </a:solidFill>
+                <a:latin typeface="Calibri" pitchFamily="34" charset="0"/>
+                <a:ea typeface="Calibri" pitchFamily="34" charset="-122"/>
+                <a:cs typeface="Calibri" pitchFamily="34" charset="-120"/>
+              </a:rPr>
+              <a:t>All 12 synopsis modules working end-to-end</a:t>
+            </a:r>
+            <a:endParaRPr lang="en-US" sz="1500" dirty="0"/>
+          </a:p>
+          <a:p>
+            <a:pPr marL="228600" indent="-228600">
+              <a:spcAft>
+                <a:spcPts val="600"/>
+              </a:spcAft>
+              <a:buSzPct val="100000"/>
+              <a:buChar char="•"/>
+            </a:pPr>
+            <a:r>
+              <a:rPr lang="en-US" sz="1500" dirty="0">
+                <a:solidFill>
+                  <a:srgbClr val="0F172A"/>
+                </a:solidFill>
+                <a:latin typeface="Calibri" pitchFamily="34" charset="0"/>
+                <a:ea typeface="Calibri" pitchFamily="34" charset="-122"/>
+                <a:cs typeface="Calibri" pitchFamily="34" charset="-120"/>
+              </a:rPr>
+              <a:t>Eleven cooperating agents with explainable recommendations</a:t>
+            </a:r>
+            <a:endParaRPr lang="en-US" sz="1500" dirty="0"/>
+          </a:p>
+          <a:p>
+            <a:pPr marL="228600" indent="-228600">
+              <a:spcAft>
+                <a:spcPts val="600"/>
+              </a:spcAft>
+              <a:buSzPct val="100000"/>
+              <a:buChar char="•"/>
+            </a:pPr>
+            <a:r>
+              <a:rPr lang="en-US" sz="1500" dirty="0">
+                <a:solidFill>
+                  <a:srgbClr val="0F172A"/>
+                </a:solidFill>
+                <a:latin typeface="Calibri" pitchFamily="34" charset="0"/>
+                <a:ea typeface="Calibri" pitchFamily="34" charset="-122"/>
+                <a:cs typeface="Calibri" pitchFamily="34" charset="-120"/>
+              </a:rPr>
+              <a:t>Safe by design: risk-tiered human approval, full audit, governance dashboard</a:t>
+            </a:r>
+            <a:endParaRPr lang="en-US" sz="1500" dirty="0"/>
+          </a:p>
+          <a:p>
+            <a:pPr marL="228600" indent="-228600">
+              <a:spcAft>
+                <a:spcPts val="600"/>
+              </a:spcAft>
+              <a:buSzPct val="100000"/>
+              <a:buChar char="•"/>
+            </a:pPr>
+            <a:r>
+              <a:rPr lang="en-US" sz="1500" dirty="0">
+                <a:solidFill>
+                  <a:srgbClr val="0F172A"/>
+                </a:solidFill>
+                <a:latin typeface="Calibri" pitchFamily="34" charset="0"/>
+                <a:ea typeface="Calibri" pitchFamily="34" charset="-122"/>
+                <a:cs typeface="Calibri" pitchFamily="34" charset="-120"/>
+              </a:rPr>
+              <a:t>Beyond the synopsis: 108 pre-hospital coordination, billing &amp; PM-JAY claims, digital twin, ICU monitor, copilot, public screens</a:t>
+            </a:r>
+            <a:endParaRPr lang="en-US" sz="1500" dirty="0"/>
+          </a:p>
+          <a:p>
+            <a:pPr marL="228600" indent="-228600">
+              <a:spcAft>
+                <a:spcPts val="600"/>
+              </a:spcAft>
+              <a:buSzPct val="100000"/>
+              <a:buChar char="•"/>
+            </a:pPr>
+            <a:r>
+              <a:rPr lang="en-US" sz="1500" dirty="0">
+                <a:solidFill>
+                  <a:srgbClr val="0F172A"/>
+                </a:solidFill>
+                <a:latin typeface="Calibri" pitchFamily="34" charset="0"/>
+                <a:ea typeface="Calibri" pitchFamily="34" charset="-122"/>
+                <a:cs typeface="Calibri" pitchFamily="34" charset="-120"/>
+              </a:rPr>
+              <a:t>Runs offline; one-click start; Docker-ready; CI on every push</a:t>
+            </a:r>
+            <a:endParaRPr lang="en-US" sz="1500" dirty="0"/>
+          </a:p>
+        </p:txBody>
+      </p:sp>
+      <p:sp>
+        <p:nvSpPr>
+          <p:cNvPr id="6" name="Shape 4"/>
+          <p:cNvSpPr/>
+          <p:nvPr/>
+        </p:nvSpPr>
+        <p:spPr>
+          <a:xfrm>
+            <a:off x="6309360" y="1280160"/>
+            <a:ext cx="5394960" cy="3749040"/>
+          </a:xfrm>
+          <a:prstGeom prst="roundRect">
+            <a:avLst>
+              <a:gd name="adj" fmla="val 1951"/>
+            </a:avLst>
+          </a:prstGeom>
+          <a:solidFill>
+            <a:srgbClr val="FFFFFF"/>
+          </a:solidFill>
+          <a:ln w="9525">
+            <a:solidFill>
+              <a:srgbClr val="E2E8F0"/>
+            </a:solidFill>
+            <a:prstDash val="solid"/>
+          </a:ln>
+          <a:effectLst>
+            <a:outerShdw sx="100000" sy="100000" kx="0" ky="0" algn="bl" rotWithShape="0" blurRad="101600" dist="25400" dir="5400000">
+              <a:srgbClr val="000000">
+                <a:alpha val="14000"/>
+              </a:srgbClr>
+            </a:outerShdw>
+          </a:effectLst>
+        </p:spPr>
+      </p:sp>
+      <p:sp>
+        <p:nvSpPr>
+          <p:cNvPr id="7" name="Text 5"/>
+          <p:cNvSpPr txBox="1"/>
+          <p:nvPr/>
+        </p:nvSpPr>
+        <p:spPr>
+          <a:xfrm>
+            <a:off x="6583680" y="1463040"/>
+            <a:ext cx="4846320" cy="411480"/>
+          </a:xfrm>
+          <a:prstGeom prst="rect">
+            <a:avLst/>
+          </a:prstGeom>
+          <a:noFill/>
+          <a:ln/>
+        </p:spPr>
+        <p:txBody>
+          <a:bodyPr wrap="square" lIns="0" tIns="0" rIns="0" bIns="0" rtlCol="0" anchor="t"/>
+          <a:lstStyle/>
+          <a:p>
+            <a:pPr indent="0" marL="0">
+              <a:buNone/>
+            </a:pPr>
+            <a:r>
+              <a:rPr lang="en-US" sz="1900" b="1" dirty="0">
+                <a:solidFill>
+                  <a:srgbClr val="0F5C54"/>
+                </a:solidFill>
+                <a:latin typeface="Calibri" pitchFamily="34" charset="0"/>
+                <a:ea typeface="Calibri" pitchFamily="34" charset="-122"/>
+                <a:cs typeface="Calibri" pitchFamily="34" charset="-120"/>
+              </a:rPr>
+              <a:t>Next steps</a:t>
+            </a:r>
+            <a:endParaRPr lang="en-US" sz="1900" dirty="0"/>
+          </a:p>
+        </p:txBody>
+      </p:sp>
+      <p:sp>
+        <p:nvSpPr>
+          <p:cNvPr id="8" name="Text 6"/>
+          <p:cNvSpPr txBox="1"/>
+          <p:nvPr/>
+        </p:nvSpPr>
+        <p:spPr>
+          <a:xfrm>
+            <a:off x="6583680" y="2011680"/>
+            <a:ext cx="4937760" cy="2926080"/>
+          </a:xfrm>
+          <a:prstGeom prst="rect">
+            <a:avLst/>
+          </a:prstGeom>
+          <a:noFill/>
+          <a:ln/>
+        </p:spPr>
+        <p:txBody>
+          <a:bodyPr wrap="square" lIns="0" tIns="0" rIns="0" bIns="0" rtlCol="0" anchor="t"/>
+          <a:lstStyle/>
+          <a:p>
+            <a:pPr marL="228600" indent="-228600">
+              <a:spcAft>
+                <a:spcPts val="600"/>
+              </a:spcAft>
+              <a:buSzPct val="100000"/>
+              <a:buChar char="•"/>
+            </a:pPr>
+            <a:r>
+              <a:rPr lang="en-US" sz="1500" dirty="0">
+                <a:solidFill>
+                  <a:srgbClr val="0F172A"/>
+                </a:solidFill>
+                <a:latin typeface="Calibri" pitchFamily="34" charset="0"/>
+                <a:ea typeface="Calibri" pitchFamily="34" charset="-122"/>
+                <a:cs typeface="Calibri" pitchFamily="34" charset="-120"/>
+              </a:rPr>
+              <a:t>HL7 FHIR / ABDM integration and real PM-JAY claim submission</a:t>
+            </a:r>
+            <a:endParaRPr lang="en-US" sz="1500" dirty="0"/>
+          </a:p>
+          <a:p>
+            <a:pPr marL="228600" indent="-228600">
+              <a:spcAft>
+                <a:spcPts val="600"/>
+              </a:spcAft>
+              <a:buSzPct val="100000"/>
+              <a:buChar char="•"/>
+            </a:pPr>
+            <a:r>
+              <a:rPr lang="en-US" sz="1500" dirty="0">
+                <a:solidFill>
+                  <a:srgbClr val="0F172A"/>
+                </a:solidFill>
+                <a:latin typeface="Calibri" pitchFamily="34" charset="0"/>
+                <a:ea typeface="Calibri" pitchFamily="34" charset="-122"/>
+                <a:cs typeface="Calibri" pitchFamily="34" charset="-120"/>
+              </a:rPr>
+              <a:t>IoT smart beds and monitors feeding early warning</a:t>
+            </a:r>
+            <a:endParaRPr lang="en-US" sz="1500" dirty="0"/>
+          </a:p>
+          <a:p>
+            <a:pPr marL="228600" indent="-228600">
+              <a:spcAft>
+                <a:spcPts val="600"/>
+              </a:spcAft>
+              <a:buSzPct val="100000"/>
+              <a:buChar char="•"/>
+            </a:pPr>
+            <a:r>
+              <a:rPr lang="en-US" sz="1500" dirty="0">
+                <a:solidFill>
+                  <a:srgbClr val="0F172A"/>
+                </a:solidFill>
+                <a:latin typeface="Calibri" pitchFamily="34" charset="0"/>
+                <a:ea typeface="Calibri" pitchFamily="34" charset="-122"/>
+                <a:cs typeface="Calibri" pitchFamily="34" charset="-120"/>
+              </a:rPr>
+              <a:t>Retrain and recalibrate the models on real hospital data</a:t>
+            </a:r>
+            <a:endParaRPr lang="en-US" sz="1500" dirty="0"/>
+          </a:p>
+          <a:p>
+            <a:pPr marL="228600" indent="-228600">
+              <a:spcAft>
+                <a:spcPts val="600"/>
+              </a:spcAft>
+              <a:buSzPct val="100000"/>
+              <a:buChar char="•"/>
+            </a:pPr>
+            <a:r>
+              <a:rPr lang="en-US" sz="1500" dirty="0">
+                <a:solidFill>
+                  <a:srgbClr val="0F172A"/>
+                </a:solidFill>
+                <a:latin typeface="Calibri" pitchFamily="34" charset="0"/>
+                <a:ea typeface="Calibri" pitchFamily="34" charset="-122"/>
+                <a:cs typeface="Calibri" pitchFamily="34" charset="-120"/>
+              </a:rPr>
+              <a:t>Multi-hospital referral coordination</a:t>
+            </a:r>
+            <a:endParaRPr lang="en-US" sz="1500" dirty="0"/>
+          </a:p>
+          <a:p>
+            <a:pPr marL="228600" indent="-228600">
+              <a:spcAft>
+                <a:spcPts val="600"/>
+              </a:spcAft>
+              <a:buSzPct val="100000"/>
+              <a:buChar char="•"/>
+            </a:pPr>
+            <a:r>
+              <a:rPr lang="en-US" sz="1500" dirty="0">
+                <a:solidFill>
+                  <a:srgbClr val="0F172A"/>
+                </a:solidFill>
+                <a:latin typeface="Calibri" pitchFamily="34" charset="0"/>
+                <a:ea typeface="Calibri" pitchFamily="34" charset="-122"/>
+                <a:cs typeface="Calibri" pitchFamily="34" charset="-120"/>
+              </a:rPr>
+              <a:t>Full Hindi and regional-language interface (copilot already understands Hinglish)</a:t>
+            </a:r>
+            <a:endParaRPr lang="en-US" sz="1500" dirty="0"/>
+          </a:p>
+        </p:txBody>
+      </p:sp>
+      <p:sp>
+        <p:nvSpPr>
+          <p:cNvPr id="9" name="Shape 7"/>
+          <p:cNvSpPr/>
+          <p:nvPr/>
+        </p:nvSpPr>
+        <p:spPr>
+          <a:xfrm>
+            <a:off x="548640" y="5349240"/>
+            <a:ext cx="11155680" cy="914400"/>
+          </a:xfrm>
+          <a:prstGeom prst="roundRect">
+            <a:avLst>
+              <a:gd name="adj" fmla="val 8000"/>
+            </a:avLst>
+          </a:prstGeom>
+          <a:solidFill>
+            <a:srgbClr val="0B1F24"/>
+          </a:solidFill>
+          <a:ln w="12700">
+            <a:solidFill>
+              <a:srgbClr val="0B1F24"/>
+            </a:solidFill>
+            <a:prstDash val="solid"/>
+          </a:ln>
+        </p:spPr>
+      </p:sp>
+      <p:sp>
+        <p:nvSpPr>
+          <p:cNvPr id="10" name="Text 8"/>
+          <p:cNvSpPr txBox="1"/>
+          <p:nvPr/>
+        </p:nvSpPr>
+        <p:spPr>
+          <a:xfrm>
+            <a:off x="822960" y="5349240"/>
+            <a:ext cx="10607040" cy="914400"/>
+          </a:xfrm>
+          <a:prstGeom prst="rect">
+            <a:avLst/>
+          </a:prstGeom>
+          <a:noFill/>
+          <a:ln/>
+        </p:spPr>
+        <p:txBody>
+          <a:bodyPr wrap="square" lIns="0" tIns="0" rIns="0" bIns="0" rtlCol="0" anchor="ctr"/>
+          <a:lstStyle/>
+          <a:p>
+            <a:pPr algn="ctr" indent="0" marL="0">
+              <a:buNone/>
+            </a:pPr>
+            <a:r>
+              <a:rPr lang="en-US" sz="2200" i="1" dirty="0">
+                <a:solidFill>
+                  <a:srgbClr val="FFFFFF"/>
+                </a:solidFill>
+                <a:latin typeface="Cambria" pitchFamily="34" charset="0"/>
+                <a:ea typeface="Cambria" pitchFamily="34" charset="-122"/>
+                <a:cs typeface="Cambria" pitchFamily="34" charset="-120"/>
+              </a:rPr>
+              <a:t>AI coordinates, optimises and explains — qualified clinicians make the decisions.</a:t>
+            </a:r>
+            <a:endParaRPr lang="en-US" sz="2200" dirty="0"/>
+          </a:p>
+        </p:txBody>
+      </p:sp>
+      <p:sp>
+        <p:nvSpPr>
+          <p:cNvPr id="11" name="Text 9"/>
+          <p:cNvSpPr txBox="1"/>
+          <p:nvPr/>
+        </p:nvSpPr>
+        <p:spPr>
+          <a:xfrm>
+            <a:off x="11384280" y="6400800"/>
+            <a:ext cx="365760" cy="274320"/>
+          </a:xfrm>
+          <a:prstGeom prst="rect">
+            <a:avLst/>
+          </a:prstGeom>
+          <a:noFill/>
+          <a:ln/>
+        </p:spPr>
+        <p:txBody>
+          <a:bodyPr wrap="square" lIns="0" tIns="0" rIns="0" bIns="0" rtlCol="0" anchor="t"/>
+          <a:lstStyle/>
+          <a:p>
+            <a:pPr algn="r" indent="0" marL="0">
+              <a:buNone/>
+            </a:pPr>
+            <a:r>
+              <a:rPr lang="en-US" sz="1000" dirty="0">
+                <a:solidFill>
+                  <a:srgbClr val="64748B"/>
+                </a:solidFill>
+                <a:latin typeface="Calibri" pitchFamily="34" charset="0"/>
+                <a:ea typeface="Calibri" pitchFamily="34" charset="-122"/>
+                <a:cs typeface="Calibri" pitchFamily="34" charset="-120"/>
+              </a:rPr>
+              <a:t>20</a:t>
+            </a:r>
+            <a:endParaRPr lang="en-US" sz="1000" dirty="0"/>
+          </a:p>
+        </p:txBody>
+      </p:sp>
+    </p:spTree>
+  </p:cSld>
+  <p:clrMapOvr>
+    <a:masterClrMapping/>
+  </p:clrMapOvr>
+</p:sld>
+</file>
+
+<file path=ppt/slides/slide21.xml><?xml version="1.0" encoding="utf-8"?>
+<p:sld xmlns:a="http://schemas.openxmlformats.org/drawingml/2006/main" xmlns:r="http://schemas.openxmlformats.org/officeDocument/2006/relationships" xmlns:p="http://schemas.openxmlformats.org/presentationml/2006/main">
+  <p:cSld name="Slide 21">
+    <p:bg>
+      <p:bgPr>
+        <a:solidFill>
+          <a:srgbClr val="0B1F24"/>
+        </a:solidFill>
+      </p:bgPr>
+    </p:bg>
+    <p:spTree>
+      <p:nvGrpSpPr>
+        <p:cNvPr id="1" name=""/>
+        <p:cNvGrpSpPr/>
+        <p:nvPr/>
+      </p:nvGrpSpPr>
+      <p:grpSpPr>
+        <a:xfrm>
+          <a:off x="0" y="0"/>
+          <a:ext cx="0" cy="0"/>
+          <a:chOff x="0" y="0"/>
+          <a:chExt cx="0" cy="0"/>
+        </a:xfrm>
+      </p:grpSpPr>
+      <p:pic>
+        <p:nvPicPr>
+          <p:cNvPr id="2" name="Image 0" descr="D:\codin\idea lab\frontend\public\icon-512.png">    </p:cNvPr>
+          <p:cNvPicPr>
+            <a:picLocks noChangeAspect="1"/>
+          </p:cNvPicPr>
+          <p:nvPr/>
+        </p:nvPicPr>
+        <p:blipFill>
+          <a:blip r:embed="rId1"/>
+          <a:stretch>
+            <a:fillRect/>
+          </a:stretch>
+        </p:blipFill>
+        <p:spPr>
+          <a:xfrm>
+            <a:off x="5641848" y="1371600"/>
+            <a:ext cx="914400" cy="914400"/>
+          </a:xfrm>
+          <a:prstGeom prst="rect">
+            <a:avLst/>
+          </a:prstGeom>
+        </p:spPr>
+      </p:pic>
+      <p:sp>
+        <p:nvSpPr>
+          <p:cNvPr id="3" name="Text 0"/>
+          <p:cNvSpPr txBox="1"/>
+          <p:nvPr/>
+        </p:nvSpPr>
+        <p:spPr>
+          <a:xfrm>
+            <a:off x="914400" y="2560320"/>
+            <a:ext cx="10360152" cy="914400"/>
+          </a:xfrm>
+          <a:prstGeom prst="rect">
+            <a:avLst/>
+          </a:prstGeom>
+          <a:noFill/>
+          <a:ln/>
+        </p:spPr>
+        <p:txBody>
+          <a:bodyPr wrap="square" lIns="0" tIns="0" rIns="0" bIns="0" rtlCol="0" anchor="t"/>
+          <a:lstStyle/>
+          <a:p>
+            <a:pPr algn="ctr" indent="0" marL="0">
+              <a:buNone/>
+            </a:pPr>
+            <a:r>
+              <a:rPr lang="en-US" sz="4800" b="1" dirty="0">
+                <a:solidFill>
+                  <a:srgbClr val="FFFFFF"/>
+                </a:solidFill>
+                <a:latin typeface="Cambria" pitchFamily="34" charset="0"/>
+                <a:ea typeface="Cambria" pitchFamily="34" charset="-122"/>
+                <a:cs typeface="Cambria" pitchFamily="34" charset="-120"/>
+              </a:rPr>
+              <a:t>Thank you</a:t>
+            </a:r>
+            <a:endParaRPr lang="en-US" sz="4800" dirty="0"/>
+          </a:p>
+        </p:txBody>
+      </p:sp>
+      <p:sp>
+        <p:nvSpPr>
+          <p:cNvPr id="4" name="Text 1"/>
+          <p:cNvSpPr txBox="1"/>
+          <p:nvPr/>
+        </p:nvSpPr>
+        <p:spPr>
+          <a:xfrm>
+            <a:off x="914400" y="3566160"/>
+            <a:ext cx="10360152" cy="457200"/>
+          </a:xfrm>
+          <a:prstGeom prst="rect">
+            <a:avLst/>
+          </a:prstGeom>
+          <a:noFill/>
+          <a:ln/>
+        </p:spPr>
+        <p:txBody>
+          <a:bodyPr wrap="square" lIns="0" tIns="0" rIns="0" bIns="0" rtlCol="0" anchor="t"/>
+          <a:lstStyle/>
+          <a:p>
+            <a:pPr algn="ctr" indent="0" marL="0">
+              <a:buNone/>
+            </a:pPr>
+            <a:r>
+              <a:rPr lang="en-US" sz="2000" i="1" dirty="0">
+                <a:solidFill>
+                  <a:srgbClr val="14B8A6"/>
+                </a:solidFill>
+                <a:latin typeface="Calibri" pitchFamily="34" charset="0"/>
+                <a:ea typeface="Calibri" pitchFamily="34" charset="-122"/>
+                <a:cs typeface="Calibri" pitchFamily="34" charset="-120"/>
+              </a:rPr>
+              <a:t>Questions &amp; live demo</a:t>
+            </a:r>
+            <a:endParaRPr lang="en-US" sz="2000" dirty="0"/>
+          </a:p>
+        </p:txBody>
+      </p:sp>
+      <p:sp>
+        <p:nvSpPr>
+          <p:cNvPr id="5" name="Text 2"/>
+          <p:cNvSpPr txBox="1"/>
+          <p:nvPr/>
+        </p:nvSpPr>
+        <p:spPr>
+          <a:xfrm>
+            <a:off x="914400" y="4754880"/>
+            <a:ext cx="10360152" cy="365760"/>
+          </a:xfrm>
+          <a:prstGeom prst="rect">
+            <a:avLst/>
+          </a:prstGeom>
+          <a:noFill/>
+          <a:ln/>
+        </p:spPr>
+        <p:txBody>
+          <a:bodyPr wrap="square" lIns="0" tIns="0" rIns="0" bIns="0" rtlCol="0" anchor="t"/>
+          <a:lstStyle/>
+          <a:p>
+            <a:pPr algn="ctr" indent="0" marL="0">
+              <a:buNone/>
+            </a:pPr>
+            <a:r>
+              <a:rPr lang="en-US" sz="1400" dirty="0">
+                <a:solidFill>
+                  <a:srgbClr val="C9D6D4"/>
+                </a:solidFill>
+                <a:latin typeface="Calibri" pitchFamily="34" charset="0"/>
+                <a:ea typeface="Calibri" pitchFamily="34" charset="-122"/>
+                <a:cs typeface="Calibri" pitchFamily="34" charset="-120"/>
+              </a:rPr>
+              <a:t>Demo login: admin / admin123  ·  doctor / doctor123  ·  nurse / nurse123  ·  patient / patient123</a:t>
+            </a:r>
+            <a:endParaRPr lang="en-US" sz="1400" dirty="0"/>
+          </a:p>
+        </p:txBody>
+      </p:sp>
+    </p:spTree>
+  </p:cSld>
+  <p:clrMapOvr>
+    <a:masterClrMapping/>
+  </p:clrMapOvr>
+</p:sld>
+</file>
+
 <file path=ppt/slides/slide3.xml><?xml version="1.0" encoding="utf-8"?>
 <p:sld xmlns:a="http://schemas.openxmlformats.org/drawingml/2006/main" xmlns:r="http://schemas.openxmlformats.org/officeDocument/2006/relationships" xmlns:p="http://schemas.openxmlformats.org/presentationml/2006/main">
   <p:cSld name="Slide 3">
@@ -8641,7 +12752,7 @@
                 <a:ea typeface="Cambria" pitchFamily="34" charset="-122"/>
                 <a:cs typeface="Cambria" pitchFamily="34" charset="-120"/>
               </a:rPr>
-              <a:t>Our solution: nine specialised agents, one orchestrator</a:t>
+              <a:t>Our solution: eleven specialised agents, one orchestrator</a:t>
             </a:r>
             <a:endParaRPr lang="en-US" sz="3200" dirty="0"/>
           </a:p>
@@ -8717,8 +12828,8 @@
         </p:nvSpPr>
         <p:spPr>
           <a:xfrm flipV="1">
-            <a:off x="3566160" y="2541674"/>
-            <a:ext cx="1498801" cy="1435966"/>
+            <a:off x="3566160" y="2400693"/>
+            <a:ext cx="1260623" cy="1576947"/>
           </a:xfrm>
           <a:prstGeom prst="line">
             <a:avLst/>
@@ -8740,8 +12851,8 @@
         </p:nvSpPr>
         <p:spPr>
           <a:xfrm flipV="1">
-            <a:off x="3566160" y="3652133"/>
-            <a:ext cx="2296296" cy="325507"/>
+            <a:off x="3566160" y="3198936"/>
+            <a:ext cx="2121007" cy="778704"/>
           </a:xfrm>
           <a:prstGeom prst="line">
             <a:avLst/>
@@ -8764,7 +12875,7 @@
         <p:spPr>
           <a:xfrm>
             <a:off x="3566160" y="3977640"/>
-            <a:ext cx="2019329" cy="937260"/>
+            <a:ext cx="2307986" cy="266772"/>
           </a:xfrm>
           <a:prstGeom prst="line">
             <a:avLst/>
@@ -8787,7 +12898,7 @@
         <p:spPr>
           <a:xfrm>
             <a:off x="3566160" y="3977640"/>
-            <a:ext cx="797495" cy="1761473"/>
+            <a:ext cx="1762196" cy="1227550"/>
           </a:xfrm>
           <a:prstGeom prst="line">
             <a:avLst/>
@@ -8808,9 +12919,9 @@
           <p:nvPr/>
         </p:nvSpPr>
         <p:spPr>
-          <a:xfrm flipV="1">
-            <a:off x="2768665" y="3977640"/>
-            <a:ext cx="797495" cy="1761473"/>
+          <a:xfrm>
+            <a:off x="3566160" y="3977640"/>
+            <a:ext cx="656921" cy="1798589"/>
           </a:xfrm>
           <a:prstGeom prst="line">
             <a:avLst/>
@@ -8832,8 +12943,8 @@
         </p:nvSpPr>
         <p:spPr>
           <a:xfrm flipV="1">
-            <a:off x="1546831" y="3977640"/>
-            <a:ext cx="2019329" cy="937260"/>
+            <a:off x="2909239" y="3977640"/>
+            <a:ext cx="656921" cy="1798589"/>
           </a:xfrm>
           <a:prstGeom prst="line">
             <a:avLst/>
@@ -8854,9 +12965,9 @@
           <p:nvPr/>
         </p:nvSpPr>
         <p:spPr>
-          <a:xfrm>
-            <a:off x="1269864" y="3652133"/>
-            <a:ext cx="2296296" cy="325507"/>
+          <a:xfrm flipV="1">
+            <a:off x="1803964" y="3977640"/>
+            <a:ext cx="1762196" cy="1227550"/>
           </a:xfrm>
           <a:prstGeom prst="line">
             <a:avLst/>
@@ -8877,9 +12988,9 @@
           <p:nvPr/>
         </p:nvSpPr>
         <p:spPr>
-          <a:xfrm>
-            <a:off x="2067359" y="2541674"/>
-            <a:ext cx="1498801" cy="1435966"/>
+          <a:xfrm flipV="1">
+            <a:off x="1258174" y="3977640"/>
+            <a:ext cx="2307986" cy="266772"/>
           </a:xfrm>
           <a:prstGeom prst="line">
             <a:avLst/>
@@ -8896,6 +13007,52 @@
       <p:sp>
         <p:nvSpPr>
           <p:cNvPr id="13" name="Shape 11"/>
+          <p:cNvSpPr/>
+          <p:nvPr/>
+        </p:nvSpPr>
+        <p:spPr>
+          <a:xfrm>
+            <a:off x="1445153" y="3198936"/>
+            <a:ext cx="2121007" cy="778704"/>
+          </a:xfrm>
+          <a:prstGeom prst="line">
+            <a:avLst/>
+          </a:prstGeom>
+          <a:noFill/>
+          <a:ln w="15875">
+            <a:solidFill>
+              <a:srgbClr val="A7C9C3"/>
+            </a:solidFill>
+            <a:prstDash val="solid"/>
+          </a:ln>
+        </p:spPr>
+      </p:sp>
+      <p:sp>
+        <p:nvSpPr>
+          <p:cNvPr id="14" name="Shape 12"/>
+          <p:cNvSpPr/>
+          <p:nvPr/>
+        </p:nvSpPr>
+        <p:spPr>
+          <a:xfrm>
+            <a:off x="2305537" y="2400693"/>
+            <a:ext cx="1260623" cy="1576947"/>
+          </a:xfrm>
+          <a:prstGeom prst="line">
+            <a:avLst/>
+          </a:prstGeom>
+          <a:noFill/>
+          <a:ln w="15875">
+            <a:solidFill>
+              <a:srgbClr val="A7C9C3"/>
+            </a:solidFill>
+            <a:prstDash val="solid"/>
+          </a:ln>
+        </p:spPr>
+      </p:sp>
+      <p:sp>
+        <p:nvSpPr>
+          <p:cNvPr id="15" name="Shape 13"/>
           <p:cNvSpPr/>
           <p:nvPr/>
         </p:nvSpPr>
@@ -8920,7 +13077,7 @@
       </p:sp>
       <p:sp>
         <p:nvSpPr>
-          <p:cNvPr id="14" name="Text 12"/>
+          <p:cNvPr id="16" name="Text 14"/>
           <p:cNvSpPr txBox="1"/>
           <p:nvPr/>
         </p:nvSpPr>
@@ -8976,7 +13133,7 @@
       </p:sp>
       <p:sp>
         <p:nvSpPr>
-          <p:cNvPr id="15" name="Shape 13"/>
+          <p:cNvPr id="17" name="Shape 15"/>
           <p:cNvSpPr/>
           <p:nvPr/>
         </p:nvSpPr>
@@ -9003,7 +13160,7 @@
       </p:sp>
       <p:sp>
         <p:nvSpPr>
-          <p:cNvPr id="16" name="Text 14"/>
+          <p:cNvPr id="18" name="Text 16"/>
           <p:cNvSpPr txBox="1"/>
           <p:nvPr/>
         </p:nvSpPr>
@@ -9042,13 +13199,13 @@
       </p:sp>
       <p:sp>
         <p:nvSpPr>
-          <p:cNvPr id="17" name="Shape 15"/>
+          <p:cNvPr id="19" name="Shape 17"/>
           <p:cNvSpPr/>
           <p:nvPr/>
         </p:nvSpPr>
         <p:spPr>
           <a:xfrm>
-            <a:off x="4333441" y="2267354"/>
+            <a:off x="4095263" y="2126373"/>
             <a:ext cx="1463040" cy="548640"/>
           </a:xfrm>
           <a:prstGeom prst="roundRect">
@@ -9069,13 +13226,13 @@
       </p:sp>
       <p:sp>
         <p:nvSpPr>
-          <p:cNvPr id="18" name="Text 16"/>
-          <p:cNvSpPr txBox="1"/>
-          <p:nvPr/>
-        </p:nvSpPr>
-        <p:spPr>
-          <a:xfrm>
-            <a:off x="4333441" y="2267354"/>
+          <p:cNvPr id="20" name="Text 18"/>
+          <p:cNvSpPr txBox="1"/>
+          <p:nvPr/>
+        </p:nvSpPr>
+        <p:spPr>
+          <a:xfrm>
+            <a:off x="4095263" y="2126373"/>
             <a:ext cx="1463040" cy="548640"/>
           </a:xfrm>
           <a:prstGeom prst="rect">
@@ -9108,13 +13265,13 @@
       </p:sp>
       <p:sp>
         <p:nvSpPr>
-          <p:cNvPr id="19" name="Shape 17"/>
+          <p:cNvPr id="21" name="Shape 19"/>
           <p:cNvSpPr/>
           <p:nvPr/>
         </p:nvSpPr>
         <p:spPr>
           <a:xfrm>
-            <a:off x="5130936" y="3377813"/>
+            <a:off x="4955647" y="2924616"/>
             <a:ext cx="1463040" cy="548640"/>
           </a:xfrm>
           <a:prstGeom prst="roundRect">
@@ -9135,13 +13292,13 @@
       </p:sp>
       <p:sp>
         <p:nvSpPr>
-          <p:cNvPr id="20" name="Text 18"/>
-          <p:cNvSpPr txBox="1"/>
-          <p:nvPr/>
-        </p:nvSpPr>
-        <p:spPr>
-          <a:xfrm>
-            <a:off x="5130936" y="3377813"/>
+          <p:cNvPr id="22" name="Text 20"/>
+          <p:cNvSpPr txBox="1"/>
+          <p:nvPr/>
+        </p:nvSpPr>
+        <p:spPr>
+          <a:xfrm>
+            <a:off x="4955647" y="2924616"/>
             <a:ext cx="1463040" cy="548640"/>
           </a:xfrm>
           <a:prstGeom prst="rect">
@@ -9174,13 +13331,13 @@
       </p:sp>
       <p:sp>
         <p:nvSpPr>
-          <p:cNvPr id="21" name="Shape 19"/>
+          <p:cNvPr id="23" name="Shape 21"/>
           <p:cNvSpPr/>
           <p:nvPr/>
         </p:nvSpPr>
         <p:spPr>
           <a:xfrm>
-            <a:off x="4853969" y="4640580"/>
+            <a:off x="5142626" y="3970092"/>
             <a:ext cx="1463040" cy="548640"/>
           </a:xfrm>
           <a:prstGeom prst="roundRect">
@@ -9201,13 +13358,13 @@
       </p:sp>
       <p:sp>
         <p:nvSpPr>
-          <p:cNvPr id="22" name="Text 20"/>
-          <p:cNvSpPr txBox="1"/>
-          <p:nvPr/>
-        </p:nvSpPr>
-        <p:spPr>
-          <a:xfrm>
-            <a:off x="4853969" y="4640580"/>
+          <p:cNvPr id="24" name="Text 22"/>
+          <p:cNvSpPr txBox="1"/>
+          <p:nvPr/>
+        </p:nvSpPr>
+        <p:spPr>
+          <a:xfrm>
+            <a:off x="5142626" y="3970092"/>
             <a:ext cx="1463040" cy="548640"/>
           </a:xfrm>
           <a:prstGeom prst="rect">
@@ -9240,13 +13397,13 @@
       </p:sp>
       <p:sp>
         <p:nvSpPr>
-          <p:cNvPr id="23" name="Shape 21"/>
+          <p:cNvPr id="25" name="Shape 23"/>
           <p:cNvSpPr/>
           <p:nvPr/>
         </p:nvSpPr>
         <p:spPr>
           <a:xfrm>
-            <a:off x="3632135" y="5464793"/>
+            <a:off x="4596836" y="4930870"/>
             <a:ext cx="1463040" cy="548640"/>
           </a:xfrm>
           <a:prstGeom prst="roundRect">
@@ -9267,13 +13424,13 @@
       </p:sp>
       <p:sp>
         <p:nvSpPr>
-          <p:cNvPr id="24" name="Text 22"/>
-          <p:cNvSpPr txBox="1"/>
-          <p:nvPr/>
-        </p:nvSpPr>
-        <p:spPr>
-          <a:xfrm>
-            <a:off x="3632135" y="5464793"/>
+          <p:cNvPr id="26" name="Text 24"/>
+          <p:cNvSpPr txBox="1"/>
+          <p:nvPr/>
+        </p:nvSpPr>
+        <p:spPr>
+          <a:xfrm>
+            <a:off x="4596836" y="4930870"/>
             <a:ext cx="1463040" cy="548640"/>
           </a:xfrm>
           <a:prstGeom prst="rect">
@@ -9306,13 +13463,13 @@
       </p:sp>
       <p:sp>
         <p:nvSpPr>
-          <p:cNvPr id="25" name="Shape 23"/>
+          <p:cNvPr id="27" name="Shape 25"/>
           <p:cNvSpPr/>
           <p:nvPr/>
         </p:nvSpPr>
         <p:spPr>
           <a:xfrm>
-            <a:off x="2037145" y="5464793"/>
+            <a:off x="3491561" y="5501909"/>
             <a:ext cx="1463040" cy="548640"/>
           </a:xfrm>
           <a:prstGeom prst="roundRect">
@@ -9333,13 +13490,13 @@
       </p:sp>
       <p:sp>
         <p:nvSpPr>
-          <p:cNvPr id="26" name="Text 24"/>
-          <p:cNvSpPr txBox="1"/>
-          <p:nvPr/>
-        </p:nvSpPr>
-        <p:spPr>
-          <a:xfrm>
-            <a:off x="2037145" y="5464793"/>
+          <p:cNvPr id="28" name="Text 26"/>
+          <p:cNvSpPr txBox="1"/>
+          <p:nvPr/>
+        </p:nvSpPr>
+        <p:spPr>
+          <a:xfrm>
+            <a:off x="3491561" y="5501909"/>
             <a:ext cx="1463040" cy="548640"/>
           </a:xfrm>
           <a:prstGeom prst="rect">
@@ -9372,13 +13529,13 @@
       </p:sp>
       <p:sp>
         <p:nvSpPr>
-          <p:cNvPr id="27" name="Shape 25"/>
+          <p:cNvPr id="29" name="Shape 27"/>
           <p:cNvSpPr/>
           <p:nvPr/>
         </p:nvSpPr>
         <p:spPr>
           <a:xfrm>
-            <a:off x="815311" y="4640580"/>
+            <a:off x="2177719" y="5501909"/>
             <a:ext cx="1463040" cy="548640"/>
           </a:xfrm>
           <a:prstGeom prst="roundRect">
@@ -9399,13 +13556,13 @@
       </p:sp>
       <p:sp>
         <p:nvSpPr>
-          <p:cNvPr id="28" name="Text 26"/>
-          <p:cNvSpPr txBox="1"/>
-          <p:nvPr/>
-        </p:nvSpPr>
-        <p:spPr>
-          <a:xfrm>
-            <a:off x="815311" y="4640580"/>
+          <p:cNvPr id="30" name="Text 28"/>
+          <p:cNvSpPr txBox="1"/>
+          <p:nvPr/>
+        </p:nvSpPr>
+        <p:spPr>
+          <a:xfrm>
+            <a:off x="2177719" y="5501909"/>
             <a:ext cx="1463040" cy="548640"/>
           </a:xfrm>
           <a:prstGeom prst="rect">
@@ -9438,13 +13595,13 @@
       </p:sp>
       <p:sp>
         <p:nvSpPr>
-          <p:cNvPr id="29" name="Shape 27"/>
+          <p:cNvPr id="31" name="Shape 29"/>
           <p:cNvSpPr/>
           <p:nvPr/>
         </p:nvSpPr>
         <p:spPr>
           <a:xfrm>
-            <a:off x="538344" y="3377813"/>
+            <a:off x="1072444" y="4930870"/>
             <a:ext cx="1463040" cy="548640"/>
           </a:xfrm>
           <a:prstGeom prst="roundRect">
@@ -9465,13 +13622,13 @@
       </p:sp>
       <p:sp>
         <p:nvSpPr>
-          <p:cNvPr id="30" name="Text 28"/>
-          <p:cNvSpPr txBox="1"/>
-          <p:nvPr/>
-        </p:nvSpPr>
-        <p:spPr>
-          <a:xfrm>
-            <a:off x="538344" y="3377813"/>
+          <p:cNvPr id="32" name="Text 30"/>
+          <p:cNvSpPr txBox="1"/>
+          <p:nvPr/>
+        </p:nvSpPr>
+        <p:spPr>
+          <a:xfrm>
+            <a:off x="1072444" y="4930870"/>
             <a:ext cx="1463040" cy="548640"/>
           </a:xfrm>
           <a:prstGeom prst="rect">
@@ -9504,13 +13661,13 @@
       </p:sp>
       <p:sp>
         <p:nvSpPr>
-          <p:cNvPr id="31" name="Shape 29"/>
+          <p:cNvPr id="33" name="Shape 31"/>
           <p:cNvSpPr/>
           <p:nvPr/>
         </p:nvSpPr>
         <p:spPr>
           <a:xfrm>
-            <a:off x="1335839" y="2267354"/>
+            <a:off x="526654" y="3970092"/>
             <a:ext cx="1463040" cy="548640"/>
           </a:xfrm>
           <a:prstGeom prst="roundRect">
@@ -9531,13 +13688,13 @@
       </p:sp>
       <p:sp>
         <p:nvSpPr>
-          <p:cNvPr id="32" name="Text 30"/>
-          <p:cNvSpPr txBox="1"/>
-          <p:nvPr/>
-        </p:nvSpPr>
-        <p:spPr>
-          <a:xfrm>
-            <a:off x="1335839" y="2267354"/>
+          <p:cNvPr id="34" name="Text 32"/>
+          <p:cNvSpPr txBox="1"/>
+          <p:nvPr/>
+        </p:nvSpPr>
+        <p:spPr>
+          <a:xfrm>
+            <a:off x="526654" y="3970092"/>
             <a:ext cx="1463040" cy="548640"/>
           </a:xfrm>
           <a:prstGeom prst="rect">
@@ -9562,6 +13719,138 @@
                 <a:ea typeface="Calibri" pitchFamily="34" charset="-122"/>
                 <a:cs typeface="Calibri" pitchFamily="34" charset="-120"/>
               </a:rPr>
+              <a:t>Billing &amp; Insurance</a:t>
+            </a:r>
+            <a:endParaRPr lang="en-US" sz="1150" dirty="0"/>
+          </a:p>
+        </p:txBody>
+      </p:sp>
+      <p:sp>
+        <p:nvSpPr>
+          <p:cNvPr id="35" name="Shape 33"/>
+          <p:cNvSpPr/>
+          <p:nvPr/>
+        </p:nvSpPr>
+        <p:spPr>
+          <a:xfrm>
+            <a:off x="713633" y="2924616"/>
+            <a:ext cx="1463040" cy="548640"/>
+          </a:xfrm>
+          <a:prstGeom prst="roundRect">
+            <a:avLst>
+              <a:gd name="adj" fmla="val 20000"/>
+            </a:avLst>
+          </a:prstGeom>
+          <a:solidFill>
+            <a:srgbClr val="CCFBF1"/>
+          </a:solidFill>
+          <a:ln w="12700">
+            <a:solidFill>
+              <a:srgbClr val="14B8A6"/>
+            </a:solidFill>
+            <a:prstDash val="solid"/>
+          </a:ln>
+        </p:spPr>
+      </p:sp>
+      <p:sp>
+        <p:nvSpPr>
+          <p:cNvPr id="36" name="Text 34"/>
+          <p:cNvSpPr txBox="1"/>
+          <p:nvPr/>
+        </p:nvSpPr>
+        <p:spPr>
+          <a:xfrm>
+            <a:off x="713633" y="2924616"/>
+            <a:ext cx="1463040" cy="548640"/>
+          </a:xfrm>
+          <a:prstGeom prst="rect">
+            <a:avLst/>
+          </a:prstGeom>
+          <a:noFill/>
+          <a:ln/>
+        </p:spPr>
+        <p:txBody>
+          <a:bodyPr wrap="square" lIns="0" tIns="0" rIns="0" bIns="0" rtlCol="0" anchor="ctr"/>
+          <a:lstStyle/>
+          <a:p>
+            <a:pPr algn="ctr" indent="0" marL="0">
+              <a:buNone/>
+            </a:pPr>
+            <a:r>
+              <a:rPr lang="en-US" sz="1150" b="1" dirty="0">
+                <a:solidFill>
+                  <a:srgbClr val="0F172A"/>
+                </a:solidFill>
+                <a:latin typeface="Calibri" pitchFamily="34" charset="0"/>
+                <a:ea typeface="Calibri" pitchFamily="34" charset="-122"/>
+                <a:cs typeface="Calibri" pitchFamily="34" charset="-120"/>
+              </a:rPr>
+              <a:t>Ambulance Dispatch</a:t>
+            </a:r>
+            <a:endParaRPr lang="en-US" sz="1150" dirty="0"/>
+          </a:p>
+        </p:txBody>
+      </p:sp>
+      <p:sp>
+        <p:nvSpPr>
+          <p:cNvPr id="37" name="Shape 35"/>
+          <p:cNvSpPr/>
+          <p:nvPr/>
+        </p:nvSpPr>
+        <p:spPr>
+          <a:xfrm>
+            <a:off x="1574017" y="2126373"/>
+            <a:ext cx="1463040" cy="548640"/>
+          </a:xfrm>
+          <a:prstGeom prst="roundRect">
+            <a:avLst>
+              <a:gd name="adj" fmla="val 20000"/>
+            </a:avLst>
+          </a:prstGeom>
+          <a:solidFill>
+            <a:srgbClr val="CCFBF1"/>
+          </a:solidFill>
+          <a:ln w="12700">
+            <a:solidFill>
+              <a:srgbClr val="14B8A6"/>
+            </a:solidFill>
+            <a:prstDash val="solid"/>
+          </a:ln>
+        </p:spPr>
+      </p:sp>
+      <p:sp>
+        <p:nvSpPr>
+          <p:cNvPr id="38" name="Text 36"/>
+          <p:cNvSpPr txBox="1"/>
+          <p:nvPr/>
+        </p:nvSpPr>
+        <p:spPr>
+          <a:xfrm>
+            <a:off x="1574017" y="2126373"/>
+            <a:ext cx="1463040" cy="548640"/>
+          </a:xfrm>
+          <a:prstGeom prst="rect">
+            <a:avLst/>
+          </a:prstGeom>
+          <a:noFill/>
+          <a:ln/>
+        </p:spPr>
+        <p:txBody>
+          <a:bodyPr wrap="square" lIns="0" tIns="0" rIns="0" bIns="0" rtlCol="0" anchor="ctr"/>
+          <a:lstStyle/>
+          <a:p>
+            <a:pPr algn="ctr" indent="0" marL="0">
+              <a:buNone/>
+            </a:pPr>
+            <a:r>
+              <a:rPr lang="en-US" sz="1150" b="1" dirty="0">
+                <a:solidFill>
+                  <a:srgbClr val="0F172A"/>
+                </a:solidFill>
+                <a:latin typeface="Calibri" pitchFamily="34" charset="0"/>
+                <a:ea typeface="Calibri" pitchFamily="34" charset="-122"/>
+                <a:cs typeface="Calibri" pitchFamily="34" charset="-120"/>
+              </a:rPr>
               <a:t>Notification</a:t>
             </a:r>
             <a:endParaRPr lang="en-US" sz="1150" dirty="0"/>
@@ -9570,7 +13859,7 @@
       </p:sp>
       <p:sp>
         <p:nvSpPr>
-          <p:cNvPr id="33" name="Shape 31"/>
+          <p:cNvPr id="39" name="Shape 37"/>
           <p:cNvSpPr/>
           <p:nvPr/>
         </p:nvSpPr>
@@ -9595,7 +13884,7 @@
       </p:sp>
       <p:sp>
         <p:nvSpPr>
-          <p:cNvPr id="34" name="Text 32"/>
+          <p:cNvPr id="40" name="Text 38"/>
           <p:cNvSpPr txBox="1"/>
           <p:nvPr/>
         </p:nvSpPr>
@@ -9634,7 +13923,7 @@
       </p:sp>
       <p:sp>
         <p:nvSpPr>
-          <p:cNvPr id="35" name="Text 33"/>
+          <p:cNvPr id="41" name="Text 39"/>
           <p:cNvSpPr txBox="1"/>
           <p:nvPr/>
         </p:nvSpPr>
@@ -9673,7 +13962,7 @@
       </p:sp>
       <p:sp>
         <p:nvSpPr>
-          <p:cNvPr id="36" name="Text 34"/>
+          <p:cNvPr id="42" name="Text 40"/>
           <p:cNvSpPr txBox="1"/>
           <p:nvPr/>
         </p:nvSpPr>
@@ -9712,7 +14001,7 @@
       </p:sp>
       <p:sp>
         <p:nvSpPr>
-          <p:cNvPr id="37" name="Shape 35"/>
+          <p:cNvPr id="43" name="Shape 41"/>
           <p:cNvSpPr/>
           <p:nvPr/>
         </p:nvSpPr>
@@ -9737,7 +14026,7 @@
       </p:sp>
       <p:sp>
         <p:nvSpPr>
-          <p:cNvPr id="38" name="Text 36"/>
+          <p:cNvPr id="44" name="Text 42"/>
           <p:cNvSpPr txBox="1"/>
           <p:nvPr/>
         </p:nvSpPr>
@@ -9776,7 +14065,7 @@
       </p:sp>
       <p:sp>
         <p:nvSpPr>
-          <p:cNvPr id="39" name="Text 37"/>
+          <p:cNvPr id="45" name="Text 43"/>
           <p:cNvSpPr txBox="1"/>
           <p:nvPr/>
         </p:nvSpPr>
@@ -9815,7 +14104,7 @@
       </p:sp>
       <p:sp>
         <p:nvSpPr>
-          <p:cNvPr id="40" name="Text 38"/>
+          <p:cNvPr id="46" name="Text 44"/>
           <p:cNvSpPr txBox="1"/>
           <p:nvPr/>
         </p:nvSpPr>
@@ -9854,7 +14143,7 @@
       </p:sp>
       <p:sp>
         <p:nvSpPr>
-          <p:cNvPr id="41" name="Shape 39"/>
+          <p:cNvPr id="47" name="Shape 45"/>
           <p:cNvSpPr/>
           <p:nvPr/>
         </p:nvSpPr>
@@ -9879,7 +14168,7 @@
       </p:sp>
       <p:sp>
         <p:nvSpPr>
-          <p:cNvPr id="42" name="Text 40"/>
+          <p:cNvPr id="48" name="Text 46"/>
           <p:cNvSpPr txBox="1"/>
           <p:nvPr/>
         </p:nvSpPr>
@@ -9918,7 +14207,7 @@
       </p:sp>
       <p:sp>
         <p:nvSpPr>
-          <p:cNvPr id="43" name="Text 41"/>
+          <p:cNvPr id="49" name="Text 47"/>
           <p:cNvSpPr txBox="1"/>
           <p:nvPr/>
         </p:nvSpPr>
@@ -9957,7 +14246,7 @@
       </p:sp>
       <p:sp>
         <p:nvSpPr>
-          <p:cNvPr id="44" name="Text 42"/>
+          <p:cNvPr id="50" name="Text 48"/>
           <p:cNvSpPr txBox="1"/>
           <p:nvPr/>
         </p:nvSpPr>
@@ -9996,7 +14285,7 @@
       </p:sp>
       <p:sp>
         <p:nvSpPr>
-          <p:cNvPr id="45" name="Shape 43"/>
+          <p:cNvPr id="51" name="Shape 49"/>
           <p:cNvSpPr/>
           <p:nvPr/>
         </p:nvSpPr>
@@ -10021,7 +14310,7 @@
       </p:sp>
       <p:sp>
         <p:nvSpPr>
-          <p:cNvPr id="46" name="Text 44"/>
+          <p:cNvPr id="52" name="Text 50"/>
           <p:cNvSpPr txBox="1"/>
           <p:nvPr/>
         </p:nvSpPr>
@@ -10060,7 +14349,7 @@
       </p:sp>
       <p:sp>
         <p:nvSpPr>
-          <p:cNvPr id="47" name="Text 45"/>
+          <p:cNvPr id="53" name="Text 51"/>
           <p:cNvSpPr txBox="1"/>
           <p:nvPr/>
         </p:nvSpPr>
@@ -10099,7 +14388,7 @@
       </p:sp>
       <p:sp>
         <p:nvSpPr>
-          <p:cNvPr id="48" name="Text 46"/>
+          <p:cNvPr id="54" name="Text 52"/>
           <p:cNvSpPr txBox="1"/>
           <p:nvPr/>
         </p:nvSpPr>
@@ -10138,7 +14427,7 @@
       </p:sp>
       <p:sp>
         <p:nvSpPr>
-          <p:cNvPr id="49" name="Text 47"/>
+          <p:cNvPr id="55" name="Text 53"/>
           <p:cNvSpPr txBox="1"/>
           <p:nvPr/>
         </p:nvSpPr>
@@ -10751,7 +15040,7 @@
                 <a:ea typeface="Calibri" pitchFamily="34" charset="-122"/>
                 <a:cs typeface="Calibri" pitchFamily="34" charset="-120"/>
               </a:rPr>
-              <a:t>9 domain agents proposing explainable actions</a:t>
+              <a:t>11 domain agents proposing explainable actions</a:t>
             </a:r>
             <a:endParaRPr lang="en-US" sz="1150" dirty="0"/>
           </a:p>
@@ -14433,7 +18722,7 @@
                 <a:ea typeface="Calibri" pitchFamily="34" charset="-122"/>
                 <a:cs typeface="Calibri" pitchFamily="34" charset="-120"/>
               </a:rPr>
-              <a:t>TF-IDF + logistic regression over 12 intents; optional Claude with JSON-schema output</a:t>
+              <a:t>TF-IDF + logistic regression over 14 intents, Hinglish normalisation; optional Claude with JSON-schema output</a:t>
             </a:r>
             <a:endParaRPr lang="en-US" sz="1350" dirty="0"/>
           </a:p>
@@ -14596,8 +18885,8 @@
         </p:nvSpPr>
         <p:spPr>
           <a:xfrm>
-            <a:off x="881315" y="1463040"/>
-            <a:ext cx="5461129" cy="4206240"/>
+            <a:off x="615574" y="1463040"/>
+            <a:ext cx="5992612" cy="4206240"/>
           </a:xfrm>
           <a:prstGeom prst="roundRect">
             <a:avLst>
@@ -14638,8 +18927,8 @@
         </p:blipFill>
         <p:spPr>
           <a:xfrm>
-            <a:off x="954467" y="1536192"/>
-            <a:ext cx="5314825" cy="4059936"/>
+            <a:off x="688726" y="1536192"/>
+            <a:ext cx="5846308" cy="4059936"/>
           </a:xfrm>
           <a:prstGeom prst="rect">
             <a:avLst/>
